--- a/images/nwb_datatypes_overview.pptx
+++ b/images/nwb_datatypes_overview.pptx
@@ -5,7 +5,10 @@
     <p:sldMasterId id="2147483648" r:id="rId1"/>
   </p:sldMasterIdLst>
   <p:sldIdLst>
-    <p:sldId id="256" r:id="rId2"/>
+    <p:sldId id="259" r:id="rId2"/>
+    <p:sldId id="258" r:id="rId3"/>
+    <p:sldId id="256" r:id="rId4"/>
+    <p:sldId id="257" r:id="rId5"/>
   </p:sldIdLst>
   <p:sldSz cx="9144000" cy="6858000" type="screen4x3"/>
   <p:notesSz cx="6858000" cy="9144000"/>
@@ -288,7 +291,7 @@
           <a:p>
             <a:fld id="{31907A7A-AD50-B240-83BF-5B3527147289}" type="datetimeFigureOut">
               <a:rPr lang="en-US" smtClean="0"/>
-              <a:t>9/18/19</a:t>
+              <a:t>2/25/20</a:t>
             </a:fld>
             <a:endParaRPr lang="en-US"/>
           </a:p>
@@ -458,7 +461,7 @@
           <a:p>
             <a:fld id="{31907A7A-AD50-B240-83BF-5B3527147289}" type="datetimeFigureOut">
               <a:rPr lang="en-US" smtClean="0"/>
-              <a:t>9/18/19</a:t>
+              <a:t>2/25/20</a:t>
             </a:fld>
             <a:endParaRPr lang="en-US"/>
           </a:p>
@@ -638,7 +641,7 @@
           <a:p>
             <a:fld id="{31907A7A-AD50-B240-83BF-5B3527147289}" type="datetimeFigureOut">
               <a:rPr lang="en-US" smtClean="0"/>
-              <a:t>9/18/19</a:t>
+              <a:t>2/25/20</a:t>
             </a:fld>
             <a:endParaRPr lang="en-US"/>
           </a:p>
@@ -808,7 +811,7 @@
           <a:p>
             <a:fld id="{31907A7A-AD50-B240-83BF-5B3527147289}" type="datetimeFigureOut">
               <a:rPr lang="en-US" smtClean="0"/>
-              <a:t>9/18/19</a:t>
+              <a:t>2/25/20</a:t>
             </a:fld>
             <a:endParaRPr lang="en-US"/>
           </a:p>
@@ -1054,7 +1057,7 @@
           <a:p>
             <a:fld id="{31907A7A-AD50-B240-83BF-5B3527147289}" type="datetimeFigureOut">
               <a:rPr lang="en-US" smtClean="0"/>
-              <a:t>9/18/19</a:t>
+              <a:t>2/25/20</a:t>
             </a:fld>
             <a:endParaRPr lang="en-US"/>
           </a:p>
@@ -1342,7 +1345,7 @@
           <a:p>
             <a:fld id="{31907A7A-AD50-B240-83BF-5B3527147289}" type="datetimeFigureOut">
               <a:rPr lang="en-US" smtClean="0"/>
-              <a:t>9/18/19</a:t>
+              <a:t>2/25/20</a:t>
             </a:fld>
             <a:endParaRPr lang="en-US"/>
           </a:p>
@@ -1764,7 +1767,7 @@
           <a:p>
             <a:fld id="{31907A7A-AD50-B240-83BF-5B3527147289}" type="datetimeFigureOut">
               <a:rPr lang="en-US" smtClean="0"/>
-              <a:t>9/18/19</a:t>
+              <a:t>2/25/20</a:t>
             </a:fld>
             <a:endParaRPr lang="en-US"/>
           </a:p>
@@ -1882,7 +1885,7 @@
           <a:p>
             <a:fld id="{31907A7A-AD50-B240-83BF-5B3527147289}" type="datetimeFigureOut">
               <a:rPr lang="en-US" smtClean="0"/>
-              <a:t>9/18/19</a:t>
+              <a:t>2/25/20</a:t>
             </a:fld>
             <a:endParaRPr lang="en-US"/>
           </a:p>
@@ -1977,7 +1980,7 @@
           <a:p>
             <a:fld id="{31907A7A-AD50-B240-83BF-5B3527147289}" type="datetimeFigureOut">
               <a:rPr lang="en-US" smtClean="0"/>
-              <a:t>9/18/19</a:t>
+              <a:t>2/25/20</a:t>
             </a:fld>
             <a:endParaRPr lang="en-US"/>
           </a:p>
@@ -2254,7 +2257,7 @@
           <a:p>
             <a:fld id="{31907A7A-AD50-B240-83BF-5B3527147289}" type="datetimeFigureOut">
               <a:rPr lang="en-US" smtClean="0"/>
-              <a:t>9/18/19</a:t>
+              <a:t>2/25/20</a:t>
             </a:fld>
             <a:endParaRPr lang="en-US"/>
           </a:p>
@@ -2507,7 +2510,7 @@
           <a:p>
             <a:fld id="{31907A7A-AD50-B240-83BF-5B3527147289}" type="datetimeFigureOut">
               <a:rPr lang="en-US" smtClean="0"/>
-              <a:t>9/18/19</a:t>
+              <a:t>2/25/20</a:t>
             </a:fld>
             <a:endParaRPr lang="en-US"/>
           </a:p>
@@ -2720,7 +2723,7 @@
           <a:p>
             <a:fld id="{31907A7A-AD50-B240-83BF-5B3527147289}" type="datetimeFigureOut">
               <a:rPr lang="en-US" smtClean="0"/>
-              <a:t>9/18/19</a:t>
+              <a:t>2/25/20</a:t>
             </a:fld>
             <a:endParaRPr lang="en-US"/>
           </a:p>
@@ -3097,7 +3100,7 @@
       </p:grpSpPr>
       <p:pic>
         <p:nvPicPr>
-          <p:cNvPr id="92" name="Picture 91" descr="(B).jpg"/>
+          <p:cNvPr id="4" name="Picture 3" descr="(B).jpg"/>
           <p:cNvPicPr>
             <a:picLocks noChangeAspect="1"/>
           </p:cNvPicPr>
@@ -3116,7 +3119,7 @@
         </p:blipFill>
         <p:spPr>
           <a:xfrm>
-            <a:off x="3252902" y="2320215"/>
+            <a:off x="3252902" y="2264520"/>
             <a:ext cx="2566012" cy="1504408"/>
           </a:xfrm>
           <a:prstGeom prst="rect">
@@ -3126,214 +3129,7 @@
       </p:pic>
       <p:sp>
         <p:nvSpPr>
-          <p:cNvPr id="48" name="Google Shape;91;p1">
-            <a:extLst>
-              <a:ext uri="{FF2B5EF4-FFF2-40B4-BE49-F238E27FC236}">
-                <a16:creationId xmlns:a16="http://schemas.microsoft.com/office/drawing/2014/main" xmlns="" id="{AD5DFFC3-2D58-4C9B-9B23-9CBAC35FD9F8}"/>
-              </a:ext>
-            </a:extLst>
-          </p:cNvPr>
-          <p:cNvSpPr/>
-          <p:nvPr/>
-        </p:nvSpPr>
-        <p:spPr>
-          <a:xfrm>
-            <a:off x="6803173" y="1978300"/>
-            <a:ext cx="1872929" cy="855299"/>
-          </a:xfrm>
-          <a:prstGeom prst="roundRect">
-            <a:avLst>
-              <a:gd name="adj" fmla="val 0"/>
-            </a:avLst>
-          </a:prstGeom>
-          <a:solidFill>
-            <a:srgbClr val="15374A"/>
-          </a:solidFill>
-          <a:ln w="9525" cap="flat" cmpd="sng">
-            <a:solidFill>
-              <a:srgbClr val="194963"/>
-            </a:solidFill>
-            <a:prstDash val="solid"/>
-            <a:round/>
-            <a:headEnd type="none" w="sm" len="sm"/>
-            <a:tailEnd type="none" w="sm" len="sm"/>
-          </a:ln>
-        </p:spPr>
-        <p:txBody>
-          <a:bodyPr spcFirstLastPara="1" wrap="square" lIns="91425" tIns="45700" rIns="91425" bIns="45700" anchor="t" anchorCtr="0">
-            <a:noAutofit/>
-          </a:bodyPr>
-          <a:lstStyle/>
-          <a:p>
-            <a:pPr marL="115888" marR="0" lvl="0" indent="-115888" algn="l" rtl="0">
-              <a:spcBef>
-                <a:spcPts val="0"/>
-              </a:spcBef>
-              <a:spcAft>
-                <a:spcPts val="0"/>
-              </a:spcAft>
-              <a:buClr>
-                <a:srgbClr val="FFFFFF"/>
-              </a:buClr>
-              <a:buSzPts val="1200"/>
-              <a:buFont typeface="Arial"/>
-              <a:buChar char="•"/>
-            </a:pPr>
-            <a:r>
-              <a:rPr lang="en-US" sz="1200" dirty="0">
-                <a:solidFill>
-                  <a:srgbClr val="FFFFFF"/>
-                </a:solidFill>
-                <a:latin typeface="Calibri"/>
-                <a:ea typeface="Calibri"/>
-                <a:cs typeface="Calibri"/>
-                <a:sym typeface="Calibri"/>
-              </a:rPr>
-              <a:t>Species</a:t>
-            </a:r>
-          </a:p>
-          <a:p>
-            <a:pPr marL="115888" marR="0" lvl="0" indent="-115888" algn="l" rtl="0">
-              <a:spcBef>
-                <a:spcPts val="0"/>
-              </a:spcBef>
-              <a:spcAft>
-                <a:spcPts val="0"/>
-              </a:spcAft>
-              <a:buClr>
-                <a:srgbClr val="FFFFFF"/>
-              </a:buClr>
-              <a:buSzPts val="1200"/>
-              <a:buFont typeface="Arial"/>
-              <a:buChar char="•"/>
-            </a:pPr>
-            <a:r>
-              <a:rPr lang="en-US" sz="1200" dirty="0">
-                <a:solidFill>
-                  <a:srgbClr val="FFFFFF"/>
-                </a:solidFill>
-                <a:latin typeface="Calibri"/>
-                <a:ea typeface="Calibri"/>
-                <a:cs typeface="Calibri"/>
-                <a:sym typeface="Calibri"/>
-              </a:rPr>
-              <a:t>Genotype</a:t>
-            </a:r>
-          </a:p>
-          <a:p>
-            <a:pPr marL="115888" marR="0" lvl="0" indent="-115888" algn="l" rtl="0">
-              <a:spcBef>
-                <a:spcPts val="0"/>
-              </a:spcBef>
-              <a:spcAft>
-                <a:spcPts val="0"/>
-              </a:spcAft>
-              <a:buClr>
-                <a:srgbClr val="FFFFFF"/>
-              </a:buClr>
-              <a:buSzPts val="1200"/>
-              <a:buFont typeface="Arial"/>
-              <a:buChar char="•"/>
-            </a:pPr>
-            <a:r>
-              <a:rPr lang="en-US" sz="1200" dirty="0">
-                <a:solidFill>
-                  <a:srgbClr val="FFFFFF"/>
-                </a:solidFill>
-                <a:latin typeface="Calibri"/>
-                <a:ea typeface="Calibri"/>
-                <a:cs typeface="Calibri"/>
-                <a:sym typeface="Calibri"/>
-              </a:rPr>
-              <a:t>Age</a:t>
-            </a:r>
-          </a:p>
-          <a:p>
-            <a:pPr marL="115888" marR="0" lvl="0" indent="-115888" algn="l" rtl="0">
-              <a:spcBef>
-                <a:spcPts val="0"/>
-              </a:spcBef>
-              <a:spcAft>
-                <a:spcPts val="0"/>
-              </a:spcAft>
-              <a:buClr>
-                <a:srgbClr val="FFFFFF"/>
-              </a:buClr>
-              <a:buSzPts val="1200"/>
-              <a:buFont typeface="Arial"/>
-              <a:buChar char="•"/>
-            </a:pPr>
-            <a:r>
-              <a:rPr lang="en-US" sz="1200" dirty="0">
-                <a:solidFill>
-                  <a:srgbClr val="FFFFFF"/>
-                </a:solidFill>
-                <a:latin typeface="Calibri"/>
-                <a:ea typeface="Calibri"/>
-                <a:cs typeface="Calibri"/>
-                <a:sym typeface="Calibri"/>
-              </a:rPr>
-              <a:t>Weight</a:t>
-            </a:r>
-          </a:p>
-          <a:p>
-            <a:pPr marL="115888" marR="0" lvl="0" indent="-115888" algn="l" rtl="0">
-              <a:spcBef>
-                <a:spcPts val="0"/>
-              </a:spcBef>
-              <a:spcAft>
-                <a:spcPts val="0"/>
-              </a:spcAft>
-              <a:buClr>
-                <a:srgbClr val="FFFFFF"/>
-              </a:buClr>
-              <a:buSzPts val="1200"/>
-              <a:buFont typeface="Arial"/>
-              <a:buChar char="•"/>
-            </a:pPr>
-            <a:endParaRPr sz="1200" dirty="0">
-              <a:solidFill>
-                <a:srgbClr val="FFFFFF"/>
-              </a:solidFill>
-              <a:latin typeface="Calibri"/>
-              <a:ea typeface="Calibri"/>
-              <a:cs typeface="Calibri"/>
-              <a:sym typeface="Calibri"/>
-            </a:endParaRPr>
-          </a:p>
-          <a:p>
-            <a:pPr marL="0" marR="0" lvl="0" indent="0" algn="l" rtl="0">
-              <a:lnSpc>
-                <a:spcPct val="100000"/>
-              </a:lnSpc>
-              <a:spcBef>
-                <a:spcPts val="0"/>
-              </a:spcBef>
-              <a:spcAft>
-                <a:spcPts val="0"/>
-              </a:spcAft>
-              <a:buClr>
-                <a:schemeClr val="dk1"/>
-              </a:buClr>
-              <a:buSzPts val="1200"/>
-              <a:buFont typeface="Calibri"/>
-              <a:buNone/>
-            </a:pPr>
-            <a:endParaRPr sz="1200" b="0" i="0" u="none" strike="noStrike" cap="none" dirty="0">
-              <a:solidFill>
-                <a:srgbClr val="FFFFFF"/>
-              </a:solidFill>
-              <a:latin typeface="Calibri"/>
-              <a:ea typeface="Calibri"/>
-              <a:cs typeface="Calibri"/>
-              <a:sym typeface="Calibri"/>
-            </a:endParaRPr>
-          </a:p>
-        </p:txBody>
-      </p:sp>
-      <p:sp>
-        <p:nvSpPr>
-          <p:cNvPr id="49" name="Google Shape;95;p1">
+          <p:cNvPr id="5" name="Google Shape;95;p1">
             <a:extLst>
               <a:ext uri="{FF2B5EF4-FFF2-40B4-BE49-F238E27FC236}">
                 <a16:creationId xmlns:a16="http://schemas.microsoft.com/office/drawing/2014/main" xmlns="" id="{B0D7C0F7-E63D-4170-99D4-9935E55240F5}"/>
@@ -3345,7 +3141,7 @@
         </p:nvSpPr>
         <p:spPr>
           <a:xfrm>
-            <a:off x="3475033" y="767388"/>
+            <a:off x="3475033" y="711693"/>
             <a:ext cx="2141787" cy="246221"/>
           </a:xfrm>
           <a:prstGeom prst="rect">
@@ -3429,7 +3225,7 @@
       </p:sp>
       <p:sp>
         <p:nvSpPr>
-          <p:cNvPr id="50" name="Google Shape;96;p1">
+          <p:cNvPr id="6" name="Google Shape;96;p1">
             <a:extLst>
               <a:ext uri="{FF2B5EF4-FFF2-40B4-BE49-F238E27FC236}">
                 <a16:creationId xmlns:a16="http://schemas.microsoft.com/office/drawing/2014/main" xmlns="" id="{C9B8C793-A660-4A21-8EF2-A633DC442778}"/>
@@ -3441,7 +3237,7 @@
         </p:nvSpPr>
         <p:spPr>
           <a:xfrm>
-            <a:off x="3475033" y="1017800"/>
+            <a:off x="3475033" y="962105"/>
             <a:ext cx="2095881" cy="869675"/>
           </a:xfrm>
           <a:prstGeom prst="roundRect">
@@ -3453,9 +3249,7 @@
             <a:srgbClr val="15374A"/>
           </a:solidFill>
           <a:ln w="9525" cap="flat" cmpd="sng">
-            <a:solidFill>
-              <a:srgbClr val="194963"/>
-            </a:solidFill>
+            <a:noFill/>
             <a:prstDash val="solid"/>
             <a:round/>
             <a:headEnd type="none" w="sm" len="sm"/>
@@ -3600,101 +3394,7 @@
       </p:sp>
       <p:sp>
         <p:nvSpPr>
-          <p:cNvPr id="52" name="Google Shape;90;p1">
-            <a:extLst>
-              <a:ext uri="{FF2B5EF4-FFF2-40B4-BE49-F238E27FC236}">
-                <a16:creationId xmlns:a16="http://schemas.microsoft.com/office/drawing/2014/main" xmlns="" id="{EEF72B0E-9CCF-4E7F-B810-DC35A08F7578}"/>
-              </a:ext>
-            </a:extLst>
-          </p:cNvPr>
-          <p:cNvSpPr txBox="1"/>
-          <p:nvPr/>
-        </p:nvSpPr>
-        <p:spPr>
-          <a:xfrm>
-            <a:off x="6930969" y="1476937"/>
-            <a:ext cx="1758372" cy="492443"/>
-          </a:xfrm>
-          <a:prstGeom prst="rect">
-            <a:avLst/>
-          </a:prstGeom>
-          <a:noFill/>
-          <a:ln>
-            <a:noFill/>
-          </a:ln>
-        </p:spPr>
-        <p:txBody>
-          <a:bodyPr spcFirstLastPara="1" wrap="square" lIns="0" tIns="0" rIns="0" bIns="0" anchor="t" anchorCtr="0">
-            <a:spAutoFit/>
-          </a:bodyPr>
-          <a:lstStyle/>
-          <a:p>
-            <a:pPr marL="0" marR="0" lvl="0" indent="0" algn="l" rtl="0">
-              <a:lnSpc>
-                <a:spcPct val="100000"/>
-              </a:lnSpc>
-              <a:spcBef>
-                <a:spcPts val="0"/>
-              </a:spcBef>
-              <a:spcAft>
-                <a:spcPts val="0"/>
-              </a:spcAft>
-              <a:buClr>
-                <a:srgbClr val="15374A"/>
-              </a:buClr>
-              <a:buSzPts val="1200"/>
-              <a:buFont typeface="Calibri"/>
-              <a:buNone/>
-            </a:pPr>
-            <a:r>
-              <a:rPr lang="en-US" sz="1600" b="1" i="0" u="none" strike="noStrike" cap="none" dirty="0">
-                <a:solidFill>
-                  <a:srgbClr val="15374A"/>
-                </a:solidFill>
-                <a:latin typeface="Calibri"/>
-                <a:ea typeface="Calibri"/>
-                <a:cs typeface="Calibri"/>
-                <a:sym typeface="Calibri"/>
-              </a:rPr>
-              <a:t>Experimental </a:t>
-            </a:r>
-          </a:p>
-          <a:p>
-            <a:pPr marL="0" marR="0" lvl="0" indent="0" algn="l" rtl="0">
-              <a:lnSpc>
-                <a:spcPct val="100000"/>
-              </a:lnSpc>
-              <a:spcBef>
-                <a:spcPts val="0"/>
-              </a:spcBef>
-              <a:spcAft>
-                <a:spcPts val="0"/>
-              </a:spcAft>
-              <a:buClr>
-                <a:srgbClr val="15374A"/>
-              </a:buClr>
-              <a:buSzPts val="1200"/>
-              <a:buFont typeface="Calibri"/>
-              <a:buNone/>
-            </a:pPr>
-            <a:r>
-              <a:rPr lang="en-US" sz="1600" b="1" i="0" u="none" strike="noStrike" cap="none" dirty="0">
-                <a:solidFill>
-                  <a:srgbClr val="15374A"/>
-                </a:solidFill>
-                <a:latin typeface="Calibri"/>
-                <a:ea typeface="Calibri"/>
-                <a:cs typeface="Calibri"/>
-                <a:sym typeface="Calibri"/>
-              </a:rPr>
-              <a:t>Subjects </a:t>
-            </a:r>
-          </a:p>
-        </p:txBody>
-      </p:sp>
-      <p:sp>
-        <p:nvSpPr>
-          <p:cNvPr id="53" name="Google Shape;105;p1">
+          <p:cNvPr id="7" name="Google Shape;105;p1">
             <a:extLst>
               <a:ext uri="{FF2B5EF4-FFF2-40B4-BE49-F238E27FC236}">
                 <a16:creationId xmlns:a16="http://schemas.microsoft.com/office/drawing/2014/main" xmlns="" id="{D1DE1C64-4F2A-4519-BBA3-A55B0CC6FBC4}"/>
@@ -3706,8 +3406,8 @@
         </p:nvSpPr>
         <p:spPr>
           <a:xfrm rot="5400000">
-            <a:off x="4370643" y="1937402"/>
-            <a:ext cx="344976" cy="334598"/>
+            <a:off x="4325000" y="1836065"/>
+            <a:ext cx="436261" cy="334598"/>
           </a:xfrm>
           <a:prstGeom prst="rightArrow">
             <a:avLst>
@@ -3763,7 +3463,7 @@
       </p:sp>
       <p:sp>
         <p:nvSpPr>
-          <p:cNvPr id="54" name="Google Shape;90;p1">
+          <p:cNvPr id="8" name="Google Shape;90;p1">
             <a:extLst>
               <a:ext uri="{FF2B5EF4-FFF2-40B4-BE49-F238E27FC236}">
                 <a16:creationId xmlns:a16="http://schemas.microsoft.com/office/drawing/2014/main" xmlns="" id="{DEAFE1FC-2F64-4F88-A3E4-04CD06110E0F}"/>
@@ -3775,7 +3475,7 @@
         </p:nvSpPr>
         <p:spPr>
           <a:xfrm>
-            <a:off x="534133" y="1731068"/>
+            <a:off x="534133" y="1675373"/>
             <a:ext cx="1758372" cy="246221"/>
           </a:xfrm>
           <a:prstGeom prst="rect">
@@ -3835,7 +3535,7 @@
       </p:sp>
       <p:sp>
         <p:nvSpPr>
-          <p:cNvPr id="55" name="Google Shape;91;p1">
+          <p:cNvPr id="9" name="Google Shape;91;p1">
             <a:extLst>
               <a:ext uri="{FF2B5EF4-FFF2-40B4-BE49-F238E27FC236}">
                 <a16:creationId xmlns:a16="http://schemas.microsoft.com/office/drawing/2014/main" xmlns="" id="{41C2EBB3-5BF7-4F80-947A-B14A03B71943}"/>
@@ -3847,7 +3547,7 @@
         </p:nvSpPr>
         <p:spPr>
           <a:xfrm>
-            <a:off x="534134" y="1978300"/>
+            <a:off x="534134" y="1922605"/>
             <a:ext cx="1872928" cy="855299"/>
           </a:xfrm>
           <a:prstGeom prst="roundRect">
@@ -3859,9 +3559,7 @@
             <a:srgbClr val="15374A"/>
           </a:solidFill>
           <a:ln w="9525" cap="flat" cmpd="sng">
-            <a:solidFill>
-              <a:srgbClr val="194963"/>
-            </a:solidFill>
+            <a:noFill/>
             <a:prstDash val="solid"/>
             <a:round/>
             <a:headEnd type="none" w="sm" len="sm"/>
@@ -4021,7 +3719,7 @@
       </p:sp>
       <p:sp>
         <p:nvSpPr>
-          <p:cNvPr id="56" name="Google Shape;92;p1">
+          <p:cNvPr id="10" name="Google Shape;92;p1">
             <a:extLst>
               <a:ext uri="{FF2B5EF4-FFF2-40B4-BE49-F238E27FC236}">
                 <a16:creationId xmlns:a16="http://schemas.microsoft.com/office/drawing/2014/main" xmlns="" id="{2DA28BAB-00F6-4580-8176-A2700BB88CED}"/>
@@ -4033,7 +3731,7 @@
         </p:nvSpPr>
         <p:spPr>
           <a:xfrm>
-            <a:off x="6210358" y="3616924"/>
+            <a:off x="6523477" y="3046641"/>
             <a:ext cx="1357328" cy="246221"/>
           </a:xfrm>
           <a:prstGeom prst="rect">
@@ -4093,7 +3791,7 @@
       </p:sp>
       <p:sp>
         <p:nvSpPr>
-          <p:cNvPr id="57" name="Google Shape;93;p1">
+          <p:cNvPr id="11" name="Google Shape;93;p1">
             <a:extLst>
               <a:ext uri="{FF2B5EF4-FFF2-40B4-BE49-F238E27FC236}">
                 <a16:creationId xmlns:a16="http://schemas.microsoft.com/office/drawing/2014/main" xmlns="" id="{6CCA3F80-5CC1-4CA1-90B6-3D9BCBBA1553}"/>
@@ -4105,7 +3803,7 @@
         </p:nvSpPr>
         <p:spPr>
           <a:xfrm>
-            <a:off x="6227648" y="3854243"/>
+            <a:off x="6540767" y="3283960"/>
             <a:ext cx="2135335" cy="855299"/>
           </a:xfrm>
           <a:prstGeom prst="roundRect">
@@ -4117,9 +3815,7 @@
             <a:srgbClr val="15374A"/>
           </a:solidFill>
           <a:ln w="9525" cap="flat" cmpd="sng">
-            <a:solidFill>
-              <a:srgbClr val="194963"/>
-            </a:solidFill>
+            <a:noFill/>
             <a:prstDash val="solid"/>
             <a:round/>
             <a:headEnd type="none" w="sm" len="sm"/>
@@ -4278,7 +3974,7 @@
       </p:sp>
       <p:sp>
         <p:nvSpPr>
-          <p:cNvPr id="58" name="Google Shape;92;p1">
+          <p:cNvPr id="12" name="Google Shape;92;p1">
             <a:extLst>
               <a:ext uri="{FF2B5EF4-FFF2-40B4-BE49-F238E27FC236}">
                 <a16:creationId xmlns:a16="http://schemas.microsoft.com/office/drawing/2014/main" xmlns="" id="{FACF2BB3-A2CF-4345-BFAD-509D0EFA7437}"/>
@@ -4290,7 +3986,7 @@
         </p:nvSpPr>
         <p:spPr>
           <a:xfrm>
-            <a:off x="396805" y="3635243"/>
+            <a:off x="142785" y="3247325"/>
             <a:ext cx="1357328" cy="246221"/>
           </a:xfrm>
           <a:prstGeom prst="rect">
@@ -4350,7 +4046,7 @@
       </p:sp>
       <p:sp>
         <p:nvSpPr>
-          <p:cNvPr id="59" name="Google Shape;93;p1">
+          <p:cNvPr id="13" name="Google Shape;93;p1">
             <a:extLst>
               <a:ext uri="{FF2B5EF4-FFF2-40B4-BE49-F238E27FC236}">
                 <a16:creationId xmlns:a16="http://schemas.microsoft.com/office/drawing/2014/main" xmlns="" id="{0D7CCA4B-A9C5-4184-AE8B-08B92D1D5EB2}"/>
@@ -4362,8 +4058,8 @@
         </p:nvSpPr>
         <p:spPr>
           <a:xfrm>
-            <a:off x="414096" y="3872563"/>
-            <a:ext cx="2463140" cy="858970"/>
+            <a:off x="160076" y="3484645"/>
+            <a:ext cx="2463140" cy="654614"/>
           </a:xfrm>
           <a:prstGeom prst="roundRect">
             <a:avLst>
@@ -4374,9 +4070,7 @@
             <a:srgbClr val="15374A"/>
           </a:solidFill>
           <a:ln w="9525" cap="flat" cmpd="sng">
-            <a:solidFill>
-              <a:srgbClr val="194963"/>
-            </a:solidFill>
+            <a:noFill/>
             <a:prstDash val="solid"/>
             <a:round/>
             <a:headEnd type="none" w="sm" len="sm"/>
@@ -4416,8 +4110,29 @@
                 <a:cs typeface="Calibri"/>
                 <a:sym typeface="Calibri"/>
               </a:rPr>
-              <a:t>Extracellular electrophysiology</a:t>
-            </a:r>
+              <a:t>Extracellular </a:t>
+            </a:r>
+            <a:r>
+              <a:rPr lang="en-US" sz="1200" b="0" i="0" u="none" strike="noStrike" cap="none" dirty="0" smtClean="0">
+                <a:solidFill>
+                  <a:srgbClr val="FFFFFF"/>
+                </a:solidFill>
+                <a:latin typeface="Calibri"/>
+                <a:ea typeface="Calibri"/>
+                <a:cs typeface="Calibri"/>
+                <a:sym typeface="Calibri"/>
+              </a:rPr>
+              <a:t>electrophysiology</a:t>
+            </a:r>
+            <a:endParaRPr lang="en-US" sz="1200" b="0" i="0" u="none" strike="noStrike" cap="none" dirty="0">
+              <a:solidFill>
+                <a:srgbClr val="FFFFFF"/>
+              </a:solidFill>
+              <a:latin typeface="Calibri"/>
+              <a:ea typeface="Calibri"/>
+              <a:cs typeface="Calibri"/>
+              <a:sym typeface="Calibri"/>
+            </a:endParaRPr>
           </a:p>
           <a:p>
             <a:pPr marL="115888" marR="0" lvl="0" indent="-115888" algn="l" rtl="0">
@@ -4478,29 +4193,10 @@
                 <a:cs typeface="Calibri"/>
                 <a:sym typeface="Calibri"/>
               </a:rPr>
-              <a:t>Two-photon imaging</a:t>
-            </a:r>
-          </a:p>
-          <a:p>
-            <a:pPr marL="115888" marR="0" lvl="0" indent="-115888" algn="l" rtl="0">
-              <a:lnSpc>
-                <a:spcPct val="100000"/>
-              </a:lnSpc>
-              <a:spcBef>
-                <a:spcPts val="0"/>
-              </a:spcBef>
-              <a:spcAft>
-                <a:spcPts val="0"/>
-              </a:spcAft>
-              <a:buClr>
-                <a:srgbClr val="FFFFFF"/>
-              </a:buClr>
-              <a:buSzPts val="1200"/>
-              <a:buFont typeface="Arial"/>
-              <a:buChar char="•"/>
-            </a:pPr>
-            <a:r>
-              <a:rPr lang="en-US" sz="1200" dirty="0">
+              <a:t>Two-photon </a:t>
+            </a:r>
+            <a:r>
+              <a:rPr lang="en-US" sz="1200" b="0" i="0" u="none" strike="noStrike" cap="none" dirty="0" smtClean="0">
                 <a:solidFill>
                   <a:srgbClr val="FFFFFF"/>
                 </a:solidFill>
@@ -4509,9 +4205,9 @@
                 <a:cs typeface="Calibri"/>
                 <a:sym typeface="Calibri"/>
               </a:rPr>
-              <a:t>Functional ultrasound imaging</a:t>
-            </a:r>
-            <a:endParaRPr sz="1200" b="0" i="0" u="none" strike="noStrike" cap="none" dirty="0">
+              <a:t>imaging</a:t>
+            </a:r>
+            <a:endParaRPr lang="en-US" sz="1200" b="0" i="0" u="none" strike="noStrike" cap="none" dirty="0">
               <a:solidFill>
                 <a:srgbClr val="FFFFFF"/>
               </a:solidFill>
@@ -4525,7 +4221,7 @@
       </p:sp>
       <p:sp>
         <p:nvSpPr>
-          <p:cNvPr id="60" name="Google Shape;106;p1">
+          <p:cNvPr id="14" name="Google Shape;106;p1">
             <a:extLst>
               <a:ext uri="{FF2B5EF4-FFF2-40B4-BE49-F238E27FC236}">
                 <a16:creationId xmlns:a16="http://schemas.microsoft.com/office/drawing/2014/main" xmlns="" id="{E05F7D88-50A6-4383-BB16-EB5B35AC27C1}"/>
@@ -4536,9 +4232,9 @@
           <p:nvPr/>
         </p:nvSpPr>
         <p:spPr>
-          <a:xfrm rot="8440847">
-            <a:off x="2872209" y="4035353"/>
-            <a:ext cx="935616" cy="334598"/>
+          <a:xfrm rot="20436743">
+            <a:off x="2559795" y="3692896"/>
+            <a:ext cx="858574" cy="334598"/>
           </a:xfrm>
           <a:prstGeom prst="rightArrow">
             <a:avLst>
@@ -4594,7 +4290,7 @@
       </p:sp>
       <p:grpSp>
         <p:nvGrpSpPr>
-          <p:cNvPr id="61" name="Group 60">
+          <p:cNvPr id="15" name="Group 14">
             <a:extLst>
               <a:ext uri="{FF2B5EF4-FFF2-40B4-BE49-F238E27FC236}">
                 <a16:creationId xmlns:a16="http://schemas.microsoft.com/office/drawing/2014/main" xmlns="" id="{F7B6E189-11DE-4B5E-AE59-FBCC841F6533}"/>
@@ -4606,7 +4302,7 @@
         </p:nvGrpSpPr>
         <p:grpSpPr>
           <a:xfrm>
-            <a:off x="2577405" y="3468784"/>
+            <a:off x="2323385" y="3080866"/>
             <a:ext cx="612648" cy="612648"/>
             <a:chOff x="3274407" y="6373397"/>
             <a:chExt cx="612980" cy="612979"/>
@@ -4614,7 +4310,7 @@
         </p:grpSpPr>
         <p:sp>
           <p:nvSpPr>
-            <p:cNvPr id="62" name="Rectangle: Rounded Corners 74">
+            <p:cNvPr id="16" name="Rectangle: Rounded Corners 74">
               <a:extLst>
                 <a:ext uri="{FF2B5EF4-FFF2-40B4-BE49-F238E27FC236}">
                   <a16:creationId xmlns:a16="http://schemas.microsoft.com/office/drawing/2014/main" xmlns="" id="{60A5C00C-D997-44AD-AD77-EDDF9B280928}"/>
@@ -4673,7 +4369,7 @@
         </p:sp>
         <p:pic>
           <p:nvPicPr>
-            <p:cNvPr id="63" name="Picture 62">
+            <p:cNvPr id="17" name="Picture 16">
               <a:extLst>
                 <a:ext uri="{FF2B5EF4-FFF2-40B4-BE49-F238E27FC236}">
                   <a16:creationId xmlns:a16="http://schemas.microsoft.com/office/drawing/2014/main" xmlns="" id="{B6E9A71D-DF6E-4024-94D6-6E7DCEB5B356}"/>
@@ -4704,7 +4400,7 @@
       </p:grpSp>
       <p:grpSp>
         <p:nvGrpSpPr>
-          <p:cNvPr id="64" name="Group 63">
+          <p:cNvPr id="18" name="Group 17">
             <a:extLst>
               <a:ext uri="{FF2B5EF4-FFF2-40B4-BE49-F238E27FC236}">
                 <a16:creationId xmlns:a16="http://schemas.microsoft.com/office/drawing/2014/main" xmlns="" id="{8533F0EA-233B-4922-87F3-6B8EB543F41C}"/>
@@ -4716,7 +4412,7 @@
         </p:nvGrpSpPr>
         <p:grpSpPr>
           <a:xfrm>
-            <a:off x="8030999" y="3450465"/>
+            <a:off x="8344118" y="2962329"/>
             <a:ext cx="670304" cy="615581"/>
             <a:chOff x="3923188" y="1726803"/>
             <a:chExt cx="567853" cy="521494"/>
@@ -4724,7 +4420,7 @@
         </p:grpSpPr>
         <p:grpSp>
           <p:nvGrpSpPr>
-            <p:cNvPr id="65" name="Group 64">
+            <p:cNvPr id="19" name="Group 18">
               <a:extLst>
                 <a:ext uri="{FF2B5EF4-FFF2-40B4-BE49-F238E27FC236}">
                   <a16:creationId xmlns:a16="http://schemas.microsoft.com/office/drawing/2014/main" xmlns="" id="{6CAEF187-8E94-4B99-9C5D-47EF335D9089}"/>
@@ -4744,7 +4440,7 @@
           </p:grpSpPr>
           <p:sp>
             <p:nvSpPr>
-              <p:cNvPr id="67" name="Rectangle: Rounded Corners 69">
+              <p:cNvPr id="21" name="Rectangle: Rounded Corners 69">
                 <a:extLst>
                   <a:ext uri="{FF2B5EF4-FFF2-40B4-BE49-F238E27FC236}">
                     <a16:creationId xmlns:a16="http://schemas.microsoft.com/office/drawing/2014/main" xmlns="" id="{46ADD4FB-21F0-490C-905B-48C9F3F82299}"/>
@@ -4803,7 +4499,7 @@
           </p:sp>
           <p:cxnSp>
             <p:nvCxnSpPr>
-              <p:cNvPr id="68" name="Straight Connector 67">
+              <p:cNvPr id="22" name="Straight Connector 21">
                 <a:extLst>
                   <a:ext uri="{FF2B5EF4-FFF2-40B4-BE49-F238E27FC236}">
                     <a16:creationId xmlns:a16="http://schemas.microsoft.com/office/drawing/2014/main" xmlns="" id="{73A77711-C875-4EBC-A6FD-364AA238DF7E}"/>
@@ -4846,7 +4542,7 @@
           </p:cxnSp>
           <p:cxnSp>
             <p:nvCxnSpPr>
-              <p:cNvPr id="69" name="Straight Connector 68">
+              <p:cNvPr id="23" name="Straight Connector 22">
                 <a:extLst>
                   <a:ext uri="{FF2B5EF4-FFF2-40B4-BE49-F238E27FC236}">
                     <a16:creationId xmlns:a16="http://schemas.microsoft.com/office/drawing/2014/main" xmlns="" id="{11861DC9-C16D-45C2-98AE-3973A32FEF15}"/>
@@ -4889,7 +4585,7 @@
           </p:cxnSp>
           <p:pic>
             <p:nvPicPr>
-              <p:cNvPr id="70" name="Picture 2" descr="File:Twemoji2 1f9c0.svg">
+              <p:cNvPr id="24" name="Picture 2" descr="File:Twemoji2 1f9c0.svg">
                 <a:extLst>
                   <a:ext uri="{FF2B5EF4-FFF2-40B4-BE49-F238E27FC236}">
                     <a16:creationId xmlns:a16="http://schemas.microsoft.com/office/drawing/2014/main" xmlns="" id="{878AD6F0-9FA0-4E08-8018-03B17D4BD401}"/>
@@ -4936,7 +4632,7 @@
           </p:pic>
           <p:pic>
             <p:nvPicPr>
-              <p:cNvPr id="71" name="Picture 4" descr="Image result for mouse icon">
+              <p:cNvPr id="25" name="Picture 4" descr="Image result for mouse icon">
                 <a:extLst>
                   <a:ext uri="{FF2B5EF4-FFF2-40B4-BE49-F238E27FC236}">
                     <a16:creationId xmlns:a16="http://schemas.microsoft.com/office/drawing/2014/main" xmlns="" id="{1D9E7CF6-722E-4805-B459-91333BA63464}"/>
@@ -4982,7 +4678,7 @@
         </p:grpSp>
         <p:sp>
           <p:nvSpPr>
-            <p:cNvPr id="66" name="Arc 65">
+            <p:cNvPr id="20" name="Arc 19">
               <a:extLst>
                 <a:ext uri="{FF2B5EF4-FFF2-40B4-BE49-F238E27FC236}">
                   <a16:creationId xmlns:a16="http://schemas.microsoft.com/office/drawing/2014/main" xmlns="" id="{36D59BD8-3664-49AF-9987-803A471D777C}"/>
@@ -5035,7 +4731,7 @@
       </p:grpSp>
       <p:grpSp>
         <p:nvGrpSpPr>
-          <p:cNvPr id="72" name="Group 71">
+          <p:cNvPr id="26" name="Group 25">
             <a:extLst>
               <a:ext uri="{FF2B5EF4-FFF2-40B4-BE49-F238E27FC236}">
                 <a16:creationId xmlns:a16="http://schemas.microsoft.com/office/drawing/2014/main" xmlns="" id="{A147092B-0C2D-43D9-AFCE-929CF5ACDA5D}"/>
@@ -5047,7 +4743,7 @@
         </p:nvGrpSpPr>
         <p:grpSpPr>
           <a:xfrm>
-            <a:off x="5251903" y="746971"/>
+            <a:off x="5251903" y="691276"/>
             <a:ext cx="667512" cy="612648"/>
             <a:chOff x="3923187" y="2721936"/>
             <a:chExt cx="667512" cy="612648"/>
@@ -5055,7 +4751,7 @@
         </p:grpSpPr>
         <p:grpSp>
           <p:nvGrpSpPr>
-            <p:cNvPr id="73" name="Group 72">
+            <p:cNvPr id="27" name="Group 26">
               <a:extLst>
                 <a:ext uri="{FF2B5EF4-FFF2-40B4-BE49-F238E27FC236}">
                   <a16:creationId xmlns:a16="http://schemas.microsoft.com/office/drawing/2014/main" xmlns="" id="{490778BE-56F6-46DE-988E-1697407FD7B8}"/>
@@ -5075,7 +4771,7 @@
           </p:grpSpPr>
           <p:sp>
             <p:nvSpPr>
-              <p:cNvPr id="77" name="Rectangle: Rounded Corners 79">
+              <p:cNvPr id="31" name="Rectangle: Rounded Corners 79">
                 <a:extLst>
                   <a:ext uri="{FF2B5EF4-FFF2-40B4-BE49-F238E27FC236}">
                     <a16:creationId xmlns:a16="http://schemas.microsoft.com/office/drawing/2014/main" xmlns="" id="{FC567C61-02BE-43BC-BF5B-00B58CD29A58}"/>
@@ -5134,7 +4830,7 @@
           </p:sp>
           <p:cxnSp>
             <p:nvCxnSpPr>
-              <p:cNvPr id="78" name="Straight Connector 77">
+              <p:cNvPr id="32" name="Straight Connector 31">
                 <a:extLst>
                   <a:ext uri="{FF2B5EF4-FFF2-40B4-BE49-F238E27FC236}">
                     <a16:creationId xmlns:a16="http://schemas.microsoft.com/office/drawing/2014/main" xmlns="" id="{597C7B93-EC0B-4843-A781-62CB75DE6C38}"/>
@@ -5177,7 +4873,7 @@
           </p:cxnSp>
           <p:cxnSp>
             <p:nvCxnSpPr>
-              <p:cNvPr id="79" name="Straight Connector 78">
+              <p:cNvPr id="33" name="Straight Connector 32">
                 <a:extLst>
                   <a:ext uri="{FF2B5EF4-FFF2-40B4-BE49-F238E27FC236}">
                     <a16:creationId xmlns:a16="http://schemas.microsoft.com/office/drawing/2014/main" xmlns="" id="{2110824D-F9C4-4EF8-A877-9FB477089FF9}"/>
@@ -5220,7 +4916,7 @@
           </p:cxnSp>
           <p:pic>
             <p:nvPicPr>
-              <p:cNvPr id="80" name="Picture 2" descr="File:Twemoji2 1f9c0.svg">
+              <p:cNvPr id="34" name="Picture 2" descr="File:Twemoji2 1f9c0.svg">
                 <a:extLst>
                   <a:ext uri="{FF2B5EF4-FFF2-40B4-BE49-F238E27FC236}">
                     <a16:creationId xmlns:a16="http://schemas.microsoft.com/office/drawing/2014/main" xmlns="" id="{5A5B871B-2192-4A7B-9324-28EA08801BA6}"/>
@@ -5267,7 +4963,7 @@
           </p:pic>
           <p:pic>
             <p:nvPicPr>
-              <p:cNvPr id="81" name="Picture 4" descr="Image result for mouse icon">
+              <p:cNvPr id="35" name="Picture 4" descr="Image result for mouse icon">
                 <a:extLst>
                   <a:ext uri="{FF2B5EF4-FFF2-40B4-BE49-F238E27FC236}">
                     <a16:creationId xmlns:a16="http://schemas.microsoft.com/office/drawing/2014/main" xmlns="" id="{D5347191-B65F-41EA-9F1B-CC42CB5A71DD}"/>
@@ -5313,7 +5009,7 @@
         </p:grpSp>
         <p:sp>
           <p:nvSpPr>
-            <p:cNvPr id="74" name="Arc 73">
+            <p:cNvPr id="28" name="Arc 27">
               <a:extLst>
                 <a:ext uri="{FF2B5EF4-FFF2-40B4-BE49-F238E27FC236}">
                   <a16:creationId xmlns:a16="http://schemas.microsoft.com/office/drawing/2014/main" xmlns="" id="{B4B4F5E7-F57D-4F7E-8710-F039DE83A35F}"/>
@@ -5365,7 +5061,7 @@
         </p:sp>
         <p:sp>
           <p:nvSpPr>
-            <p:cNvPr id="75" name="Arc 74">
+            <p:cNvPr id="29" name="Arc 28">
               <a:extLst>
                 <a:ext uri="{FF2B5EF4-FFF2-40B4-BE49-F238E27FC236}">
                   <a16:creationId xmlns:a16="http://schemas.microsoft.com/office/drawing/2014/main" xmlns="" id="{84B77428-1CA5-49C5-8159-3D722A871D57}"/>
@@ -5417,7 +5113,7 @@
         </p:sp>
         <p:sp>
           <p:nvSpPr>
-            <p:cNvPr id="76" name="TextBox 75">
+            <p:cNvPr id="30" name="TextBox 29">
               <a:extLst>
                 <a:ext uri="{FF2B5EF4-FFF2-40B4-BE49-F238E27FC236}">
                   <a16:creationId xmlns:a16="http://schemas.microsoft.com/office/drawing/2014/main" xmlns="" id="{F2A05923-B911-4640-A459-72539238E32A}"/>
@@ -5457,9 +5153,611 @@
           </p:txBody>
         </p:sp>
       </p:grpSp>
+      <p:sp>
+        <p:nvSpPr>
+          <p:cNvPr id="36" name="Google Shape;105;p1">
+            <a:extLst>
+              <a:ext uri="{FF2B5EF4-FFF2-40B4-BE49-F238E27FC236}">
+                <a16:creationId xmlns:a16="http://schemas.microsoft.com/office/drawing/2014/main" xmlns="" id="{7CA194D6-B5C4-4B18-8340-E8C571F9B2F0}"/>
+              </a:ext>
+            </a:extLst>
+          </p:cNvPr>
+          <p:cNvSpPr/>
+          <p:nvPr/>
+        </p:nvSpPr>
+        <p:spPr>
+          <a:xfrm rot="813467">
+            <a:off x="2283029" y="2407195"/>
+            <a:ext cx="1613784" cy="334598"/>
+          </a:xfrm>
+          <a:prstGeom prst="rightArrow">
+            <a:avLst>
+              <a:gd name="adj1" fmla="val 50000"/>
+              <a:gd name="adj2" fmla="val 50000"/>
+            </a:avLst>
+          </a:prstGeom>
+          <a:solidFill>
+            <a:srgbClr val="15374A"/>
+          </a:solidFill>
+          <a:ln w="9525" cap="flat" cmpd="sng">
+            <a:noFill/>
+            <a:prstDash val="solid"/>
+            <a:round/>
+            <a:headEnd type="none" w="sm" len="sm"/>
+            <a:tailEnd type="none" w="sm" len="sm"/>
+          </a:ln>
+        </p:spPr>
+        <p:txBody>
+          <a:bodyPr spcFirstLastPara="1" wrap="square" lIns="91425" tIns="45700" rIns="91425" bIns="45700" anchor="ctr" anchorCtr="0">
+            <a:noAutofit/>
+          </a:bodyPr>
+          <a:lstStyle/>
+          <a:p>
+            <a:pPr marL="0" marR="0" lvl="0" indent="0" algn="ctr" rtl="0">
+              <a:lnSpc>
+                <a:spcPct val="100000"/>
+              </a:lnSpc>
+              <a:spcBef>
+                <a:spcPts val="0"/>
+              </a:spcBef>
+              <a:spcAft>
+                <a:spcPts val="0"/>
+              </a:spcAft>
+              <a:buClr>
+                <a:schemeClr val="dk1"/>
+              </a:buClr>
+              <a:buSzPts val="1800"/>
+              <a:buFont typeface="Calibri"/>
+              <a:buNone/>
+            </a:pPr>
+            <a:endParaRPr sz="1800" b="0" i="0" u="none" strike="noStrike" cap="none">
+              <a:solidFill>
+                <a:srgbClr val="FFFFFF"/>
+              </a:solidFill>
+              <a:latin typeface="Arial"/>
+              <a:ea typeface="Arial"/>
+              <a:cs typeface="Arial"/>
+              <a:sym typeface="Arial"/>
+            </a:endParaRPr>
+          </a:p>
+        </p:txBody>
+      </p:sp>
       <p:grpSp>
         <p:nvGrpSpPr>
-          <p:cNvPr id="82" name="Group 81">
+          <p:cNvPr id="37" name="Group 36">
+            <a:extLst>
+              <a:ext uri="{FF2B5EF4-FFF2-40B4-BE49-F238E27FC236}">
+                <a16:creationId xmlns:a16="http://schemas.microsoft.com/office/drawing/2014/main" xmlns="" id="{F0222416-71FB-4B0A-B35E-411898B57501}"/>
+              </a:ext>
+            </a:extLst>
+          </p:cNvPr>
+          <p:cNvGrpSpPr/>
+          <p:nvPr/>
+        </p:nvGrpSpPr>
+        <p:grpSpPr>
+          <a:xfrm>
+            <a:off x="2132761" y="1482040"/>
+            <a:ext cx="544387" cy="726335"/>
+            <a:chOff x="1870075" y="4091432"/>
+            <a:chExt cx="615848" cy="821680"/>
+          </a:xfrm>
+        </p:grpSpPr>
+        <p:sp>
+          <p:nvSpPr>
+            <p:cNvPr id="38" name="Rectangle: Rounded Corners 84">
+              <a:extLst>
+                <a:ext uri="{FF2B5EF4-FFF2-40B4-BE49-F238E27FC236}">
+                  <a16:creationId xmlns:a16="http://schemas.microsoft.com/office/drawing/2014/main" xmlns="" id="{7BCE1F91-314A-4A9B-8A8D-E775EF4E6612}"/>
+                </a:ext>
+              </a:extLst>
+            </p:cNvPr>
+            <p:cNvSpPr/>
+            <p:nvPr/>
+          </p:nvSpPr>
+          <p:spPr>
+            <a:xfrm>
+              <a:off x="1870075" y="4091432"/>
+              <a:ext cx="615848" cy="799676"/>
+            </a:xfrm>
+            <a:prstGeom prst="roundRect">
+              <a:avLst>
+                <a:gd name="adj" fmla="val 10731"/>
+              </a:avLst>
+            </a:prstGeom>
+            <a:solidFill>
+              <a:schemeClr val="bg2">
+                <a:lumMod val="20000"/>
+                <a:lumOff val="80000"/>
+              </a:schemeClr>
+            </a:solidFill>
+            <a:ln>
+              <a:solidFill>
+                <a:srgbClr val="0070C0"/>
+              </a:solidFill>
+            </a:ln>
+          </p:spPr>
+          <p:style>
+            <a:lnRef idx="2">
+              <a:schemeClr val="accent1">
+                <a:shade val="50000"/>
+              </a:schemeClr>
+            </a:lnRef>
+            <a:fillRef idx="1">
+              <a:schemeClr val="accent1"/>
+            </a:fillRef>
+            <a:effectRef idx="0">
+              <a:schemeClr val="accent1"/>
+            </a:effectRef>
+            <a:fontRef idx="minor">
+              <a:schemeClr val="lt1"/>
+            </a:fontRef>
+          </p:style>
+          <p:txBody>
+            <a:bodyPr rtlCol="0" anchor="ctr"/>
+            <a:lstStyle/>
+            <a:p>
+              <a:pPr algn="ctr"/>
+              <a:endParaRPr lang="en-US"/>
+            </a:p>
+          </p:txBody>
+        </p:sp>
+        <p:pic>
+          <p:nvPicPr>
+            <p:cNvPr id="39" name="Picture 38">
+              <a:extLst>
+                <a:ext uri="{FF2B5EF4-FFF2-40B4-BE49-F238E27FC236}">
+                  <a16:creationId xmlns:a16="http://schemas.microsoft.com/office/drawing/2014/main" xmlns="" id="{F6C7B362-76C6-4798-8102-62CB6E63AFE1}"/>
+                </a:ext>
+              </a:extLst>
+            </p:cNvPr>
+            <p:cNvPicPr>
+              <a:picLocks noChangeAspect="1"/>
+            </p:cNvPicPr>
+            <p:nvPr/>
+          </p:nvPicPr>
+          <p:blipFill>
+            <a:blip r:embed="rId6"/>
+            <a:stretch>
+              <a:fillRect/>
+            </a:stretch>
+          </p:blipFill>
+          <p:spPr>
+            <a:xfrm>
+              <a:off x="1914469" y="4113436"/>
+              <a:ext cx="565104" cy="799676"/>
+            </a:xfrm>
+            <a:prstGeom prst="rect">
+              <a:avLst/>
+            </a:prstGeom>
+          </p:spPr>
+        </p:pic>
+        <p:sp>
+          <p:nvSpPr>
+            <p:cNvPr id="40" name="Oval 39">
+              <a:extLst>
+                <a:ext uri="{FF2B5EF4-FFF2-40B4-BE49-F238E27FC236}">
+                  <a16:creationId xmlns:a16="http://schemas.microsoft.com/office/drawing/2014/main" xmlns="" id="{7825FA7A-DEDC-4555-848B-50CA147E1C59}"/>
+                </a:ext>
+              </a:extLst>
+            </p:cNvPr>
+            <p:cNvSpPr/>
+            <p:nvPr/>
+          </p:nvSpPr>
+          <p:spPr>
+            <a:xfrm>
+              <a:off x="2379191" y="4434425"/>
+              <a:ext cx="45720" cy="45720"/>
+            </a:xfrm>
+            <a:prstGeom prst="ellipse">
+              <a:avLst/>
+            </a:prstGeom>
+            <a:solidFill>
+              <a:schemeClr val="bg2">
+                <a:lumMod val="20000"/>
+                <a:lumOff val="80000"/>
+              </a:schemeClr>
+            </a:solidFill>
+            <a:ln>
+              <a:noFill/>
+            </a:ln>
+          </p:spPr>
+          <p:style>
+            <a:lnRef idx="2">
+              <a:schemeClr val="accent1">
+                <a:shade val="50000"/>
+              </a:schemeClr>
+            </a:lnRef>
+            <a:fillRef idx="1">
+              <a:schemeClr val="accent1"/>
+            </a:fillRef>
+            <a:effectRef idx="0">
+              <a:schemeClr val="accent1"/>
+            </a:effectRef>
+            <a:fontRef idx="minor">
+              <a:schemeClr val="lt1"/>
+            </a:fontRef>
+          </p:style>
+          <p:txBody>
+            <a:bodyPr rtlCol="0" anchor="ctr"/>
+            <a:lstStyle/>
+            <a:p>
+              <a:pPr algn="ctr"/>
+              <a:endParaRPr lang="en-US"/>
+            </a:p>
+          </p:txBody>
+        </p:sp>
+      </p:grpSp>
+      <p:sp>
+        <p:nvSpPr>
+          <p:cNvPr id="41" name="Google Shape;105;p1">
+            <a:extLst>
+              <a:ext uri="{FF2B5EF4-FFF2-40B4-BE49-F238E27FC236}">
+                <a16:creationId xmlns:a16="http://schemas.microsoft.com/office/drawing/2014/main" xmlns="" id="{7CA194D6-B5C4-4B18-8340-E8C571F9B2F0}"/>
+              </a:ext>
+            </a:extLst>
+          </p:cNvPr>
+          <p:cNvSpPr/>
+          <p:nvPr/>
+        </p:nvSpPr>
+        <p:spPr>
+          <a:xfrm rot="20786533" flipH="1">
+            <a:off x="5227167" y="2391272"/>
+            <a:ext cx="1749633" cy="334598"/>
+          </a:xfrm>
+          <a:prstGeom prst="rightArrow">
+            <a:avLst>
+              <a:gd name="adj1" fmla="val 50000"/>
+              <a:gd name="adj2" fmla="val 50000"/>
+            </a:avLst>
+          </a:prstGeom>
+          <a:solidFill>
+            <a:srgbClr val="15374A"/>
+          </a:solidFill>
+          <a:ln w="9525" cap="flat" cmpd="sng">
+            <a:noFill/>
+            <a:prstDash val="solid"/>
+            <a:round/>
+            <a:headEnd type="none" w="sm" len="sm"/>
+            <a:tailEnd type="none" w="sm" len="sm"/>
+          </a:ln>
+        </p:spPr>
+        <p:txBody>
+          <a:bodyPr spcFirstLastPara="1" wrap="square" lIns="91425" tIns="45700" rIns="91425" bIns="45700" anchor="ctr" anchorCtr="0">
+            <a:noAutofit/>
+          </a:bodyPr>
+          <a:lstStyle/>
+          <a:p>
+            <a:pPr marL="0" marR="0" lvl="0" indent="0" algn="ctr" rtl="0">
+              <a:lnSpc>
+                <a:spcPct val="100000"/>
+              </a:lnSpc>
+              <a:spcBef>
+                <a:spcPts val="0"/>
+              </a:spcBef>
+              <a:spcAft>
+                <a:spcPts val="0"/>
+              </a:spcAft>
+              <a:buClr>
+                <a:schemeClr val="dk1"/>
+              </a:buClr>
+              <a:buSzPts val="1800"/>
+              <a:buFont typeface="Calibri"/>
+              <a:buNone/>
+            </a:pPr>
+            <a:endParaRPr sz="1800" b="0" i="0" u="none" strike="noStrike" cap="none">
+              <a:solidFill>
+                <a:srgbClr val="FFFFFF"/>
+              </a:solidFill>
+              <a:latin typeface="Arial"/>
+              <a:ea typeface="Arial"/>
+              <a:cs typeface="Arial"/>
+              <a:sym typeface="Arial"/>
+            </a:endParaRPr>
+          </a:p>
+        </p:txBody>
+      </p:sp>
+      <p:sp>
+        <p:nvSpPr>
+          <p:cNvPr id="42" name="Google Shape;91;p1">
+            <a:extLst>
+              <a:ext uri="{FF2B5EF4-FFF2-40B4-BE49-F238E27FC236}">
+                <a16:creationId xmlns:a16="http://schemas.microsoft.com/office/drawing/2014/main" xmlns="" id="{AD5DFFC3-2D58-4C9B-9B23-9CBAC35FD9F8}"/>
+              </a:ext>
+            </a:extLst>
+          </p:cNvPr>
+          <p:cNvSpPr/>
+          <p:nvPr/>
+        </p:nvSpPr>
+        <p:spPr>
+          <a:xfrm>
+            <a:off x="6803173" y="1922605"/>
+            <a:ext cx="1872929" cy="855299"/>
+          </a:xfrm>
+          <a:prstGeom prst="roundRect">
+            <a:avLst>
+              <a:gd name="adj" fmla="val 0"/>
+            </a:avLst>
+          </a:prstGeom>
+          <a:solidFill>
+            <a:srgbClr val="15374A"/>
+          </a:solidFill>
+          <a:ln w="9525" cap="flat" cmpd="sng">
+            <a:noFill/>
+            <a:prstDash val="solid"/>
+            <a:round/>
+            <a:headEnd type="none" w="sm" len="sm"/>
+            <a:tailEnd type="none" w="sm" len="sm"/>
+          </a:ln>
+        </p:spPr>
+        <p:txBody>
+          <a:bodyPr spcFirstLastPara="1" wrap="square" lIns="91425" tIns="45700" rIns="91425" bIns="45700" anchor="t" anchorCtr="0">
+            <a:noAutofit/>
+          </a:bodyPr>
+          <a:lstStyle/>
+          <a:p>
+            <a:pPr marL="115888" marR="0" lvl="0" indent="-115888" algn="l" rtl="0">
+              <a:spcBef>
+                <a:spcPts val="0"/>
+              </a:spcBef>
+              <a:spcAft>
+                <a:spcPts val="0"/>
+              </a:spcAft>
+              <a:buClr>
+                <a:srgbClr val="FFFFFF"/>
+              </a:buClr>
+              <a:buSzPts val="1200"/>
+              <a:buFont typeface="Arial"/>
+              <a:buChar char="•"/>
+            </a:pPr>
+            <a:r>
+              <a:rPr lang="en-US" sz="1200" dirty="0">
+                <a:solidFill>
+                  <a:srgbClr val="FFFFFF"/>
+                </a:solidFill>
+                <a:latin typeface="Calibri"/>
+                <a:ea typeface="Calibri"/>
+                <a:cs typeface="Calibri"/>
+                <a:sym typeface="Calibri"/>
+              </a:rPr>
+              <a:t>Species</a:t>
+            </a:r>
+          </a:p>
+          <a:p>
+            <a:pPr marL="115888" marR="0" lvl="0" indent="-115888" algn="l" rtl="0">
+              <a:spcBef>
+                <a:spcPts val="0"/>
+              </a:spcBef>
+              <a:spcAft>
+                <a:spcPts val="0"/>
+              </a:spcAft>
+              <a:buClr>
+                <a:srgbClr val="FFFFFF"/>
+              </a:buClr>
+              <a:buSzPts val="1200"/>
+              <a:buFont typeface="Arial"/>
+              <a:buChar char="•"/>
+            </a:pPr>
+            <a:r>
+              <a:rPr lang="en-US" sz="1200" dirty="0">
+                <a:solidFill>
+                  <a:srgbClr val="FFFFFF"/>
+                </a:solidFill>
+                <a:latin typeface="Calibri"/>
+                <a:ea typeface="Calibri"/>
+                <a:cs typeface="Calibri"/>
+                <a:sym typeface="Calibri"/>
+              </a:rPr>
+              <a:t>Genotype</a:t>
+            </a:r>
+          </a:p>
+          <a:p>
+            <a:pPr marL="115888" marR="0" lvl="0" indent="-115888" algn="l" rtl="0">
+              <a:spcBef>
+                <a:spcPts val="0"/>
+              </a:spcBef>
+              <a:spcAft>
+                <a:spcPts val="0"/>
+              </a:spcAft>
+              <a:buClr>
+                <a:srgbClr val="FFFFFF"/>
+              </a:buClr>
+              <a:buSzPts val="1200"/>
+              <a:buFont typeface="Arial"/>
+              <a:buChar char="•"/>
+            </a:pPr>
+            <a:r>
+              <a:rPr lang="en-US" sz="1200" dirty="0">
+                <a:solidFill>
+                  <a:srgbClr val="FFFFFF"/>
+                </a:solidFill>
+                <a:latin typeface="Calibri"/>
+                <a:ea typeface="Calibri"/>
+                <a:cs typeface="Calibri"/>
+                <a:sym typeface="Calibri"/>
+              </a:rPr>
+              <a:t>Age</a:t>
+            </a:r>
+          </a:p>
+          <a:p>
+            <a:pPr marL="115888" marR="0" lvl="0" indent="-115888" algn="l" rtl="0">
+              <a:spcBef>
+                <a:spcPts val="0"/>
+              </a:spcBef>
+              <a:spcAft>
+                <a:spcPts val="0"/>
+              </a:spcAft>
+              <a:buClr>
+                <a:srgbClr val="FFFFFF"/>
+              </a:buClr>
+              <a:buSzPts val="1200"/>
+              <a:buFont typeface="Arial"/>
+              <a:buChar char="•"/>
+            </a:pPr>
+            <a:r>
+              <a:rPr lang="en-US" sz="1200" dirty="0">
+                <a:solidFill>
+                  <a:srgbClr val="FFFFFF"/>
+                </a:solidFill>
+                <a:latin typeface="Calibri"/>
+                <a:ea typeface="Calibri"/>
+                <a:cs typeface="Calibri"/>
+                <a:sym typeface="Calibri"/>
+              </a:rPr>
+              <a:t>Weight</a:t>
+            </a:r>
+          </a:p>
+          <a:p>
+            <a:pPr marL="115888" marR="0" lvl="0" indent="-115888" algn="l" rtl="0">
+              <a:spcBef>
+                <a:spcPts val="0"/>
+              </a:spcBef>
+              <a:spcAft>
+                <a:spcPts val="0"/>
+              </a:spcAft>
+              <a:buClr>
+                <a:srgbClr val="FFFFFF"/>
+              </a:buClr>
+              <a:buSzPts val="1200"/>
+              <a:buFont typeface="Arial"/>
+              <a:buChar char="•"/>
+            </a:pPr>
+            <a:endParaRPr sz="1200" dirty="0">
+              <a:solidFill>
+                <a:srgbClr val="FFFFFF"/>
+              </a:solidFill>
+              <a:latin typeface="Calibri"/>
+              <a:ea typeface="Calibri"/>
+              <a:cs typeface="Calibri"/>
+              <a:sym typeface="Calibri"/>
+            </a:endParaRPr>
+          </a:p>
+          <a:p>
+            <a:pPr marL="0" marR="0" lvl="0" indent="0" algn="l" rtl="0">
+              <a:lnSpc>
+                <a:spcPct val="100000"/>
+              </a:lnSpc>
+              <a:spcBef>
+                <a:spcPts val="0"/>
+              </a:spcBef>
+              <a:spcAft>
+                <a:spcPts val="0"/>
+              </a:spcAft>
+              <a:buClr>
+                <a:schemeClr val="dk1"/>
+              </a:buClr>
+              <a:buSzPts val="1200"/>
+              <a:buFont typeface="Calibri"/>
+              <a:buNone/>
+            </a:pPr>
+            <a:endParaRPr sz="1200" b="0" i="0" u="none" strike="noStrike" cap="none" dirty="0">
+              <a:solidFill>
+                <a:srgbClr val="FFFFFF"/>
+              </a:solidFill>
+              <a:latin typeface="Calibri"/>
+              <a:ea typeface="Calibri"/>
+              <a:cs typeface="Calibri"/>
+              <a:sym typeface="Calibri"/>
+            </a:endParaRPr>
+          </a:p>
+        </p:txBody>
+      </p:sp>
+      <p:sp>
+        <p:nvSpPr>
+          <p:cNvPr id="43" name="Google Shape;90;p1">
+            <a:extLst>
+              <a:ext uri="{FF2B5EF4-FFF2-40B4-BE49-F238E27FC236}">
+                <a16:creationId xmlns:a16="http://schemas.microsoft.com/office/drawing/2014/main" xmlns="" id="{EEF72B0E-9CCF-4E7F-B810-DC35A08F7578}"/>
+              </a:ext>
+            </a:extLst>
+          </p:cNvPr>
+          <p:cNvSpPr txBox="1"/>
+          <p:nvPr/>
+        </p:nvSpPr>
+        <p:spPr>
+          <a:xfrm>
+            <a:off x="6930969" y="1421242"/>
+            <a:ext cx="1758372" cy="492443"/>
+          </a:xfrm>
+          <a:prstGeom prst="rect">
+            <a:avLst/>
+          </a:prstGeom>
+          <a:noFill/>
+          <a:ln>
+            <a:noFill/>
+          </a:ln>
+        </p:spPr>
+        <p:txBody>
+          <a:bodyPr spcFirstLastPara="1" wrap="square" lIns="0" tIns="0" rIns="0" bIns="0" anchor="t" anchorCtr="0">
+            <a:spAutoFit/>
+          </a:bodyPr>
+          <a:lstStyle/>
+          <a:p>
+            <a:pPr marL="0" marR="0" lvl="0" indent="0" algn="l" rtl="0">
+              <a:lnSpc>
+                <a:spcPct val="100000"/>
+              </a:lnSpc>
+              <a:spcBef>
+                <a:spcPts val="0"/>
+              </a:spcBef>
+              <a:spcAft>
+                <a:spcPts val="0"/>
+              </a:spcAft>
+              <a:buClr>
+                <a:srgbClr val="15374A"/>
+              </a:buClr>
+              <a:buSzPts val="1200"/>
+              <a:buFont typeface="Calibri"/>
+              <a:buNone/>
+            </a:pPr>
+            <a:r>
+              <a:rPr lang="en-US" sz="1600" b="1" i="0" u="none" strike="noStrike" cap="none" dirty="0">
+                <a:solidFill>
+                  <a:srgbClr val="15374A"/>
+                </a:solidFill>
+                <a:latin typeface="Calibri"/>
+                <a:ea typeface="Calibri"/>
+                <a:cs typeface="Calibri"/>
+                <a:sym typeface="Calibri"/>
+              </a:rPr>
+              <a:t>Experimental </a:t>
+            </a:r>
+          </a:p>
+          <a:p>
+            <a:pPr marL="0" marR="0" lvl="0" indent="0" algn="l" rtl="0">
+              <a:lnSpc>
+                <a:spcPct val="100000"/>
+              </a:lnSpc>
+              <a:spcBef>
+                <a:spcPts val="0"/>
+              </a:spcBef>
+              <a:spcAft>
+                <a:spcPts val="0"/>
+              </a:spcAft>
+              <a:buClr>
+                <a:srgbClr val="15374A"/>
+              </a:buClr>
+              <a:buSzPts val="1200"/>
+              <a:buFont typeface="Calibri"/>
+              <a:buNone/>
+            </a:pPr>
+            <a:r>
+              <a:rPr lang="en-US" sz="1600" b="1" i="0" u="none" strike="noStrike" cap="none" dirty="0">
+                <a:solidFill>
+                  <a:srgbClr val="15374A"/>
+                </a:solidFill>
+                <a:latin typeface="Calibri"/>
+                <a:ea typeface="Calibri"/>
+                <a:cs typeface="Calibri"/>
+                <a:sym typeface="Calibri"/>
+              </a:rPr>
+              <a:t>Subjects </a:t>
+            </a:r>
+          </a:p>
+        </p:txBody>
+      </p:sp>
+      <p:grpSp>
+        <p:nvGrpSpPr>
+          <p:cNvPr id="44" name="Group 43">
             <a:extLst>
               <a:ext uri="{FF2B5EF4-FFF2-40B4-BE49-F238E27FC236}">
                 <a16:creationId xmlns:a16="http://schemas.microsoft.com/office/drawing/2014/main" xmlns="" id="{AFB23BE8-9E97-4107-97C7-5AFC1D8797CD}"/>
@@ -5471,7 +5769,7 @@
         </p:nvGrpSpPr>
         <p:grpSpPr>
           <a:xfrm>
-            <a:off x="7892775" y="1734067"/>
+            <a:off x="7892775" y="1678372"/>
             <a:ext cx="814029" cy="444559"/>
             <a:chOff x="5823050" y="3623414"/>
             <a:chExt cx="814029" cy="444559"/>
@@ -5479,7 +5777,7 @@
         </p:grpSpPr>
         <p:sp>
           <p:nvSpPr>
-            <p:cNvPr id="83" name="Rectangle: Rounded Corners 65">
+            <p:cNvPr id="45" name="Rectangle: Rounded Corners 65">
               <a:extLst>
                 <a:ext uri="{FF2B5EF4-FFF2-40B4-BE49-F238E27FC236}">
                   <a16:creationId xmlns:a16="http://schemas.microsoft.com/office/drawing/2014/main" xmlns="" id="{BB403B0D-EF05-44C9-856D-73B02CCE82A0}"/>
@@ -5538,7 +5836,7 @@
         </p:sp>
         <p:pic>
           <p:nvPicPr>
-            <p:cNvPr id="84" name="Picture 4" descr="Image result for mouse icon">
+            <p:cNvPr id="46" name="Picture 4" descr="Image result for mouse icon">
               <a:extLst>
                 <a:ext uri="{FF2B5EF4-FFF2-40B4-BE49-F238E27FC236}">
                   <a16:creationId xmlns:a16="http://schemas.microsoft.com/office/drawing/2014/main" xmlns="" id="{938554CE-F93A-44B7-9C58-4CF5EF5C56D4}"/>
@@ -5584,10 +5882,3051 @@
       </p:grpSp>
       <p:sp>
         <p:nvSpPr>
+          <p:cNvPr id="47" name="Google Shape;92;p1">
+            <a:extLst>
+              <a:ext uri="{FF2B5EF4-FFF2-40B4-BE49-F238E27FC236}">
+                <a16:creationId xmlns:a16="http://schemas.microsoft.com/office/drawing/2014/main" xmlns="" id="{FACF2BB3-A2CF-4345-BFAD-509D0EFA7437}"/>
+              </a:ext>
+            </a:extLst>
+          </p:cNvPr>
+          <p:cNvSpPr txBox="1"/>
+          <p:nvPr/>
+        </p:nvSpPr>
+        <p:spPr>
+          <a:xfrm>
+            <a:off x="1900130" y="4208712"/>
+            <a:ext cx="1357328" cy="270843"/>
+          </a:xfrm>
+          <a:prstGeom prst="rect">
+            <a:avLst/>
+          </a:prstGeom>
+          <a:noFill/>
+          <a:ln>
+            <a:noFill/>
+          </a:ln>
+        </p:spPr>
+        <p:txBody>
+          <a:bodyPr spcFirstLastPara="1" wrap="square" lIns="0" tIns="0" rIns="0" bIns="0" anchor="t" anchorCtr="0">
+            <a:spAutoFit/>
+          </a:bodyPr>
+          <a:lstStyle/>
+          <a:p>
+            <a:pPr marL="0" marR="0" lvl="0" indent="0" algn="l" rtl="0">
+              <a:lnSpc>
+                <a:spcPct val="100000"/>
+              </a:lnSpc>
+              <a:spcBef>
+                <a:spcPts val="0"/>
+              </a:spcBef>
+              <a:spcAft>
+                <a:spcPts val="0"/>
+              </a:spcAft>
+              <a:buClr>
+                <a:srgbClr val="15374A"/>
+              </a:buClr>
+              <a:buSzPts val="1200"/>
+              <a:buFont typeface="Calibri"/>
+              <a:buNone/>
+            </a:pPr>
+            <a:r>
+              <a:rPr lang="en-US" sz="1600" b="1" i="0" u="none" strike="noStrike" cap="none" dirty="0" smtClean="0">
+                <a:solidFill>
+                  <a:srgbClr val="BE5D23"/>
+                </a:solidFill>
+                <a:latin typeface="Calibri"/>
+                <a:ea typeface="Calibri"/>
+                <a:cs typeface="Calibri"/>
+                <a:sym typeface="Calibri"/>
+              </a:rPr>
+              <a:t>Extensions</a:t>
+            </a:r>
+            <a:endParaRPr sz="1600" b="1" i="0" u="none" strike="noStrike" cap="none" dirty="0">
+              <a:solidFill>
+                <a:srgbClr val="BE5D23"/>
+              </a:solidFill>
+              <a:latin typeface="Calibri"/>
+              <a:ea typeface="Calibri"/>
+              <a:cs typeface="Calibri"/>
+              <a:sym typeface="Calibri"/>
+            </a:endParaRPr>
+          </a:p>
+        </p:txBody>
+      </p:sp>
+      <p:sp>
+        <p:nvSpPr>
+          <p:cNvPr id="48" name="Google Shape;93;p1">
+            <a:extLst>
+              <a:ext uri="{FF2B5EF4-FFF2-40B4-BE49-F238E27FC236}">
+                <a16:creationId xmlns:a16="http://schemas.microsoft.com/office/drawing/2014/main" xmlns="" id="{0D7CCA4B-A9C5-4184-AE8B-08B92D1D5EB2}"/>
+              </a:ext>
+            </a:extLst>
+          </p:cNvPr>
+          <p:cNvSpPr/>
+          <p:nvPr/>
+        </p:nvSpPr>
+        <p:spPr>
+          <a:xfrm>
+            <a:off x="1911574" y="4439194"/>
+            <a:ext cx="5304580" cy="482776"/>
+          </a:xfrm>
+          <a:prstGeom prst="roundRect">
+            <a:avLst>
+              <a:gd name="adj" fmla="val 0"/>
+            </a:avLst>
+          </a:prstGeom>
+          <a:solidFill>
+            <a:srgbClr val="BE5D23"/>
+          </a:solidFill>
+          <a:ln w="9525" cap="flat" cmpd="sng">
+            <a:noFill/>
+            <a:prstDash val="solid"/>
+            <a:round/>
+            <a:headEnd type="none" w="sm" len="sm"/>
+            <a:tailEnd type="none" w="sm" len="sm"/>
+          </a:ln>
+        </p:spPr>
+        <p:txBody>
+          <a:bodyPr spcFirstLastPara="1" wrap="square" lIns="91425" tIns="45700" rIns="91425" bIns="45700" anchor="t" anchorCtr="0">
+            <a:noAutofit/>
+          </a:bodyPr>
+          <a:lstStyle/>
+          <a:p>
+            <a:pPr marL="154512" lvl="0" indent="-146046" defTabSz="914400">
+              <a:buClr>
+                <a:srgbClr val="FFFFFF"/>
+              </a:buClr>
+              <a:buSzPts val="1100"/>
+              <a:buFontTx/>
+              <a:buChar char="•"/>
+              <a:defRPr/>
+            </a:pPr>
+            <a:r>
+              <a:rPr lang="en-US" sz="1200" kern="0" dirty="0">
+                <a:solidFill>
+                  <a:srgbClr val="FFFFFF"/>
+                </a:solidFill>
+              </a:rPr>
+              <a:t>New data types and modalities</a:t>
+            </a:r>
+          </a:p>
+          <a:p>
+            <a:pPr marL="154512" indent="-146046" defTabSz="914400">
+              <a:buClr>
+                <a:srgbClr val="FFFFFF"/>
+              </a:buClr>
+              <a:buSzPts val="1100"/>
+              <a:buFontTx/>
+              <a:buChar char="•"/>
+            </a:pPr>
+            <a:r>
+              <a:rPr lang="en-US" sz="1200" kern="0" dirty="0">
+                <a:solidFill>
+                  <a:srgbClr val="FFFFFF"/>
+                </a:solidFill>
+              </a:rPr>
+              <a:t>Acquisition, processing, analysis, and experiment specific </a:t>
+            </a:r>
+            <a:r>
+              <a:rPr lang="en-US" sz="1200" kern="0" dirty="0" smtClean="0">
+                <a:solidFill>
+                  <a:srgbClr val="FFFFFF"/>
+                </a:solidFill>
+              </a:rPr>
+              <a:t>metadata</a:t>
+            </a:r>
+            <a:endParaRPr lang="en-US" sz="1200" kern="0" dirty="0">
+              <a:solidFill>
+                <a:srgbClr val="FFFFFF"/>
+              </a:solidFill>
+            </a:endParaRPr>
+          </a:p>
+        </p:txBody>
+      </p:sp>
+      <p:grpSp>
+        <p:nvGrpSpPr>
+          <p:cNvPr id="49" name="Group 48"/>
+          <p:cNvGrpSpPr>
+            <a:grpSpLocks noChangeAspect="1"/>
+          </p:cNvGrpSpPr>
+          <p:nvPr/>
+        </p:nvGrpSpPr>
+        <p:grpSpPr>
+          <a:xfrm>
+            <a:off x="6811515" y="4250778"/>
+            <a:ext cx="614473" cy="614817"/>
+            <a:chOff x="10574871" y="4381181"/>
+            <a:chExt cx="1060111" cy="1060704"/>
+          </a:xfrm>
+        </p:grpSpPr>
+        <p:sp>
+          <p:nvSpPr>
+            <p:cNvPr id="50" name="Google Shape;88;p15">
+              <a:extLst>
+                <a:ext uri="{FF2B5EF4-FFF2-40B4-BE49-F238E27FC236}">
+                  <a16:creationId xmlns="" xmlns:a16="http://schemas.microsoft.com/office/drawing/2014/main" id="{D84E954B-B2FE-44A2-B042-A90A2EEF2517}"/>
+                </a:ext>
+              </a:extLst>
+            </p:cNvPr>
+            <p:cNvSpPr/>
+            <p:nvPr/>
+          </p:nvSpPr>
+          <p:spPr>
+            <a:xfrm>
+              <a:off x="10574871" y="4381181"/>
+              <a:ext cx="1060111" cy="1060704"/>
+            </a:xfrm>
+            <a:prstGeom prst="roundRect">
+              <a:avLst>
+                <a:gd name="adj" fmla="val 10731"/>
+              </a:avLst>
+            </a:prstGeom>
+            <a:solidFill>
+              <a:schemeClr val="bg1">
+                <a:lumMod val="95000"/>
+              </a:schemeClr>
+            </a:solidFill>
+            <a:ln w="25400" cap="flat" cmpd="sng">
+              <a:solidFill>
+                <a:srgbClr val="70360A"/>
+              </a:solidFill>
+              <a:prstDash val="solid"/>
+              <a:round/>
+              <a:headEnd type="none" w="sm" len="sm"/>
+              <a:tailEnd type="none" w="sm" len="sm"/>
+            </a:ln>
+          </p:spPr>
+          <p:txBody>
+            <a:bodyPr spcFirstLastPara="1" wrap="square" lIns="121900" tIns="60933" rIns="121900" bIns="60933" anchor="ctr" anchorCtr="0">
+              <a:noAutofit/>
+            </a:bodyPr>
+            <a:lstStyle/>
+            <a:p>
+              <a:pPr marL="0" marR="0" lvl="0" indent="0" algn="ctr" defTabSz="914400" eaLnBrk="1" fontAlgn="auto" latinLnBrk="0" hangingPunct="1">
+                <a:lnSpc>
+                  <a:spcPct val="100000"/>
+                </a:lnSpc>
+                <a:spcBef>
+                  <a:spcPts val="0"/>
+                </a:spcBef>
+                <a:spcAft>
+                  <a:spcPts val="0"/>
+                </a:spcAft>
+                <a:buClrTx/>
+                <a:buSzTx/>
+                <a:buFontTx/>
+                <a:buNone/>
+                <a:tabLst/>
+                <a:defRPr/>
+              </a:pPr>
+              <a:endParaRPr kumimoji="0" sz="2000" b="0" i="0" u="none" strike="noStrike" kern="0" cap="none" spc="0" normalizeH="0" baseline="0" noProof="0">
+                <a:ln>
+                  <a:noFill/>
+                </a:ln>
+                <a:solidFill>
+                  <a:sysClr val="window" lastClr="FFFFFF"/>
+                </a:solidFill>
+                <a:effectLst/>
+                <a:uLnTx/>
+                <a:uFillTx/>
+                <a:latin typeface="Arial"/>
+                <a:ea typeface="Arial"/>
+                <a:cs typeface="Arial"/>
+                <a:sym typeface="Arial"/>
+              </a:endParaRPr>
+            </a:p>
+          </p:txBody>
+        </p:sp>
+        <p:pic>
+          <p:nvPicPr>
+            <p:cNvPr id="51" name="Picture 50" descr="nwb-extensions-catalog-logo.png"/>
+            <p:cNvPicPr>
+              <a:picLocks noChangeAspect="1"/>
+            </p:cNvPicPr>
+            <p:nvPr/>
+          </p:nvPicPr>
+          <p:blipFill>
+            <a:blip r:embed="rId7">
+              <a:extLst>
+                <a:ext uri="{28A0092B-C50C-407E-A947-70E740481C1C}">
+                  <a14:useLocalDpi xmlns:a14="http://schemas.microsoft.com/office/drawing/2010/main" val="0"/>
+                </a:ext>
+              </a:extLst>
+            </a:blip>
+            <a:stretch>
+              <a:fillRect/>
+            </a:stretch>
+          </p:blipFill>
+          <p:spPr>
+            <a:xfrm>
+              <a:off x="10606087" y="4518498"/>
+              <a:ext cx="991328" cy="788831"/>
+            </a:xfrm>
+            <a:prstGeom prst="rect">
+              <a:avLst/>
+            </a:prstGeom>
+            <a:effectLst/>
+          </p:spPr>
+        </p:pic>
+      </p:grpSp>
+      <p:sp>
+        <p:nvSpPr>
+          <p:cNvPr id="52" name="TextBox 51"/>
+          <p:cNvSpPr txBox="1"/>
+          <p:nvPr/>
+        </p:nvSpPr>
+        <p:spPr>
+          <a:xfrm>
+            <a:off x="7440765" y="4303868"/>
+            <a:ext cx="184666" cy="369332"/>
+          </a:xfrm>
+          <a:prstGeom prst="rect">
+            <a:avLst/>
+          </a:prstGeom>
+          <a:noFill/>
+        </p:spPr>
+        <p:txBody>
+          <a:bodyPr wrap="none" rtlCol="0">
+            <a:spAutoFit/>
+          </a:bodyPr>
+          <a:lstStyle/>
+          <a:p>
+            <a:endParaRPr lang="en-US" dirty="0"/>
+          </a:p>
+        </p:txBody>
+      </p:sp>
+      <p:sp>
+        <p:nvSpPr>
+          <p:cNvPr id="53" name="Google Shape;105;p1">
+            <a:extLst>
+              <a:ext uri="{FF2B5EF4-FFF2-40B4-BE49-F238E27FC236}">
+                <a16:creationId xmlns:a16="http://schemas.microsoft.com/office/drawing/2014/main" xmlns="" id="{D1DE1C64-4F2A-4519-BBA3-A55B0CC6FBC4}"/>
+              </a:ext>
+            </a:extLst>
+          </p:cNvPr>
+          <p:cNvSpPr/>
+          <p:nvPr/>
+        </p:nvSpPr>
+        <p:spPr>
+          <a:xfrm rot="16200000" flipV="1">
+            <a:off x="4219287" y="3936762"/>
+            <a:ext cx="670266" cy="334598"/>
+          </a:xfrm>
+          <a:prstGeom prst="rightArrow">
+            <a:avLst>
+              <a:gd name="adj1" fmla="val 50000"/>
+              <a:gd name="adj2" fmla="val 50000"/>
+            </a:avLst>
+          </a:prstGeom>
+          <a:solidFill>
+            <a:srgbClr val="BE5D23"/>
+          </a:solidFill>
+          <a:ln w="9525" cap="flat" cmpd="sng">
+            <a:noFill/>
+            <a:prstDash val="solid"/>
+            <a:round/>
+            <a:headEnd type="none" w="sm" len="sm"/>
+            <a:tailEnd type="none" w="sm" len="sm"/>
+          </a:ln>
+        </p:spPr>
+        <p:txBody>
+          <a:bodyPr spcFirstLastPara="1" wrap="square" lIns="91425" tIns="45700" rIns="91425" bIns="45700" anchor="ctr" anchorCtr="0">
+            <a:noAutofit/>
+          </a:bodyPr>
+          <a:lstStyle/>
+          <a:p>
+            <a:pPr marL="0" marR="0" lvl="0" indent="0" algn="ctr" rtl="0">
+              <a:lnSpc>
+                <a:spcPct val="100000"/>
+              </a:lnSpc>
+              <a:spcBef>
+                <a:spcPts val="0"/>
+              </a:spcBef>
+              <a:spcAft>
+                <a:spcPts val="0"/>
+              </a:spcAft>
+              <a:buClr>
+                <a:schemeClr val="dk1"/>
+              </a:buClr>
+              <a:buSzPts val="1800"/>
+              <a:buFont typeface="Calibri"/>
+              <a:buNone/>
+            </a:pPr>
+            <a:endParaRPr sz="1800" b="0" i="0" u="none" strike="noStrike" cap="none">
+              <a:solidFill>
+                <a:srgbClr val="FFFFFF"/>
+              </a:solidFill>
+              <a:latin typeface="Arial"/>
+              <a:ea typeface="Arial"/>
+              <a:cs typeface="Arial"/>
+              <a:sym typeface="Arial"/>
+            </a:endParaRPr>
+          </a:p>
+        </p:txBody>
+      </p:sp>
+      <p:sp>
+        <p:nvSpPr>
+          <p:cNvPr id="54" name="Google Shape;106;p1">
+            <a:extLst>
+              <a:ext uri="{FF2B5EF4-FFF2-40B4-BE49-F238E27FC236}">
+                <a16:creationId xmlns:a16="http://schemas.microsoft.com/office/drawing/2014/main" xmlns="" id="{E05F7D88-50A6-4383-BB16-EB5B35AC27C1}"/>
+              </a:ext>
+            </a:extLst>
+          </p:cNvPr>
+          <p:cNvSpPr/>
+          <p:nvPr/>
+        </p:nvSpPr>
+        <p:spPr>
+          <a:xfrm rot="1163257" flipH="1">
+            <a:off x="5735552" y="3692898"/>
+            <a:ext cx="858574" cy="334598"/>
+          </a:xfrm>
+          <a:prstGeom prst="rightArrow">
+            <a:avLst>
+              <a:gd name="adj1" fmla="val 50000"/>
+              <a:gd name="adj2" fmla="val 50000"/>
+            </a:avLst>
+          </a:prstGeom>
+          <a:solidFill>
+            <a:srgbClr val="15374A"/>
+          </a:solidFill>
+          <a:ln w="9525" cap="flat" cmpd="sng">
+            <a:noFill/>
+            <a:prstDash val="solid"/>
+            <a:round/>
+            <a:headEnd type="none" w="sm" len="sm"/>
+            <a:tailEnd type="none" w="sm" len="sm"/>
+          </a:ln>
+        </p:spPr>
+        <p:txBody>
+          <a:bodyPr spcFirstLastPara="1" wrap="square" lIns="91425" tIns="45700" rIns="91425" bIns="45700" anchor="ctr" anchorCtr="0">
+            <a:noAutofit/>
+          </a:bodyPr>
+          <a:lstStyle/>
+          <a:p>
+            <a:pPr marL="0" marR="0" lvl="0" indent="0" algn="ctr" rtl="0">
+              <a:lnSpc>
+                <a:spcPct val="100000"/>
+              </a:lnSpc>
+              <a:spcBef>
+                <a:spcPts val="0"/>
+              </a:spcBef>
+              <a:spcAft>
+                <a:spcPts val="0"/>
+              </a:spcAft>
+              <a:buClr>
+                <a:schemeClr val="dk1"/>
+              </a:buClr>
+              <a:buSzPts val="1800"/>
+              <a:buFont typeface="Calibri"/>
+              <a:buNone/>
+            </a:pPr>
+            <a:endParaRPr sz="1800" b="0" i="0" u="none" strike="noStrike" cap="none">
+              <a:solidFill>
+                <a:srgbClr val="FFFFFF"/>
+              </a:solidFill>
+              <a:latin typeface="Arial"/>
+              <a:ea typeface="Arial"/>
+              <a:cs typeface="Arial"/>
+              <a:sym typeface="Arial"/>
+            </a:endParaRPr>
+          </a:p>
+        </p:txBody>
+      </p:sp>
+    </p:spTree>
+    <p:extLst>
+      <p:ext uri="{BB962C8B-B14F-4D97-AF65-F5344CB8AC3E}">
+        <p14:creationId xmlns:p14="http://schemas.microsoft.com/office/powerpoint/2010/main" val="3995068233"/>
+      </p:ext>
+    </p:extLst>
+  </p:cSld>
+  <p:clrMapOvr>
+    <a:masterClrMapping/>
+  </p:clrMapOvr>
+</p:sld>
+</file>
+
+<file path=ppt/slides/slide2.xml><?xml version="1.0" encoding="utf-8"?>
+<p:sld xmlns:a="http://schemas.openxmlformats.org/drawingml/2006/main" xmlns:r="http://schemas.openxmlformats.org/officeDocument/2006/relationships" xmlns:p="http://schemas.openxmlformats.org/presentationml/2006/main">
+  <p:cSld>
+    <p:spTree>
+      <p:nvGrpSpPr>
+        <p:cNvPr id="1" name=""/>
+        <p:cNvGrpSpPr/>
+        <p:nvPr/>
+      </p:nvGrpSpPr>
+      <p:grpSpPr>
+        <a:xfrm>
+          <a:off x="0" y="0"/>
+          <a:ext cx="0" cy="0"/>
+          <a:chOff x="0" y="0"/>
+          <a:chExt cx="0" cy="0"/>
+        </a:xfrm>
+      </p:grpSpPr>
+      <p:sp>
+        <p:nvSpPr>
+          <p:cNvPr id="2" name="Title 1"/>
+          <p:cNvSpPr>
+            <a:spLocks noGrp="1"/>
+          </p:cNvSpPr>
+          <p:nvPr>
+            <p:ph type="ctrTitle"/>
+          </p:nvPr>
+        </p:nvSpPr>
+        <p:spPr/>
+        <p:txBody>
+          <a:bodyPr/>
+          <a:lstStyle/>
+          <a:p>
+            <a:r>
+              <a:rPr lang="en-US" dirty="0" smtClean="0"/>
+              <a:t>Previous Versions</a:t>
+            </a:r>
+            <a:endParaRPr lang="en-US" dirty="0"/>
+          </a:p>
+        </p:txBody>
+      </p:sp>
+      <p:sp>
+        <p:nvSpPr>
+          <p:cNvPr id="3" name="Subtitle 2"/>
+          <p:cNvSpPr>
+            <a:spLocks noGrp="1"/>
+          </p:cNvSpPr>
+          <p:nvPr>
+            <p:ph type="subTitle" idx="1"/>
+          </p:nvPr>
+        </p:nvSpPr>
+        <p:spPr/>
+        <p:txBody>
+          <a:bodyPr/>
+          <a:lstStyle/>
+          <a:p>
+            <a:endParaRPr lang="en-US"/>
+          </a:p>
+        </p:txBody>
+      </p:sp>
+    </p:spTree>
+    <p:extLst>
+      <p:ext uri="{BB962C8B-B14F-4D97-AF65-F5344CB8AC3E}">
+        <p14:creationId xmlns:p14="http://schemas.microsoft.com/office/powerpoint/2010/main" val="934842914"/>
+      </p:ext>
+    </p:extLst>
+  </p:cSld>
+  <p:clrMapOvr>
+    <a:masterClrMapping/>
+  </p:clrMapOvr>
+</p:sld>
+</file>
+
+<file path=ppt/slides/slide3.xml><?xml version="1.0" encoding="utf-8"?>
+<p:sld xmlns:a="http://schemas.openxmlformats.org/drawingml/2006/main" xmlns:r="http://schemas.openxmlformats.org/officeDocument/2006/relationships" xmlns:p="http://schemas.openxmlformats.org/presentationml/2006/main">
+  <p:cSld>
+    <p:spTree>
+      <p:nvGrpSpPr>
+        <p:cNvPr id="1" name=""/>
+        <p:cNvGrpSpPr/>
+        <p:nvPr/>
+      </p:nvGrpSpPr>
+      <p:grpSpPr>
+        <a:xfrm>
+          <a:off x="0" y="0"/>
+          <a:ext cx="0" cy="0"/>
+          <a:chOff x="0" y="0"/>
+          <a:chExt cx="0" cy="0"/>
+        </a:xfrm>
+      </p:grpSpPr>
+      <p:pic>
+        <p:nvPicPr>
+          <p:cNvPr id="92" name="Picture 91" descr="(B).jpg"/>
+          <p:cNvPicPr>
+            <a:picLocks noChangeAspect="1"/>
+          </p:cNvPicPr>
+          <p:nvPr/>
+        </p:nvPicPr>
+        <p:blipFill rotWithShape="1">
+          <a:blip r:embed="rId2">
+            <a:extLst>
+              <a:ext uri="{28A0092B-C50C-407E-A947-70E740481C1C}">
+                <a14:useLocalDpi xmlns:a14="http://schemas.microsoft.com/office/drawing/2010/main" val="0"/>
+              </a:ext>
+            </a:extLst>
+          </a:blip>
+          <a:srcRect l="18929" t="22569" r="20171" b="18943"/>
+          <a:stretch/>
+        </p:blipFill>
+        <p:spPr>
+          <a:xfrm>
+            <a:off x="3252902" y="2320215"/>
+            <a:ext cx="2566012" cy="1504408"/>
+          </a:xfrm>
+          <a:prstGeom prst="rect">
+            <a:avLst/>
+          </a:prstGeom>
+        </p:spPr>
+      </p:pic>
+      <p:sp>
+        <p:nvSpPr>
+          <p:cNvPr id="48" name="Google Shape;91;p1">
+            <a:extLst>
+              <a:ext uri="{FF2B5EF4-FFF2-40B4-BE49-F238E27FC236}">
+                <a16:creationId xmlns="" xmlns:a16="http://schemas.microsoft.com/office/drawing/2014/main" id="{AD5DFFC3-2D58-4C9B-9B23-9CBAC35FD9F8}"/>
+              </a:ext>
+            </a:extLst>
+          </p:cNvPr>
+          <p:cNvSpPr/>
+          <p:nvPr/>
+        </p:nvSpPr>
+        <p:spPr>
+          <a:xfrm>
+            <a:off x="6803173" y="1978300"/>
+            <a:ext cx="1872929" cy="855299"/>
+          </a:xfrm>
+          <a:prstGeom prst="roundRect">
+            <a:avLst>
+              <a:gd name="adj" fmla="val 0"/>
+            </a:avLst>
+          </a:prstGeom>
+          <a:solidFill>
+            <a:srgbClr val="15374A"/>
+          </a:solidFill>
+          <a:ln w="9525" cap="flat" cmpd="sng">
+            <a:solidFill>
+              <a:srgbClr val="194963"/>
+            </a:solidFill>
+            <a:prstDash val="solid"/>
+            <a:round/>
+            <a:headEnd type="none" w="sm" len="sm"/>
+            <a:tailEnd type="none" w="sm" len="sm"/>
+          </a:ln>
+        </p:spPr>
+        <p:txBody>
+          <a:bodyPr spcFirstLastPara="1" wrap="square" lIns="91425" tIns="45700" rIns="91425" bIns="45700" anchor="t" anchorCtr="0">
+            <a:noAutofit/>
+          </a:bodyPr>
+          <a:lstStyle/>
+          <a:p>
+            <a:pPr marL="115888" marR="0" lvl="0" indent="-115888" algn="l" rtl="0">
+              <a:spcBef>
+                <a:spcPts val="0"/>
+              </a:spcBef>
+              <a:spcAft>
+                <a:spcPts val="0"/>
+              </a:spcAft>
+              <a:buClr>
+                <a:srgbClr val="FFFFFF"/>
+              </a:buClr>
+              <a:buSzPts val="1200"/>
+              <a:buFont typeface="Arial"/>
+              <a:buChar char="•"/>
+            </a:pPr>
+            <a:r>
+              <a:rPr lang="en-US" sz="1200" dirty="0">
+                <a:solidFill>
+                  <a:srgbClr val="FFFFFF"/>
+                </a:solidFill>
+                <a:latin typeface="Calibri"/>
+                <a:ea typeface="Calibri"/>
+                <a:cs typeface="Calibri"/>
+                <a:sym typeface="Calibri"/>
+              </a:rPr>
+              <a:t>Species</a:t>
+            </a:r>
+          </a:p>
+          <a:p>
+            <a:pPr marL="115888" marR="0" lvl="0" indent="-115888" algn="l" rtl="0">
+              <a:spcBef>
+                <a:spcPts val="0"/>
+              </a:spcBef>
+              <a:spcAft>
+                <a:spcPts val="0"/>
+              </a:spcAft>
+              <a:buClr>
+                <a:srgbClr val="FFFFFF"/>
+              </a:buClr>
+              <a:buSzPts val="1200"/>
+              <a:buFont typeface="Arial"/>
+              <a:buChar char="•"/>
+            </a:pPr>
+            <a:r>
+              <a:rPr lang="en-US" sz="1200" dirty="0">
+                <a:solidFill>
+                  <a:srgbClr val="FFFFFF"/>
+                </a:solidFill>
+                <a:latin typeface="Calibri"/>
+                <a:ea typeface="Calibri"/>
+                <a:cs typeface="Calibri"/>
+                <a:sym typeface="Calibri"/>
+              </a:rPr>
+              <a:t>Genotype</a:t>
+            </a:r>
+          </a:p>
+          <a:p>
+            <a:pPr marL="115888" marR="0" lvl="0" indent="-115888" algn="l" rtl="0">
+              <a:spcBef>
+                <a:spcPts val="0"/>
+              </a:spcBef>
+              <a:spcAft>
+                <a:spcPts val="0"/>
+              </a:spcAft>
+              <a:buClr>
+                <a:srgbClr val="FFFFFF"/>
+              </a:buClr>
+              <a:buSzPts val="1200"/>
+              <a:buFont typeface="Arial"/>
+              <a:buChar char="•"/>
+            </a:pPr>
+            <a:r>
+              <a:rPr lang="en-US" sz="1200" dirty="0">
+                <a:solidFill>
+                  <a:srgbClr val="FFFFFF"/>
+                </a:solidFill>
+                <a:latin typeface="Calibri"/>
+                <a:ea typeface="Calibri"/>
+                <a:cs typeface="Calibri"/>
+                <a:sym typeface="Calibri"/>
+              </a:rPr>
+              <a:t>Age</a:t>
+            </a:r>
+          </a:p>
+          <a:p>
+            <a:pPr marL="115888" marR="0" lvl="0" indent="-115888" algn="l" rtl="0">
+              <a:spcBef>
+                <a:spcPts val="0"/>
+              </a:spcBef>
+              <a:spcAft>
+                <a:spcPts val="0"/>
+              </a:spcAft>
+              <a:buClr>
+                <a:srgbClr val="FFFFFF"/>
+              </a:buClr>
+              <a:buSzPts val="1200"/>
+              <a:buFont typeface="Arial"/>
+              <a:buChar char="•"/>
+            </a:pPr>
+            <a:r>
+              <a:rPr lang="en-US" sz="1200" dirty="0">
+                <a:solidFill>
+                  <a:srgbClr val="FFFFFF"/>
+                </a:solidFill>
+                <a:latin typeface="Calibri"/>
+                <a:ea typeface="Calibri"/>
+                <a:cs typeface="Calibri"/>
+                <a:sym typeface="Calibri"/>
+              </a:rPr>
+              <a:t>Weight</a:t>
+            </a:r>
+          </a:p>
+          <a:p>
+            <a:pPr marL="115888" marR="0" lvl="0" indent="-115888" algn="l" rtl="0">
+              <a:spcBef>
+                <a:spcPts val="0"/>
+              </a:spcBef>
+              <a:spcAft>
+                <a:spcPts val="0"/>
+              </a:spcAft>
+              <a:buClr>
+                <a:srgbClr val="FFFFFF"/>
+              </a:buClr>
+              <a:buSzPts val="1200"/>
+              <a:buFont typeface="Arial"/>
+              <a:buChar char="•"/>
+            </a:pPr>
+            <a:endParaRPr sz="1200" dirty="0">
+              <a:solidFill>
+                <a:srgbClr val="FFFFFF"/>
+              </a:solidFill>
+              <a:latin typeface="Calibri"/>
+              <a:ea typeface="Calibri"/>
+              <a:cs typeface="Calibri"/>
+              <a:sym typeface="Calibri"/>
+            </a:endParaRPr>
+          </a:p>
+          <a:p>
+            <a:pPr marL="0" marR="0" lvl="0" indent="0" algn="l" rtl="0">
+              <a:lnSpc>
+                <a:spcPct val="100000"/>
+              </a:lnSpc>
+              <a:spcBef>
+                <a:spcPts val="0"/>
+              </a:spcBef>
+              <a:spcAft>
+                <a:spcPts val="0"/>
+              </a:spcAft>
+              <a:buClr>
+                <a:schemeClr val="dk1"/>
+              </a:buClr>
+              <a:buSzPts val="1200"/>
+              <a:buFont typeface="Calibri"/>
+              <a:buNone/>
+            </a:pPr>
+            <a:endParaRPr sz="1200" b="0" i="0" u="none" strike="noStrike" cap="none" dirty="0">
+              <a:solidFill>
+                <a:srgbClr val="FFFFFF"/>
+              </a:solidFill>
+              <a:latin typeface="Calibri"/>
+              <a:ea typeface="Calibri"/>
+              <a:cs typeface="Calibri"/>
+              <a:sym typeface="Calibri"/>
+            </a:endParaRPr>
+          </a:p>
+        </p:txBody>
+      </p:sp>
+      <p:sp>
+        <p:nvSpPr>
+          <p:cNvPr id="49" name="Google Shape;95;p1">
+            <a:extLst>
+              <a:ext uri="{FF2B5EF4-FFF2-40B4-BE49-F238E27FC236}">
+                <a16:creationId xmlns="" xmlns:a16="http://schemas.microsoft.com/office/drawing/2014/main" id="{B0D7C0F7-E63D-4170-99D4-9935E55240F5}"/>
+              </a:ext>
+            </a:extLst>
+          </p:cNvPr>
+          <p:cNvSpPr txBox="1"/>
+          <p:nvPr/>
+        </p:nvSpPr>
+        <p:spPr>
+          <a:xfrm>
+            <a:off x="3475033" y="767388"/>
+            <a:ext cx="2141787" cy="246221"/>
+          </a:xfrm>
+          <a:prstGeom prst="rect">
+            <a:avLst/>
+          </a:prstGeom>
+          <a:noFill/>
+          <a:ln>
+            <a:noFill/>
+          </a:ln>
+        </p:spPr>
+        <p:txBody>
+          <a:bodyPr spcFirstLastPara="1" wrap="square" lIns="0" tIns="0" rIns="0" bIns="0" anchor="t" anchorCtr="0">
+            <a:spAutoFit/>
+          </a:bodyPr>
+          <a:lstStyle/>
+          <a:p>
+            <a:pPr marL="0" marR="0" lvl="0" indent="0" algn="l" rtl="0">
+              <a:lnSpc>
+                <a:spcPct val="100000"/>
+              </a:lnSpc>
+              <a:spcBef>
+                <a:spcPts val="0"/>
+              </a:spcBef>
+              <a:spcAft>
+                <a:spcPts val="0"/>
+              </a:spcAft>
+              <a:buClr>
+                <a:srgbClr val="15374A"/>
+              </a:buClr>
+              <a:buSzPts val="1200"/>
+              <a:buFont typeface="Calibri"/>
+              <a:buNone/>
+            </a:pPr>
+            <a:r>
+              <a:rPr lang="en-US" sz="1600" b="1" dirty="0">
+                <a:solidFill>
+                  <a:srgbClr val="15374A"/>
+                </a:solidFill>
+                <a:latin typeface="Calibri"/>
+                <a:ea typeface="Calibri"/>
+                <a:cs typeface="Calibri"/>
+                <a:sym typeface="Calibri"/>
+              </a:rPr>
+              <a:t>E</a:t>
+            </a:r>
+            <a:r>
+              <a:rPr lang="en-US" sz="1600" b="1" i="0" u="none" strike="noStrike" cap="none" dirty="0">
+                <a:solidFill>
+                  <a:srgbClr val="15374A"/>
+                </a:solidFill>
+                <a:latin typeface="Calibri"/>
+                <a:ea typeface="Calibri"/>
+                <a:cs typeface="Calibri"/>
+                <a:sym typeface="Calibri"/>
+              </a:rPr>
+              <a:t>xperimental </a:t>
+            </a:r>
+            <a:r>
+              <a:rPr lang="en-US" sz="1600" b="1" i="0" u="none" strike="noStrike" cap="none" dirty="0" smtClean="0">
+                <a:solidFill>
+                  <a:srgbClr val="15374A"/>
+                </a:solidFill>
+                <a:latin typeface="Calibri"/>
+                <a:ea typeface="Calibri"/>
+                <a:cs typeface="Calibri"/>
+                <a:sym typeface="Calibri"/>
+              </a:rPr>
+              <a:t>Design</a:t>
+            </a:r>
+            <a:endParaRPr lang="en-US" sz="1600" b="1" i="0" u="none" strike="noStrike" cap="none" dirty="0">
+              <a:solidFill>
+                <a:srgbClr val="15374A"/>
+              </a:solidFill>
+              <a:latin typeface="Calibri"/>
+              <a:ea typeface="Calibri"/>
+              <a:cs typeface="Calibri"/>
+              <a:sym typeface="Calibri"/>
+            </a:endParaRPr>
+          </a:p>
+        </p:txBody>
+      </p:sp>
+      <p:sp>
+        <p:nvSpPr>
+          <p:cNvPr id="50" name="Google Shape;96;p1">
+            <a:extLst>
+              <a:ext uri="{FF2B5EF4-FFF2-40B4-BE49-F238E27FC236}">
+                <a16:creationId xmlns="" xmlns:a16="http://schemas.microsoft.com/office/drawing/2014/main" id="{C9B8C793-A660-4A21-8EF2-A633DC442778}"/>
+              </a:ext>
+            </a:extLst>
+          </p:cNvPr>
+          <p:cNvSpPr/>
+          <p:nvPr/>
+        </p:nvSpPr>
+        <p:spPr>
+          <a:xfrm>
+            <a:off x="3475033" y="1017800"/>
+            <a:ext cx="2095881" cy="869675"/>
+          </a:xfrm>
+          <a:prstGeom prst="roundRect">
+            <a:avLst>
+              <a:gd name="adj" fmla="val 0"/>
+            </a:avLst>
+          </a:prstGeom>
+          <a:solidFill>
+            <a:srgbClr val="15374A"/>
+          </a:solidFill>
+          <a:ln w="9525" cap="flat" cmpd="sng">
+            <a:solidFill>
+              <a:srgbClr val="194963"/>
+            </a:solidFill>
+            <a:prstDash val="solid"/>
+            <a:round/>
+            <a:headEnd type="none" w="sm" len="sm"/>
+            <a:tailEnd type="none" w="sm" len="sm"/>
+          </a:ln>
+        </p:spPr>
+        <p:txBody>
+          <a:bodyPr spcFirstLastPara="1" wrap="square" lIns="91425" tIns="45700" rIns="91425" bIns="45700" anchor="t" anchorCtr="0">
+            <a:noAutofit/>
+          </a:bodyPr>
+          <a:lstStyle/>
+          <a:p>
+            <a:pPr marL="115888" marR="0" lvl="0" indent="-115888" algn="l" rtl="0">
+              <a:spcBef>
+                <a:spcPts val="0"/>
+              </a:spcBef>
+              <a:spcAft>
+                <a:spcPts val="0"/>
+              </a:spcAft>
+              <a:buClr>
+                <a:srgbClr val="FFFFFF"/>
+              </a:buClr>
+              <a:buSzPts val="1200"/>
+              <a:buFont typeface="Arial"/>
+              <a:buChar char="•"/>
+            </a:pPr>
+            <a:r>
+              <a:rPr lang="en-US" sz="1200" dirty="0">
+                <a:solidFill>
+                  <a:srgbClr val="FFFFFF"/>
+                </a:solidFill>
+                <a:latin typeface="Calibri"/>
+                <a:ea typeface="Calibri"/>
+                <a:cs typeface="Calibri"/>
+                <a:sym typeface="Calibri"/>
+              </a:rPr>
+              <a:t>Stimuli</a:t>
+            </a:r>
+          </a:p>
+          <a:p>
+            <a:pPr marL="115888" marR="0" lvl="0" indent="-115888" algn="l" rtl="0">
+              <a:spcBef>
+                <a:spcPts val="0"/>
+              </a:spcBef>
+              <a:spcAft>
+                <a:spcPts val="0"/>
+              </a:spcAft>
+              <a:buClr>
+                <a:srgbClr val="FFFFFF"/>
+              </a:buClr>
+              <a:buSzPts val="1200"/>
+              <a:buFont typeface="Arial"/>
+              <a:buChar char="•"/>
+            </a:pPr>
+            <a:r>
+              <a:rPr lang="en-US" sz="1200" dirty="0">
+                <a:solidFill>
+                  <a:srgbClr val="FFFFFF"/>
+                </a:solidFill>
+                <a:latin typeface="Calibri"/>
+                <a:cs typeface="Calibri"/>
+                <a:sym typeface="Calibri"/>
+              </a:rPr>
+              <a:t>Environment</a:t>
+            </a:r>
+            <a:endParaRPr sz="1200" dirty="0">
+              <a:solidFill>
+                <a:srgbClr val="FFFFFF"/>
+              </a:solidFill>
+              <a:latin typeface="Calibri"/>
+              <a:ea typeface="Calibri"/>
+              <a:cs typeface="Calibri"/>
+              <a:sym typeface="Calibri"/>
+            </a:endParaRPr>
+          </a:p>
+          <a:p>
+            <a:pPr marL="115888" marR="0" lvl="0" indent="-115888" algn="l" rtl="0">
+              <a:spcBef>
+                <a:spcPts val="0"/>
+              </a:spcBef>
+              <a:spcAft>
+                <a:spcPts val="0"/>
+              </a:spcAft>
+              <a:buClr>
+                <a:srgbClr val="FFFFFF"/>
+              </a:buClr>
+              <a:buSzPts val="1200"/>
+              <a:buFont typeface="Arial"/>
+              <a:buChar char="•"/>
+            </a:pPr>
+            <a:r>
+              <a:rPr lang="en-US" sz="1200" dirty="0">
+                <a:solidFill>
+                  <a:srgbClr val="FFFFFF"/>
+                </a:solidFill>
+                <a:latin typeface="Calibri"/>
+                <a:ea typeface="Calibri"/>
+                <a:cs typeface="Calibri"/>
+                <a:sym typeface="Calibri"/>
+              </a:rPr>
+              <a:t>Trial structure</a:t>
+            </a:r>
+          </a:p>
+          <a:p>
+            <a:pPr marL="115888" marR="0" lvl="0" indent="-115888" algn="l" rtl="0">
+              <a:spcBef>
+                <a:spcPts val="0"/>
+              </a:spcBef>
+              <a:spcAft>
+                <a:spcPts val="0"/>
+              </a:spcAft>
+              <a:buClr>
+                <a:srgbClr val="FFFFFF"/>
+              </a:buClr>
+              <a:buSzPts val="1200"/>
+              <a:buFont typeface="Arial"/>
+              <a:buChar char="•"/>
+            </a:pPr>
+            <a:r>
+              <a:rPr lang="en-US" sz="1200" dirty="0">
+                <a:solidFill>
+                  <a:srgbClr val="FFFFFF"/>
+                </a:solidFill>
+                <a:latin typeface="Calibri"/>
+                <a:ea typeface="Calibri"/>
+                <a:cs typeface="Calibri"/>
+                <a:sym typeface="Calibri"/>
+              </a:rPr>
+              <a:t>Optogenetics</a:t>
+            </a:r>
+            <a:endParaRPr sz="1200" dirty="0">
+              <a:solidFill>
+                <a:srgbClr val="FFFFFF"/>
+              </a:solidFill>
+              <a:latin typeface="Calibri"/>
+              <a:ea typeface="Calibri"/>
+              <a:cs typeface="Calibri"/>
+              <a:sym typeface="Calibri"/>
+            </a:endParaRPr>
+          </a:p>
+        </p:txBody>
+      </p:sp>
+      <p:sp>
+        <p:nvSpPr>
+          <p:cNvPr id="52" name="Google Shape;90;p1">
+            <a:extLst>
+              <a:ext uri="{FF2B5EF4-FFF2-40B4-BE49-F238E27FC236}">
+                <a16:creationId xmlns="" xmlns:a16="http://schemas.microsoft.com/office/drawing/2014/main" id="{EEF72B0E-9CCF-4E7F-B810-DC35A08F7578}"/>
+              </a:ext>
+            </a:extLst>
+          </p:cNvPr>
+          <p:cNvSpPr txBox="1"/>
+          <p:nvPr/>
+        </p:nvSpPr>
+        <p:spPr>
+          <a:xfrm>
+            <a:off x="6930969" y="1476937"/>
+            <a:ext cx="1758372" cy="492443"/>
+          </a:xfrm>
+          <a:prstGeom prst="rect">
+            <a:avLst/>
+          </a:prstGeom>
+          <a:noFill/>
+          <a:ln>
+            <a:noFill/>
+          </a:ln>
+        </p:spPr>
+        <p:txBody>
+          <a:bodyPr spcFirstLastPara="1" wrap="square" lIns="0" tIns="0" rIns="0" bIns="0" anchor="t" anchorCtr="0">
+            <a:spAutoFit/>
+          </a:bodyPr>
+          <a:lstStyle/>
+          <a:p>
+            <a:pPr marL="0" marR="0" lvl="0" indent="0" algn="l" rtl="0">
+              <a:lnSpc>
+                <a:spcPct val="100000"/>
+              </a:lnSpc>
+              <a:spcBef>
+                <a:spcPts val="0"/>
+              </a:spcBef>
+              <a:spcAft>
+                <a:spcPts val="0"/>
+              </a:spcAft>
+              <a:buClr>
+                <a:srgbClr val="15374A"/>
+              </a:buClr>
+              <a:buSzPts val="1200"/>
+              <a:buFont typeface="Calibri"/>
+              <a:buNone/>
+            </a:pPr>
+            <a:r>
+              <a:rPr lang="en-US" sz="1600" b="1" i="0" u="none" strike="noStrike" cap="none" dirty="0">
+                <a:solidFill>
+                  <a:srgbClr val="15374A"/>
+                </a:solidFill>
+                <a:latin typeface="Calibri"/>
+                <a:ea typeface="Calibri"/>
+                <a:cs typeface="Calibri"/>
+                <a:sym typeface="Calibri"/>
+              </a:rPr>
+              <a:t>Experimental </a:t>
+            </a:r>
+          </a:p>
+          <a:p>
+            <a:pPr marL="0" marR="0" lvl="0" indent="0" algn="l" rtl="0">
+              <a:lnSpc>
+                <a:spcPct val="100000"/>
+              </a:lnSpc>
+              <a:spcBef>
+                <a:spcPts val="0"/>
+              </a:spcBef>
+              <a:spcAft>
+                <a:spcPts val="0"/>
+              </a:spcAft>
+              <a:buClr>
+                <a:srgbClr val="15374A"/>
+              </a:buClr>
+              <a:buSzPts val="1200"/>
+              <a:buFont typeface="Calibri"/>
+              <a:buNone/>
+            </a:pPr>
+            <a:r>
+              <a:rPr lang="en-US" sz="1600" b="1" i="0" u="none" strike="noStrike" cap="none" dirty="0">
+                <a:solidFill>
+                  <a:srgbClr val="15374A"/>
+                </a:solidFill>
+                <a:latin typeface="Calibri"/>
+                <a:ea typeface="Calibri"/>
+                <a:cs typeface="Calibri"/>
+                <a:sym typeface="Calibri"/>
+              </a:rPr>
+              <a:t>Subjects </a:t>
+            </a:r>
+          </a:p>
+        </p:txBody>
+      </p:sp>
+      <p:sp>
+        <p:nvSpPr>
+          <p:cNvPr id="53" name="Google Shape;105;p1">
+            <a:extLst>
+              <a:ext uri="{FF2B5EF4-FFF2-40B4-BE49-F238E27FC236}">
+                <a16:creationId xmlns="" xmlns:a16="http://schemas.microsoft.com/office/drawing/2014/main" id="{D1DE1C64-4F2A-4519-BBA3-A55B0CC6FBC4}"/>
+              </a:ext>
+            </a:extLst>
+          </p:cNvPr>
+          <p:cNvSpPr/>
+          <p:nvPr/>
+        </p:nvSpPr>
+        <p:spPr>
+          <a:xfrm rot="5400000">
+            <a:off x="4370643" y="1937402"/>
+            <a:ext cx="344976" cy="334598"/>
+          </a:xfrm>
+          <a:prstGeom prst="rightArrow">
+            <a:avLst>
+              <a:gd name="adj1" fmla="val 50000"/>
+              <a:gd name="adj2" fmla="val 50000"/>
+            </a:avLst>
+          </a:prstGeom>
+          <a:solidFill>
+            <a:srgbClr val="15374A"/>
+          </a:solidFill>
+          <a:ln w="9525" cap="flat" cmpd="sng">
+            <a:noFill/>
+            <a:prstDash val="solid"/>
+            <a:round/>
+            <a:headEnd type="none" w="sm" len="sm"/>
+            <a:tailEnd type="none" w="sm" len="sm"/>
+          </a:ln>
+        </p:spPr>
+        <p:txBody>
+          <a:bodyPr spcFirstLastPara="1" wrap="square" lIns="91425" tIns="45700" rIns="91425" bIns="45700" anchor="ctr" anchorCtr="0">
+            <a:noAutofit/>
+          </a:bodyPr>
+          <a:lstStyle/>
+          <a:p>
+            <a:pPr marL="0" marR="0" lvl="0" indent="0" algn="ctr" rtl="0">
+              <a:lnSpc>
+                <a:spcPct val="100000"/>
+              </a:lnSpc>
+              <a:spcBef>
+                <a:spcPts val="0"/>
+              </a:spcBef>
+              <a:spcAft>
+                <a:spcPts val="0"/>
+              </a:spcAft>
+              <a:buClr>
+                <a:schemeClr val="dk1"/>
+              </a:buClr>
+              <a:buSzPts val="1800"/>
+              <a:buFont typeface="Calibri"/>
+              <a:buNone/>
+            </a:pPr>
+            <a:endParaRPr sz="1800" b="0" i="0" u="none" strike="noStrike" cap="none">
+              <a:solidFill>
+                <a:srgbClr val="FFFFFF"/>
+              </a:solidFill>
+              <a:latin typeface="Arial"/>
+              <a:ea typeface="Arial"/>
+              <a:cs typeface="Arial"/>
+              <a:sym typeface="Arial"/>
+            </a:endParaRPr>
+          </a:p>
+        </p:txBody>
+      </p:sp>
+      <p:sp>
+        <p:nvSpPr>
+          <p:cNvPr id="54" name="Google Shape;90;p1">
+            <a:extLst>
+              <a:ext uri="{FF2B5EF4-FFF2-40B4-BE49-F238E27FC236}">
+                <a16:creationId xmlns="" xmlns:a16="http://schemas.microsoft.com/office/drawing/2014/main" id="{DEAFE1FC-2F64-4F88-A3E4-04CD06110E0F}"/>
+              </a:ext>
+            </a:extLst>
+          </p:cNvPr>
+          <p:cNvSpPr txBox="1"/>
+          <p:nvPr/>
+        </p:nvSpPr>
+        <p:spPr>
+          <a:xfrm>
+            <a:off x="534133" y="1731068"/>
+            <a:ext cx="1758372" cy="246221"/>
+          </a:xfrm>
+          <a:prstGeom prst="rect">
+            <a:avLst/>
+          </a:prstGeom>
+          <a:noFill/>
+          <a:ln>
+            <a:noFill/>
+          </a:ln>
+        </p:spPr>
+        <p:txBody>
+          <a:bodyPr spcFirstLastPara="1" wrap="square" lIns="0" tIns="0" rIns="0" bIns="0" anchor="t" anchorCtr="0">
+            <a:spAutoFit/>
+          </a:bodyPr>
+          <a:lstStyle/>
+          <a:p>
+            <a:pPr marL="0" marR="0" lvl="0" indent="0" algn="l" rtl="0">
+              <a:lnSpc>
+                <a:spcPct val="100000"/>
+              </a:lnSpc>
+              <a:spcBef>
+                <a:spcPts val="0"/>
+              </a:spcBef>
+              <a:spcAft>
+                <a:spcPts val="0"/>
+              </a:spcAft>
+              <a:buClr>
+                <a:srgbClr val="15374A"/>
+              </a:buClr>
+              <a:buSzPts val="1200"/>
+              <a:buFont typeface="Calibri"/>
+              <a:buNone/>
+            </a:pPr>
+            <a:r>
+              <a:rPr lang="en-US" sz="1600" b="1" i="0" u="none" strike="noStrike" cap="none" dirty="0">
+                <a:solidFill>
+                  <a:srgbClr val="15374A"/>
+                </a:solidFill>
+                <a:latin typeface="Calibri"/>
+                <a:ea typeface="Calibri"/>
+                <a:cs typeface="Calibri"/>
+                <a:sym typeface="Calibri"/>
+              </a:rPr>
+              <a:t>Data Acquisition</a:t>
+            </a:r>
+            <a:endParaRPr sz="1600" b="1" i="0" u="none" strike="noStrike" cap="none" dirty="0">
+              <a:solidFill>
+                <a:srgbClr val="15374A"/>
+              </a:solidFill>
+              <a:latin typeface="Calibri"/>
+              <a:ea typeface="Calibri"/>
+              <a:cs typeface="Calibri"/>
+              <a:sym typeface="Calibri"/>
+            </a:endParaRPr>
+          </a:p>
+        </p:txBody>
+      </p:sp>
+      <p:sp>
+        <p:nvSpPr>
+          <p:cNvPr id="55" name="Google Shape;91;p1">
+            <a:extLst>
+              <a:ext uri="{FF2B5EF4-FFF2-40B4-BE49-F238E27FC236}">
+                <a16:creationId xmlns="" xmlns:a16="http://schemas.microsoft.com/office/drawing/2014/main" id="{41C2EBB3-5BF7-4F80-947A-B14A03B71943}"/>
+              </a:ext>
+            </a:extLst>
+          </p:cNvPr>
+          <p:cNvSpPr/>
+          <p:nvPr/>
+        </p:nvSpPr>
+        <p:spPr>
+          <a:xfrm>
+            <a:off x="534134" y="1978300"/>
+            <a:ext cx="1872928" cy="855299"/>
+          </a:xfrm>
+          <a:prstGeom prst="roundRect">
+            <a:avLst>
+              <a:gd name="adj" fmla="val 0"/>
+            </a:avLst>
+          </a:prstGeom>
+          <a:solidFill>
+            <a:srgbClr val="15374A"/>
+          </a:solidFill>
+          <a:ln w="9525" cap="flat" cmpd="sng">
+            <a:solidFill>
+              <a:srgbClr val="194963"/>
+            </a:solidFill>
+            <a:prstDash val="solid"/>
+            <a:round/>
+            <a:headEnd type="none" w="sm" len="sm"/>
+            <a:tailEnd type="none" w="sm" len="sm"/>
+          </a:ln>
+        </p:spPr>
+        <p:txBody>
+          <a:bodyPr spcFirstLastPara="1" wrap="square" lIns="91425" tIns="45700" rIns="91425" bIns="45700" anchor="t" anchorCtr="0">
+            <a:noAutofit/>
+          </a:bodyPr>
+          <a:lstStyle/>
+          <a:p>
+            <a:pPr marL="115888" marR="0" lvl="0" indent="-115888" algn="l" rtl="0">
+              <a:spcBef>
+                <a:spcPts val="0"/>
+              </a:spcBef>
+              <a:spcAft>
+                <a:spcPts val="0"/>
+              </a:spcAft>
+              <a:buClr>
+                <a:srgbClr val="FFFFFF"/>
+              </a:buClr>
+              <a:buSzPts val="1200"/>
+              <a:buFont typeface="Arial"/>
+              <a:buChar char="•"/>
+            </a:pPr>
+            <a:r>
+              <a:rPr lang="en-US" sz="1200" dirty="0">
+                <a:solidFill>
+                  <a:srgbClr val="FFFFFF"/>
+                </a:solidFill>
+                <a:latin typeface="Calibri"/>
+                <a:ea typeface="Calibri"/>
+                <a:cs typeface="Calibri"/>
+                <a:sym typeface="Calibri"/>
+              </a:rPr>
+              <a:t>Device settings</a:t>
+            </a:r>
+            <a:endParaRPr dirty="0"/>
+          </a:p>
+          <a:p>
+            <a:pPr marL="115888" marR="0" lvl="0" indent="-115888" algn="l" rtl="0">
+              <a:spcBef>
+                <a:spcPts val="0"/>
+              </a:spcBef>
+              <a:spcAft>
+                <a:spcPts val="0"/>
+              </a:spcAft>
+              <a:buClr>
+                <a:srgbClr val="FFFFFF"/>
+              </a:buClr>
+              <a:buSzPts val="1200"/>
+              <a:buFont typeface="Arial"/>
+              <a:buChar char="•"/>
+            </a:pPr>
+            <a:r>
+              <a:rPr lang="en-US" sz="1200" dirty="0">
+                <a:solidFill>
+                  <a:srgbClr val="FFFFFF"/>
+                </a:solidFill>
+                <a:latin typeface="Calibri"/>
+                <a:ea typeface="Calibri"/>
+                <a:cs typeface="Calibri"/>
+                <a:sym typeface="Calibri"/>
+              </a:rPr>
+              <a:t>Filtering parameters</a:t>
+            </a:r>
+          </a:p>
+          <a:p>
+            <a:pPr marL="115888" marR="0" lvl="0" indent="-115888" algn="l" rtl="0">
+              <a:spcBef>
+                <a:spcPts val="0"/>
+              </a:spcBef>
+              <a:spcAft>
+                <a:spcPts val="0"/>
+              </a:spcAft>
+              <a:buClr>
+                <a:srgbClr val="FFFFFF"/>
+              </a:buClr>
+              <a:buSzPts val="1200"/>
+              <a:buFont typeface="Arial"/>
+              <a:buChar char="•"/>
+            </a:pPr>
+            <a:r>
+              <a:rPr lang="en-US" sz="1200" dirty="0">
+                <a:solidFill>
+                  <a:srgbClr val="FFFFFF"/>
+                </a:solidFill>
+                <a:latin typeface="Calibri"/>
+                <a:ea typeface="Calibri"/>
+                <a:cs typeface="Calibri"/>
+                <a:sym typeface="Calibri"/>
+              </a:rPr>
+              <a:t>Sampling rate</a:t>
+            </a:r>
+          </a:p>
+          <a:p>
+            <a:pPr marL="115888" indent="-115888">
+              <a:buClr>
+                <a:srgbClr val="FFFFFF"/>
+              </a:buClr>
+              <a:buSzPts val="1200"/>
+              <a:buFont typeface="Arial"/>
+              <a:buChar char="•"/>
+            </a:pPr>
+            <a:r>
+              <a:rPr lang="en-US" sz="1200" dirty="0">
+                <a:solidFill>
+                  <a:srgbClr val="FFFFFF"/>
+                </a:solidFill>
+                <a:latin typeface="Calibri"/>
+                <a:ea typeface="Calibri"/>
+                <a:cs typeface="Calibri"/>
+                <a:sym typeface="Calibri"/>
+              </a:rPr>
+              <a:t>Recording/imaging area</a:t>
+            </a:r>
+            <a:endParaRPr sz="1200" dirty="0">
+              <a:solidFill>
+                <a:srgbClr val="FFFFFF"/>
+              </a:solidFill>
+              <a:latin typeface="Calibri"/>
+              <a:ea typeface="Calibri"/>
+              <a:cs typeface="Calibri"/>
+              <a:sym typeface="Calibri"/>
+            </a:endParaRPr>
+          </a:p>
+          <a:p>
+            <a:pPr marL="0" marR="0" lvl="0" indent="0" algn="l" rtl="0">
+              <a:lnSpc>
+                <a:spcPct val="100000"/>
+              </a:lnSpc>
+              <a:spcBef>
+                <a:spcPts val="0"/>
+              </a:spcBef>
+              <a:spcAft>
+                <a:spcPts val="0"/>
+              </a:spcAft>
+              <a:buClr>
+                <a:schemeClr val="dk1"/>
+              </a:buClr>
+              <a:buSzPts val="1200"/>
+              <a:buFont typeface="Calibri"/>
+              <a:buNone/>
+            </a:pPr>
+            <a:endParaRPr sz="1200" b="0" i="0" u="none" strike="noStrike" cap="none" dirty="0">
+              <a:solidFill>
+                <a:srgbClr val="FFFFFF"/>
+              </a:solidFill>
+              <a:latin typeface="Calibri"/>
+              <a:ea typeface="Calibri"/>
+              <a:cs typeface="Calibri"/>
+              <a:sym typeface="Calibri"/>
+            </a:endParaRPr>
+          </a:p>
+        </p:txBody>
+      </p:sp>
+      <p:sp>
+        <p:nvSpPr>
+          <p:cNvPr id="56" name="Google Shape;92;p1">
+            <a:extLst>
+              <a:ext uri="{FF2B5EF4-FFF2-40B4-BE49-F238E27FC236}">
+                <a16:creationId xmlns="" xmlns:a16="http://schemas.microsoft.com/office/drawing/2014/main" id="{2DA28BAB-00F6-4580-8176-A2700BB88CED}"/>
+              </a:ext>
+            </a:extLst>
+          </p:cNvPr>
+          <p:cNvSpPr txBox="1"/>
+          <p:nvPr/>
+        </p:nvSpPr>
+        <p:spPr>
+          <a:xfrm>
+            <a:off x="6210358" y="3616924"/>
+            <a:ext cx="1357328" cy="246221"/>
+          </a:xfrm>
+          <a:prstGeom prst="rect">
+            <a:avLst/>
+          </a:prstGeom>
+          <a:noFill/>
+          <a:ln>
+            <a:noFill/>
+          </a:ln>
+        </p:spPr>
+        <p:txBody>
+          <a:bodyPr spcFirstLastPara="1" wrap="square" lIns="0" tIns="0" rIns="0" bIns="0" anchor="t" anchorCtr="0">
+            <a:spAutoFit/>
+          </a:bodyPr>
+          <a:lstStyle/>
+          <a:p>
+            <a:pPr marL="0" marR="0" lvl="0" indent="0" algn="l" rtl="0">
+              <a:lnSpc>
+                <a:spcPct val="100000"/>
+              </a:lnSpc>
+              <a:spcBef>
+                <a:spcPts val="0"/>
+              </a:spcBef>
+              <a:spcAft>
+                <a:spcPts val="0"/>
+              </a:spcAft>
+              <a:buClr>
+                <a:srgbClr val="15374A"/>
+              </a:buClr>
+              <a:buSzPts val="1200"/>
+              <a:buFont typeface="Calibri"/>
+              <a:buNone/>
+            </a:pPr>
+            <a:r>
+              <a:rPr lang="en-US" sz="1600" b="1" i="0" u="none" strike="noStrike" cap="none" dirty="0">
+                <a:solidFill>
+                  <a:srgbClr val="15374A"/>
+                </a:solidFill>
+                <a:latin typeface="Calibri"/>
+                <a:ea typeface="Calibri"/>
+                <a:cs typeface="Calibri"/>
+                <a:sym typeface="Calibri"/>
+              </a:rPr>
+              <a:t>Behavior</a:t>
+            </a:r>
+            <a:endParaRPr sz="1600" b="1" i="0" u="none" strike="noStrike" cap="none" dirty="0">
+              <a:solidFill>
+                <a:srgbClr val="15374A"/>
+              </a:solidFill>
+              <a:latin typeface="Calibri"/>
+              <a:ea typeface="Calibri"/>
+              <a:cs typeface="Calibri"/>
+              <a:sym typeface="Calibri"/>
+            </a:endParaRPr>
+          </a:p>
+        </p:txBody>
+      </p:sp>
+      <p:sp>
+        <p:nvSpPr>
+          <p:cNvPr id="57" name="Google Shape;93;p1">
+            <a:extLst>
+              <a:ext uri="{FF2B5EF4-FFF2-40B4-BE49-F238E27FC236}">
+                <a16:creationId xmlns="" xmlns:a16="http://schemas.microsoft.com/office/drawing/2014/main" id="{6CCA3F80-5CC1-4CA1-90B6-3D9BCBBA1553}"/>
+              </a:ext>
+            </a:extLst>
+          </p:cNvPr>
+          <p:cNvSpPr/>
+          <p:nvPr/>
+        </p:nvSpPr>
+        <p:spPr>
+          <a:xfrm>
+            <a:off x="6227648" y="3854243"/>
+            <a:ext cx="2135335" cy="855299"/>
+          </a:xfrm>
+          <a:prstGeom prst="roundRect">
+            <a:avLst>
+              <a:gd name="adj" fmla="val 0"/>
+            </a:avLst>
+          </a:prstGeom>
+          <a:solidFill>
+            <a:srgbClr val="15374A"/>
+          </a:solidFill>
+          <a:ln w="9525" cap="flat" cmpd="sng">
+            <a:solidFill>
+              <a:srgbClr val="194963"/>
+            </a:solidFill>
+            <a:prstDash val="solid"/>
+            <a:round/>
+            <a:headEnd type="none" w="sm" len="sm"/>
+            <a:tailEnd type="none" w="sm" len="sm"/>
+          </a:ln>
+        </p:spPr>
+        <p:txBody>
+          <a:bodyPr spcFirstLastPara="1" wrap="square" lIns="91425" tIns="45700" rIns="91425" bIns="45700" anchor="t" anchorCtr="0">
+            <a:noAutofit/>
+          </a:bodyPr>
+          <a:lstStyle/>
+          <a:p>
+            <a:pPr marL="115888" marR="0" lvl="0" indent="-115888" algn="l" rtl="0">
+              <a:lnSpc>
+                <a:spcPct val="100000"/>
+              </a:lnSpc>
+              <a:spcBef>
+                <a:spcPts val="0"/>
+              </a:spcBef>
+              <a:spcAft>
+                <a:spcPts val="0"/>
+              </a:spcAft>
+              <a:buClr>
+                <a:srgbClr val="FFFFFF"/>
+              </a:buClr>
+              <a:buSzPts val="1200"/>
+              <a:buFont typeface="Arial"/>
+              <a:buChar char="•"/>
+            </a:pPr>
+            <a:r>
+              <a:rPr lang="en-US" sz="1200" b="0" i="0" u="none" strike="noStrike" cap="none" dirty="0">
+                <a:solidFill>
+                  <a:srgbClr val="FFFFFF"/>
+                </a:solidFill>
+                <a:latin typeface="Calibri"/>
+                <a:ea typeface="Calibri"/>
+                <a:cs typeface="Calibri"/>
+                <a:sym typeface="Calibri"/>
+              </a:rPr>
+              <a:t>Task accuracy</a:t>
+            </a:r>
+          </a:p>
+          <a:p>
+            <a:pPr marL="115888" marR="0" lvl="0" indent="-115888" algn="l" rtl="0">
+              <a:lnSpc>
+                <a:spcPct val="100000"/>
+              </a:lnSpc>
+              <a:spcBef>
+                <a:spcPts val="0"/>
+              </a:spcBef>
+              <a:spcAft>
+                <a:spcPts val="0"/>
+              </a:spcAft>
+              <a:buClr>
+                <a:srgbClr val="FFFFFF"/>
+              </a:buClr>
+              <a:buSzPts val="1200"/>
+              <a:buFont typeface="Arial"/>
+              <a:buChar char="•"/>
+            </a:pPr>
+            <a:r>
+              <a:rPr lang="en-US" sz="1200" dirty="0">
+                <a:solidFill>
+                  <a:srgbClr val="FFFFFF"/>
+                </a:solidFill>
+                <a:latin typeface="Calibri"/>
+                <a:ea typeface="Calibri"/>
+                <a:cs typeface="Calibri"/>
+                <a:sym typeface="Calibri"/>
+              </a:rPr>
+              <a:t>Task response time</a:t>
+            </a:r>
+            <a:endParaRPr lang="en-US" sz="1200" b="0" i="0" u="none" strike="noStrike" cap="none" dirty="0">
+              <a:solidFill>
+                <a:srgbClr val="FFFFFF"/>
+              </a:solidFill>
+              <a:latin typeface="Calibri"/>
+              <a:ea typeface="Calibri"/>
+              <a:cs typeface="Calibri"/>
+              <a:sym typeface="Calibri"/>
+            </a:endParaRPr>
+          </a:p>
+          <a:p>
+            <a:pPr marL="115888" marR="0" lvl="0" indent="-115888" algn="l" rtl="0">
+              <a:lnSpc>
+                <a:spcPct val="100000"/>
+              </a:lnSpc>
+              <a:spcBef>
+                <a:spcPts val="0"/>
+              </a:spcBef>
+              <a:spcAft>
+                <a:spcPts val="0"/>
+              </a:spcAft>
+              <a:buClr>
+                <a:srgbClr val="FFFFFF"/>
+              </a:buClr>
+              <a:buSzPts val="1200"/>
+              <a:buFont typeface="Arial"/>
+              <a:buChar char="•"/>
+            </a:pPr>
+            <a:r>
+              <a:rPr lang="en-US" sz="1200" b="0" i="0" u="none" strike="noStrike" cap="none" dirty="0">
+                <a:solidFill>
+                  <a:srgbClr val="FFFFFF"/>
+                </a:solidFill>
+                <a:latin typeface="Calibri"/>
+                <a:ea typeface="Calibri"/>
+                <a:cs typeface="Calibri"/>
+                <a:sym typeface="Calibri"/>
+              </a:rPr>
+              <a:t>Video and motion tracking</a:t>
+            </a:r>
+            <a:endParaRPr dirty="0"/>
+          </a:p>
+          <a:p>
+            <a:pPr marL="115888" marR="0" lvl="0" indent="-115888" algn="l" rtl="0">
+              <a:lnSpc>
+                <a:spcPct val="100000"/>
+              </a:lnSpc>
+              <a:spcBef>
+                <a:spcPts val="0"/>
+              </a:spcBef>
+              <a:spcAft>
+                <a:spcPts val="0"/>
+              </a:spcAft>
+              <a:buClr>
+                <a:srgbClr val="FFFFFF"/>
+              </a:buClr>
+              <a:buSzPts val="1200"/>
+              <a:buFont typeface="Arial"/>
+              <a:buChar char="•"/>
+            </a:pPr>
+            <a:r>
+              <a:rPr lang="en-US" sz="1200" b="0" i="0" u="none" strike="noStrike" cap="none" dirty="0">
+                <a:solidFill>
+                  <a:srgbClr val="FFFFFF"/>
+                </a:solidFill>
+                <a:latin typeface="Calibri"/>
+                <a:ea typeface="Calibri"/>
+                <a:cs typeface="Calibri"/>
+                <a:sym typeface="Calibri"/>
+              </a:rPr>
+              <a:t>Audio</a:t>
+            </a:r>
+            <a:endParaRPr sz="1200" b="0" i="0" u="none" strike="noStrike" cap="none" dirty="0">
+              <a:solidFill>
+                <a:srgbClr val="FFFFFF"/>
+              </a:solidFill>
+              <a:latin typeface="Calibri"/>
+              <a:ea typeface="Calibri"/>
+              <a:cs typeface="Calibri"/>
+              <a:sym typeface="Calibri"/>
+            </a:endParaRPr>
+          </a:p>
+        </p:txBody>
+      </p:sp>
+      <p:sp>
+        <p:nvSpPr>
+          <p:cNvPr id="58" name="Google Shape;92;p1">
+            <a:extLst>
+              <a:ext uri="{FF2B5EF4-FFF2-40B4-BE49-F238E27FC236}">
+                <a16:creationId xmlns="" xmlns:a16="http://schemas.microsoft.com/office/drawing/2014/main" id="{FACF2BB3-A2CF-4345-BFAD-509D0EFA7437}"/>
+              </a:ext>
+            </a:extLst>
+          </p:cNvPr>
+          <p:cNvSpPr txBox="1"/>
+          <p:nvPr/>
+        </p:nvSpPr>
+        <p:spPr>
+          <a:xfrm>
+            <a:off x="396805" y="3635243"/>
+            <a:ext cx="1357328" cy="246221"/>
+          </a:xfrm>
+          <a:prstGeom prst="rect">
+            <a:avLst/>
+          </a:prstGeom>
+          <a:noFill/>
+          <a:ln>
+            <a:noFill/>
+          </a:ln>
+        </p:spPr>
+        <p:txBody>
+          <a:bodyPr spcFirstLastPara="1" wrap="square" lIns="0" tIns="0" rIns="0" bIns="0" anchor="t" anchorCtr="0">
+            <a:spAutoFit/>
+          </a:bodyPr>
+          <a:lstStyle/>
+          <a:p>
+            <a:pPr marL="0" marR="0" lvl="0" indent="0" algn="l" rtl="0">
+              <a:lnSpc>
+                <a:spcPct val="100000"/>
+              </a:lnSpc>
+              <a:spcBef>
+                <a:spcPts val="0"/>
+              </a:spcBef>
+              <a:spcAft>
+                <a:spcPts val="0"/>
+              </a:spcAft>
+              <a:buClr>
+                <a:srgbClr val="15374A"/>
+              </a:buClr>
+              <a:buSzPts val="1200"/>
+              <a:buFont typeface="Calibri"/>
+              <a:buNone/>
+            </a:pPr>
+            <a:r>
+              <a:rPr lang="en-US" sz="1600" b="1" i="0" u="none" strike="noStrike" cap="none" dirty="0">
+                <a:solidFill>
+                  <a:srgbClr val="15374A"/>
+                </a:solidFill>
+                <a:latin typeface="Calibri"/>
+                <a:ea typeface="Calibri"/>
+                <a:cs typeface="Calibri"/>
+                <a:sym typeface="Calibri"/>
+              </a:rPr>
+              <a:t>Neural Activity</a:t>
+            </a:r>
+            <a:endParaRPr sz="1600" b="1" i="0" u="none" strike="noStrike" cap="none" dirty="0">
+              <a:solidFill>
+                <a:srgbClr val="15374A"/>
+              </a:solidFill>
+              <a:latin typeface="Calibri"/>
+              <a:ea typeface="Calibri"/>
+              <a:cs typeface="Calibri"/>
+              <a:sym typeface="Calibri"/>
+            </a:endParaRPr>
+          </a:p>
+        </p:txBody>
+      </p:sp>
+      <p:sp>
+        <p:nvSpPr>
+          <p:cNvPr id="59" name="Google Shape;93;p1">
+            <a:extLst>
+              <a:ext uri="{FF2B5EF4-FFF2-40B4-BE49-F238E27FC236}">
+                <a16:creationId xmlns="" xmlns:a16="http://schemas.microsoft.com/office/drawing/2014/main" id="{0D7CCA4B-A9C5-4184-AE8B-08B92D1D5EB2}"/>
+              </a:ext>
+            </a:extLst>
+          </p:cNvPr>
+          <p:cNvSpPr/>
+          <p:nvPr/>
+        </p:nvSpPr>
+        <p:spPr>
+          <a:xfrm>
+            <a:off x="414096" y="3872563"/>
+            <a:ext cx="2463140" cy="858970"/>
+          </a:xfrm>
+          <a:prstGeom prst="roundRect">
+            <a:avLst>
+              <a:gd name="adj" fmla="val 0"/>
+            </a:avLst>
+          </a:prstGeom>
+          <a:solidFill>
+            <a:srgbClr val="15374A"/>
+          </a:solidFill>
+          <a:ln w="9525" cap="flat" cmpd="sng">
+            <a:solidFill>
+              <a:srgbClr val="194963"/>
+            </a:solidFill>
+            <a:prstDash val="solid"/>
+            <a:round/>
+            <a:headEnd type="none" w="sm" len="sm"/>
+            <a:tailEnd type="none" w="sm" len="sm"/>
+          </a:ln>
+        </p:spPr>
+        <p:txBody>
+          <a:bodyPr spcFirstLastPara="1" wrap="square" lIns="91425" tIns="45700" rIns="91425" bIns="45700" anchor="t" anchorCtr="0">
+            <a:noAutofit/>
+          </a:bodyPr>
+          <a:lstStyle/>
+          <a:p>
+            <a:pPr marL="115888" marR="0" lvl="0" indent="-115888" algn="l" rtl="0">
+              <a:lnSpc>
+                <a:spcPct val="100000"/>
+              </a:lnSpc>
+              <a:spcBef>
+                <a:spcPts val="0"/>
+              </a:spcBef>
+              <a:spcAft>
+                <a:spcPts val="0"/>
+              </a:spcAft>
+              <a:buClr>
+                <a:srgbClr val="FFFFFF"/>
+              </a:buClr>
+              <a:buSzPts val="1200"/>
+              <a:buFont typeface="Arial"/>
+              <a:buChar char="•"/>
+            </a:pPr>
+            <a:r>
+              <a:rPr lang="en-US" sz="1200" b="0" i="0" u="none" strike="noStrike" cap="none" dirty="0">
+                <a:solidFill>
+                  <a:srgbClr val="FFFFFF"/>
+                </a:solidFill>
+                <a:latin typeface="Calibri"/>
+                <a:ea typeface="Calibri"/>
+                <a:cs typeface="Calibri"/>
+                <a:sym typeface="Calibri"/>
+              </a:rPr>
+              <a:t>Extracellular electrophysiology</a:t>
+            </a:r>
+          </a:p>
+          <a:p>
+            <a:pPr marL="115888" marR="0" lvl="0" indent="-115888" algn="l" rtl="0">
+              <a:lnSpc>
+                <a:spcPct val="100000"/>
+              </a:lnSpc>
+              <a:spcBef>
+                <a:spcPts val="0"/>
+              </a:spcBef>
+              <a:spcAft>
+                <a:spcPts val="0"/>
+              </a:spcAft>
+              <a:buClr>
+                <a:srgbClr val="FFFFFF"/>
+              </a:buClr>
+              <a:buSzPts val="1200"/>
+              <a:buFont typeface="Arial"/>
+              <a:buChar char="•"/>
+            </a:pPr>
+            <a:r>
+              <a:rPr lang="en-US" sz="1200" dirty="0">
+                <a:solidFill>
+                  <a:srgbClr val="FFFFFF"/>
+                </a:solidFill>
+                <a:latin typeface="Calibri"/>
+                <a:ea typeface="Calibri"/>
+                <a:cs typeface="Calibri"/>
+                <a:sym typeface="Calibri"/>
+              </a:rPr>
+              <a:t>Intracellular electrophysiology</a:t>
+            </a:r>
+          </a:p>
+          <a:p>
+            <a:pPr marL="115888" marR="0" lvl="0" indent="-115888" algn="l" rtl="0">
+              <a:lnSpc>
+                <a:spcPct val="100000"/>
+              </a:lnSpc>
+              <a:spcBef>
+                <a:spcPts val="0"/>
+              </a:spcBef>
+              <a:spcAft>
+                <a:spcPts val="0"/>
+              </a:spcAft>
+              <a:buClr>
+                <a:srgbClr val="FFFFFF"/>
+              </a:buClr>
+              <a:buSzPts val="1200"/>
+              <a:buFont typeface="Arial"/>
+              <a:buChar char="•"/>
+            </a:pPr>
+            <a:r>
+              <a:rPr lang="en-US" sz="1200" b="0" i="0" u="none" strike="noStrike" cap="none" dirty="0">
+                <a:solidFill>
+                  <a:srgbClr val="FFFFFF"/>
+                </a:solidFill>
+                <a:latin typeface="Calibri"/>
+                <a:ea typeface="Calibri"/>
+                <a:cs typeface="Calibri"/>
+                <a:sym typeface="Calibri"/>
+              </a:rPr>
+              <a:t>Two-photon imaging</a:t>
+            </a:r>
+          </a:p>
+          <a:p>
+            <a:pPr marL="115888" marR="0" lvl="0" indent="-115888" algn="l" rtl="0">
+              <a:lnSpc>
+                <a:spcPct val="100000"/>
+              </a:lnSpc>
+              <a:spcBef>
+                <a:spcPts val="0"/>
+              </a:spcBef>
+              <a:spcAft>
+                <a:spcPts val="0"/>
+              </a:spcAft>
+              <a:buClr>
+                <a:srgbClr val="FFFFFF"/>
+              </a:buClr>
+              <a:buSzPts val="1200"/>
+              <a:buFont typeface="Arial"/>
+              <a:buChar char="•"/>
+            </a:pPr>
+            <a:r>
+              <a:rPr lang="en-US" sz="1200" dirty="0">
+                <a:solidFill>
+                  <a:srgbClr val="FFFFFF"/>
+                </a:solidFill>
+                <a:latin typeface="Calibri"/>
+                <a:ea typeface="Calibri"/>
+                <a:cs typeface="Calibri"/>
+                <a:sym typeface="Calibri"/>
+              </a:rPr>
+              <a:t>Functional ultrasound imaging</a:t>
+            </a:r>
+            <a:endParaRPr sz="1200" b="0" i="0" u="none" strike="noStrike" cap="none" dirty="0">
+              <a:solidFill>
+                <a:srgbClr val="FFFFFF"/>
+              </a:solidFill>
+              <a:latin typeface="Calibri"/>
+              <a:ea typeface="Calibri"/>
+              <a:cs typeface="Calibri"/>
+              <a:sym typeface="Calibri"/>
+            </a:endParaRPr>
+          </a:p>
+        </p:txBody>
+      </p:sp>
+      <p:sp>
+        <p:nvSpPr>
+          <p:cNvPr id="60" name="Google Shape;106;p1">
+            <a:extLst>
+              <a:ext uri="{FF2B5EF4-FFF2-40B4-BE49-F238E27FC236}">
+                <a16:creationId xmlns="" xmlns:a16="http://schemas.microsoft.com/office/drawing/2014/main" id="{E05F7D88-50A6-4383-BB16-EB5B35AC27C1}"/>
+              </a:ext>
+            </a:extLst>
+          </p:cNvPr>
+          <p:cNvSpPr/>
+          <p:nvPr/>
+        </p:nvSpPr>
+        <p:spPr>
+          <a:xfrm rot="7759153" flipH="1">
+            <a:off x="2872209" y="4035353"/>
+            <a:ext cx="935616" cy="334598"/>
+          </a:xfrm>
+          <a:prstGeom prst="rightArrow">
+            <a:avLst>
+              <a:gd name="adj1" fmla="val 50000"/>
+              <a:gd name="adj2" fmla="val 50000"/>
+            </a:avLst>
+          </a:prstGeom>
+          <a:solidFill>
+            <a:srgbClr val="15374A"/>
+          </a:solidFill>
+          <a:ln w="9525" cap="flat" cmpd="sng">
+            <a:noFill/>
+            <a:prstDash val="solid"/>
+            <a:round/>
+            <a:headEnd type="none" w="sm" len="sm"/>
+            <a:tailEnd type="none" w="sm" len="sm"/>
+          </a:ln>
+        </p:spPr>
+        <p:txBody>
+          <a:bodyPr spcFirstLastPara="1" wrap="square" lIns="91425" tIns="45700" rIns="91425" bIns="45700" anchor="ctr" anchorCtr="0">
+            <a:noAutofit/>
+          </a:bodyPr>
+          <a:lstStyle/>
+          <a:p>
+            <a:pPr marL="0" marR="0" lvl="0" indent="0" algn="ctr" rtl="0">
+              <a:lnSpc>
+                <a:spcPct val="100000"/>
+              </a:lnSpc>
+              <a:spcBef>
+                <a:spcPts val="0"/>
+              </a:spcBef>
+              <a:spcAft>
+                <a:spcPts val="0"/>
+              </a:spcAft>
+              <a:buClr>
+                <a:schemeClr val="dk1"/>
+              </a:buClr>
+              <a:buSzPts val="1800"/>
+              <a:buFont typeface="Calibri"/>
+              <a:buNone/>
+            </a:pPr>
+            <a:endParaRPr sz="1800" b="0" i="0" u="none" strike="noStrike" cap="none">
+              <a:solidFill>
+                <a:srgbClr val="FFFFFF"/>
+              </a:solidFill>
+              <a:latin typeface="Arial"/>
+              <a:ea typeface="Arial"/>
+              <a:cs typeface="Arial"/>
+              <a:sym typeface="Arial"/>
+            </a:endParaRPr>
+          </a:p>
+        </p:txBody>
+      </p:sp>
+      <p:grpSp>
+        <p:nvGrpSpPr>
+          <p:cNvPr id="61" name="Group 60">
+            <a:extLst>
+              <a:ext uri="{FF2B5EF4-FFF2-40B4-BE49-F238E27FC236}">
+                <a16:creationId xmlns="" xmlns:a16="http://schemas.microsoft.com/office/drawing/2014/main" id="{F7B6E189-11DE-4B5E-AE59-FBCC841F6533}"/>
+              </a:ext>
+            </a:extLst>
+          </p:cNvPr>
+          <p:cNvGrpSpPr/>
+          <p:nvPr/>
+        </p:nvGrpSpPr>
+        <p:grpSpPr>
+          <a:xfrm>
+            <a:off x="2577405" y="3468784"/>
+            <a:ext cx="612648" cy="612648"/>
+            <a:chOff x="3274407" y="6373397"/>
+            <a:chExt cx="612980" cy="612979"/>
+          </a:xfrm>
+        </p:grpSpPr>
+        <p:sp>
+          <p:nvSpPr>
+            <p:cNvPr id="62" name="Rectangle: Rounded Corners 74">
+              <a:extLst>
+                <a:ext uri="{FF2B5EF4-FFF2-40B4-BE49-F238E27FC236}">
+                  <a16:creationId xmlns="" xmlns:a16="http://schemas.microsoft.com/office/drawing/2014/main" id="{60A5C00C-D997-44AD-AD77-EDDF9B280928}"/>
+                </a:ext>
+              </a:extLst>
+            </p:cNvPr>
+            <p:cNvSpPr/>
+            <p:nvPr/>
+          </p:nvSpPr>
+          <p:spPr>
+            <a:xfrm>
+              <a:off x="3274407" y="6373397"/>
+              <a:ext cx="612979" cy="612979"/>
+            </a:xfrm>
+            <a:prstGeom prst="roundRect">
+              <a:avLst>
+                <a:gd name="adj" fmla="val 10731"/>
+              </a:avLst>
+            </a:prstGeom>
+            <a:solidFill>
+              <a:schemeClr val="bg2">
+                <a:lumMod val="20000"/>
+                <a:lumOff val="80000"/>
+              </a:schemeClr>
+            </a:solidFill>
+            <a:ln>
+              <a:solidFill>
+                <a:srgbClr val="0070C0"/>
+              </a:solidFill>
+            </a:ln>
+          </p:spPr>
+          <p:style>
+            <a:lnRef idx="2">
+              <a:schemeClr val="accent1">
+                <a:shade val="50000"/>
+              </a:schemeClr>
+            </a:lnRef>
+            <a:fillRef idx="1">
+              <a:schemeClr val="accent1"/>
+            </a:fillRef>
+            <a:effectRef idx="0">
+              <a:schemeClr val="accent1"/>
+            </a:effectRef>
+            <a:fontRef idx="minor">
+              <a:schemeClr val="lt1"/>
+            </a:fontRef>
+          </p:style>
+          <p:txBody>
+            <a:bodyPr rtlCol="0" anchor="ctr"/>
+            <a:lstStyle/>
+            <a:p>
+              <a:pPr algn="ctr"/>
+              <a:endParaRPr lang="en-US"/>
+            </a:p>
+          </p:txBody>
+        </p:sp>
+        <p:pic>
+          <p:nvPicPr>
+            <p:cNvPr id="63" name="Picture 62">
+              <a:extLst>
+                <a:ext uri="{FF2B5EF4-FFF2-40B4-BE49-F238E27FC236}">
+                  <a16:creationId xmlns="" xmlns:a16="http://schemas.microsoft.com/office/drawing/2014/main" id="{B6E9A71D-DF6E-4024-94D6-6E7DCEB5B356}"/>
+                </a:ext>
+              </a:extLst>
+            </p:cNvPr>
+            <p:cNvPicPr>
+              <a:picLocks noChangeAspect="1"/>
+            </p:cNvPicPr>
+            <p:nvPr/>
+          </p:nvPicPr>
+          <p:blipFill>
+            <a:blip r:embed="rId3"/>
+            <a:stretch>
+              <a:fillRect/>
+            </a:stretch>
+          </p:blipFill>
+          <p:spPr>
+            <a:xfrm>
+              <a:off x="3293245" y="6444992"/>
+              <a:ext cx="594142" cy="469787"/>
+            </a:xfrm>
+            <a:prstGeom prst="rect">
+              <a:avLst/>
+            </a:prstGeom>
+          </p:spPr>
+        </p:pic>
+      </p:grpSp>
+      <p:grpSp>
+        <p:nvGrpSpPr>
+          <p:cNvPr id="64" name="Group 63">
+            <a:extLst>
+              <a:ext uri="{FF2B5EF4-FFF2-40B4-BE49-F238E27FC236}">
+                <a16:creationId xmlns="" xmlns:a16="http://schemas.microsoft.com/office/drawing/2014/main" id="{8533F0EA-233B-4922-87F3-6B8EB543F41C}"/>
+              </a:ext>
+            </a:extLst>
+          </p:cNvPr>
+          <p:cNvGrpSpPr/>
+          <p:nvPr/>
+        </p:nvGrpSpPr>
+        <p:grpSpPr>
+          <a:xfrm>
+            <a:off x="8030999" y="3450465"/>
+            <a:ext cx="670304" cy="615581"/>
+            <a:chOff x="3923188" y="1726803"/>
+            <a:chExt cx="567853" cy="521494"/>
+          </a:xfrm>
+        </p:grpSpPr>
+        <p:grpSp>
+          <p:nvGrpSpPr>
+            <p:cNvPr id="65" name="Group 64">
+              <a:extLst>
+                <a:ext uri="{FF2B5EF4-FFF2-40B4-BE49-F238E27FC236}">
+                  <a16:creationId xmlns="" xmlns:a16="http://schemas.microsoft.com/office/drawing/2014/main" id="{6CAEF187-8E94-4B99-9C5D-47EF335D9089}"/>
+                </a:ext>
+              </a:extLst>
+            </p:cNvPr>
+            <p:cNvGrpSpPr/>
+            <p:nvPr/>
+          </p:nvGrpSpPr>
+          <p:grpSpPr>
+            <a:xfrm>
+              <a:off x="3923188" y="1726803"/>
+              <a:ext cx="521760" cy="521494"/>
+              <a:chOff x="3429000" y="4012406"/>
+              <a:chExt cx="521760" cy="521494"/>
+            </a:xfrm>
+          </p:grpSpPr>
+          <p:sp>
+            <p:nvSpPr>
+              <p:cNvPr id="67" name="Rectangle: Rounded Corners 69">
+                <a:extLst>
+                  <a:ext uri="{FF2B5EF4-FFF2-40B4-BE49-F238E27FC236}">
+                    <a16:creationId xmlns="" xmlns:a16="http://schemas.microsoft.com/office/drawing/2014/main" id="{46ADD4FB-21F0-490C-905B-48C9F3F82299}"/>
+                  </a:ext>
+                </a:extLst>
+              </p:cNvPr>
+              <p:cNvSpPr/>
+              <p:nvPr/>
+            </p:nvSpPr>
+            <p:spPr>
+              <a:xfrm>
+                <a:off x="3429000" y="4012406"/>
+                <a:ext cx="521494" cy="521494"/>
+              </a:xfrm>
+              <a:prstGeom prst="roundRect">
+                <a:avLst>
+                  <a:gd name="adj" fmla="val 10731"/>
+                </a:avLst>
+              </a:prstGeom>
+              <a:solidFill>
+                <a:schemeClr val="bg2">
+                  <a:lumMod val="20000"/>
+                  <a:lumOff val="80000"/>
+                </a:schemeClr>
+              </a:solidFill>
+              <a:ln>
+                <a:solidFill>
+                  <a:srgbClr val="0070C0"/>
+                </a:solidFill>
+              </a:ln>
+            </p:spPr>
+            <p:style>
+              <a:lnRef idx="2">
+                <a:schemeClr val="accent1">
+                  <a:shade val="50000"/>
+                </a:schemeClr>
+              </a:lnRef>
+              <a:fillRef idx="1">
+                <a:schemeClr val="accent1"/>
+              </a:fillRef>
+              <a:effectRef idx="0">
+                <a:schemeClr val="accent1"/>
+              </a:effectRef>
+              <a:fontRef idx="minor">
+                <a:schemeClr val="lt1"/>
+              </a:fontRef>
+            </p:style>
+            <p:txBody>
+              <a:bodyPr rtlCol="0" anchor="ctr"/>
+              <a:lstStyle/>
+              <a:p>
+                <a:pPr algn="ctr"/>
+                <a:endParaRPr lang="en-US"/>
+              </a:p>
+            </p:txBody>
+          </p:sp>
+          <p:cxnSp>
+            <p:nvCxnSpPr>
+              <p:cNvPr id="68" name="Straight Connector 67">
+                <a:extLst>
+                  <a:ext uri="{FF2B5EF4-FFF2-40B4-BE49-F238E27FC236}">
+                    <a16:creationId xmlns="" xmlns:a16="http://schemas.microsoft.com/office/drawing/2014/main" id="{73A77711-C875-4EBC-A6FD-364AA238DF7E}"/>
+                  </a:ext>
+                </a:extLst>
+              </p:cNvPr>
+              <p:cNvCxnSpPr>
+                <a:cxnSpLocks/>
+              </p:cNvCxnSpPr>
+              <p:nvPr/>
+            </p:nvCxnSpPr>
+            <p:spPr>
+              <a:xfrm>
+                <a:off x="3566962" y="4192712"/>
+                <a:ext cx="383532" cy="0"/>
+              </a:xfrm>
+              <a:prstGeom prst="line">
+                <a:avLst/>
+              </a:prstGeom>
+              <a:ln w="28575">
+                <a:solidFill>
+                  <a:srgbClr val="0070C0"/>
+                </a:solidFill>
+              </a:ln>
+            </p:spPr>
+            <p:style>
+              <a:lnRef idx="1">
+                <a:schemeClr val="accent1"/>
+              </a:lnRef>
+              <a:fillRef idx="0">
+                <a:schemeClr val="accent1"/>
+              </a:fillRef>
+              <a:effectRef idx="0">
+                <a:schemeClr val="accent1"/>
+              </a:effectRef>
+              <a:fontRef idx="minor">
+                <a:schemeClr val="tx1"/>
+              </a:fontRef>
+            </p:style>
+          </p:cxnSp>
+          <p:cxnSp>
+            <p:nvCxnSpPr>
+              <p:cNvPr id="69" name="Straight Connector 68">
+                <a:extLst>
+                  <a:ext uri="{FF2B5EF4-FFF2-40B4-BE49-F238E27FC236}">
+                    <a16:creationId xmlns="" xmlns:a16="http://schemas.microsoft.com/office/drawing/2014/main" id="{11861DC9-C16D-45C2-98AE-3973A32FEF15}"/>
+                  </a:ext>
+                </a:extLst>
+              </p:cNvPr>
+              <p:cNvCxnSpPr>
+                <a:cxnSpLocks/>
+              </p:cNvCxnSpPr>
+              <p:nvPr/>
+            </p:nvCxnSpPr>
+            <p:spPr>
+              <a:xfrm>
+                <a:off x="3566962" y="4366528"/>
+                <a:ext cx="383798" cy="0"/>
+              </a:xfrm>
+              <a:prstGeom prst="line">
+                <a:avLst/>
+              </a:prstGeom>
+              <a:ln w="28575">
+                <a:solidFill>
+                  <a:srgbClr val="0070C0"/>
+                </a:solidFill>
+              </a:ln>
+            </p:spPr>
+            <p:style>
+              <a:lnRef idx="1">
+                <a:schemeClr val="accent1"/>
+              </a:lnRef>
+              <a:fillRef idx="0">
+                <a:schemeClr val="accent1"/>
+              </a:fillRef>
+              <a:effectRef idx="0">
+                <a:schemeClr val="accent1"/>
+              </a:effectRef>
+              <a:fontRef idx="minor">
+                <a:schemeClr val="tx1"/>
+              </a:fontRef>
+            </p:style>
+          </p:cxnSp>
+          <p:pic>
+            <p:nvPicPr>
+              <p:cNvPr id="70" name="Picture 2" descr="File:Twemoji2 1f9c0.svg">
+                <a:extLst>
+                  <a:ext uri="{FF2B5EF4-FFF2-40B4-BE49-F238E27FC236}">
+                    <a16:creationId xmlns="" xmlns:a16="http://schemas.microsoft.com/office/drawing/2014/main" id="{878AD6F0-9FA0-4E08-8018-03B17D4BD401}"/>
+                  </a:ext>
+                </a:extLst>
+              </p:cNvPr>
+              <p:cNvPicPr>
+                <a:picLocks noChangeAspect="1" noChangeArrowheads="1"/>
+              </p:cNvPicPr>
+              <p:nvPr/>
+            </p:nvPicPr>
+            <p:blipFill>
+              <a:blip r:embed="rId4">
+                <a:extLst>
+                  <a:ext uri="{28A0092B-C50C-407E-A947-70E740481C1C}">
+                    <a14:useLocalDpi xmlns:a14="http://schemas.microsoft.com/office/drawing/2010/main" val="0"/>
+                  </a:ext>
+                </a:extLst>
+              </a:blip>
+              <a:srcRect/>
+              <a:stretch>
+                <a:fillRect/>
+              </a:stretch>
+            </p:blipFill>
+            <p:spPr bwMode="auto">
+              <a:xfrm rot="10800000" flipH="1" flipV="1">
+                <a:off x="3776282" y="4023098"/>
+                <a:ext cx="154152" cy="154152"/>
+              </a:xfrm>
+              <a:prstGeom prst="rect">
+                <a:avLst/>
+              </a:prstGeom>
+              <a:noFill/>
+              <a:extLst>
+                <a:ext uri="{909E8E84-426E-40dd-AFC4-6F175D3DCCD1}">
+                  <a14:hiddenFill xmlns:a14="http://schemas.microsoft.com/office/drawing/2010/main">
+                    <a:solidFill>
+                      <a:srgbClr val="FFFFFF"/>
+                    </a:solidFill>
+                  </a14:hiddenFill>
+                </a:ext>
+              </a:extLst>
+            </p:spPr>
+          </p:pic>
+          <p:pic>
+            <p:nvPicPr>
+              <p:cNvPr id="71" name="Picture 4" descr="Image result for mouse icon">
+                <a:extLst>
+                  <a:ext uri="{FF2B5EF4-FFF2-40B4-BE49-F238E27FC236}">
+                    <a16:creationId xmlns="" xmlns:a16="http://schemas.microsoft.com/office/drawing/2014/main" id="{1D9E7CF6-722E-4805-B459-91333BA63464}"/>
+                  </a:ext>
+                </a:extLst>
+              </p:cNvPr>
+              <p:cNvPicPr>
+                <a:picLocks noChangeAspect="1" noChangeArrowheads="1"/>
+              </p:cNvPicPr>
+              <p:nvPr/>
+            </p:nvPicPr>
+            <p:blipFill rotWithShape="1">
+              <a:blip r:embed="rId5">
+                <a:extLst>
+                  <a:ext uri="{28A0092B-C50C-407E-A947-70E740481C1C}">
+                    <a14:useLocalDpi xmlns:a14="http://schemas.microsoft.com/office/drawing/2010/main" val="0"/>
+                  </a:ext>
+                </a:extLst>
+              </a:blip>
+              <a:srcRect l="7842"/>
+              <a:stretch/>
+            </p:blipFill>
+            <p:spPr bwMode="auto">
+              <a:xfrm>
+                <a:off x="3529826" y="4017170"/>
+                <a:ext cx="274641" cy="149006"/>
+              </a:xfrm>
+              <a:prstGeom prst="rect">
+                <a:avLst/>
+              </a:prstGeom>
+              <a:noFill/>
+              <a:extLst>
+                <a:ext uri="{909E8E84-426E-40dd-AFC4-6F175D3DCCD1}">
+                  <a14:hiddenFill xmlns:a14="http://schemas.microsoft.com/office/drawing/2010/main">
+                    <a:solidFill>
+                      <a:srgbClr val="FFFFFF"/>
+                    </a:solidFill>
+                  </a14:hiddenFill>
+                </a:ext>
+              </a:extLst>
+            </p:spPr>
+          </p:pic>
+        </p:grpSp>
+        <p:sp>
+          <p:nvSpPr>
+            <p:cNvPr id="66" name="Arc 65">
+              <a:extLst>
+                <a:ext uri="{FF2B5EF4-FFF2-40B4-BE49-F238E27FC236}">
+                  <a16:creationId xmlns="" xmlns:a16="http://schemas.microsoft.com/office/drawing/2014/main" id="{36D59BD8-3664-49AF-9987-803A471D777C}"/>
+                </a:ext>
+              </a:extLst>
+            </p:cNvPr>
+            <p:cNvSpPr/>
+            <p:nvPr/>
+          </p:nvSpPr>
+          <p:spPr>
+            <a:xfrm>
+              <a:off x="3986216" y="1816951"/>
+              <a:ext cx="504825" cy="192023"/>
+            </a:xfrm>
+            <a:prstGeom prst="arc">
+              <a:avLst>
+                <a:gd name="adj1" fmla="val 2868603"/>
+                <a:gd name="adj2" fmla="val 12375068"/>
+              </a:avLst>
+            </a:prstGeom>
+            <a:ln w="19050">
+              <a:prstDash val="sysDash"/>
+              <a:headEnd type="none" w="med" len="med"/>
+              <a:tailEnd type="none" w="sm" len="sm"/>
+            </a:ln>
+          </p:spPr>
+          <p:style>
+            <a:lnRef idx="1">
+              <a:schemeClr val="accent1"/>
+            </a:lnRef>
+            <a:fillRef idx="0">
+              <a:schemeClr val="accent1"/>
+            </a:fillRef>
+            <a:effectRef idx="0">
+              <a:schemeClr val="accent1"/>
+            </a:effectRef>
+            <a:fontRef idx="minor">
+              <a:schemeClr val="tx1"/>
+            </a:fontRef>
+          </p:style>
+          <p:txBody>
+            <a:bodyPr rtlCol="0" anchor="ctr"/>
+            <a:lstStyle/>
+            <a:p>
+              <a:pPr algn="ctr"/>
+              <a:endParaRPr lang="en-US"/>
+            </a:p>
+          </p:txBody>
+        </p:sp>
+      </p:grpSp>
+      <p:grpSp>
+        <p:nvGrpSpPr>
+          <p:cNvPr id="72" name="Group 71">
+            <a:extLst>
+              <a:ext uri="{FF2B5EF4-FFF2-40B4-BE49-F238E27FC236}">
+                <a16:creationId xmlns="" xmlns:a16="http://schemas.microsoft.com/office/drawing/2014/main" id="{A147092B-0C2D-43D9-AFCE-929CF5ACDA5D}"/>
+              </a:ext>
+            </a:extLst>
+          </p:cNvPr>
+          <p:cNvGrpSpPr/>
+          <p:nvPr/>
+        </p:nvGrpSpPr>
+        <p:grpSpPr>
+          <a:xfrm>
+            <a:off x="5251903" y="746971"/>
+            <a:ext cx="667512" cy="612648"/>
+            <a:chOff x="3923187" y="2721936"/>
+            <a:chExt cx="667512" cy="612648"/>
+          </a:xfrm>
+        </p:grpSpPr>
+        <p:grpSp>
+          <p:nvGrpSpPr>
+            <p:cNvPr id="73" name="Group 72">
+              <a:extLst>
+                <a:ext uri="{FF2B5EF4-FFF2-40B4-BE49-F238E27FC236}">
+                  <a16:creationId xmlns="" xmlns:a16="http://schemas.microsoft.com/office/drawing/2014/main" id="{490778BE-56F6-46DE-988E-1697407FD7B8}"/>
+                </a:ext>
+              </a:extLst>
+            </p:cNvPr>
+            <p:cNvGrpSpPr/>
+            <p:nvPr/>
+          </p:nvGrpSpPr>
+          <p:grpSpPr>
+            <a:xfrm>
+              <a:off x="3923187" y="2721936"/>
+              <a:ext cx="613330" cy="612648"/>
+              <a:chOff x="3429000" y="4012406"/>
+              <a:chExt cx="521760" cy="521494"/>
+            </a:xfrm>
+          </p:grpSpPr>
+          <p:sp>
+            <p:nvSpPr>
+              <p:cNvPr id="77" name="Rectangle: Rounded Corners 79">
+                <a:extLst>
+                  <a:ext uri="{FF2B5EF4-FFF2-40B4-BE49-F238E27FC236}">
+                    <a16:creationId xmlns="" xmlns:a16="http://schemas.microsoft.com/office/drawing/2014/main" id="{FC567C61-02BE-43BC-BF5B-00B58CD29A58}"/>
+                  </a:ext>
+                </a:extLst>
+              </p:cNvPr>
+              <p:cNvSpPr/>
+              <p:nvPr/>
+            </p:nvSpPr>
+            <p:spPr>
+              <a:xfrm>
+                <a:off x="3429000" y="4012406"/>
+                <a:ext cx="521494" cy="521494"/>
+              </a:xfrm>
+              <a:prstGeom prst="roundRect">
+                <a:avLst>
+                  <a:gd name="adj" fmla="val 10731"/>
+                </a:avLst>
+              </a:prstGeom>
+              <a:solidFill>
+                <a:schemeClr val="bg2">
+                  <a:lumMod val="20000"/>
+                  <a:lumOff val="80000"/>
+                </a:schemeClr>
+              </a:solidFill>
+              <a:ln>
+                <a:solidFill>
+                  <a:srgbClr val="0070C0"/>
+                </a:solidFill>
+              </a:ln>
+            </p:spPr>
+            <p:style>
+              <a:lnRef idx="2">
+                <a:schemeClr val="accent1">
+                  <a:shade val="50000"/>
+                </a:schemeClr>
+              </a:lnRef>
+              <a:fillRef idx="1">
+                <a:schemeClr val="accent1"/>
+              </a:fillRef>
+              <a:effectRef idx="0">
+                <a:schemeClr val="accent1"/>
+              </a:effectRef>
+              <a:fontRef idx="minor">
+                <a:schemeClr val="lt1"/>
+              </a:fontRef>
+            </p:style>
+            <p:txBody>
+              <a:bodyPr rtlCol="0" anchor="ctr"/>
+              <a:lstStyle/>
+              <a:p>
+                <a:pPr algn="ctr"/>
+                <a:endParaRPr lang="en-US"/>
+              </a:p>
+            </p:txBody>
+          </p:sp>
+          <p:cxnSp>
+            <p:nvCxnSpPr>
+              <p:cNvPr id="78" name="Straight Connector 77">
+                <a:extLst>
+                  <a:ext uri="{FF2B5EF4-FFF2-40B4-BE49-F238E27FC236}">
+                    <a16:creationId xmlns="" xmlns:a16="http://schemas.microsoft.com/office/drawing/2014/main" id="{597C7B93-EC0B-4843-A781-62CB75DE6C38}"/>
+                  </a:ext>
+                </a:extLst>
+              </p:cNvPr>
+              <p:cNvCxnSpPr>
+                <a:cxnSpLocks/>
+              </p:cNvCxnSpPr>
+              <p:nvPr/>
+            </p:nvCxnSpPr>
+            <p:spPr>
+              <a:xfrm>
+                <a:off x="3566962" y="4192712"/>
+                <a:ext cx="383532" cy="0"/>
+              </a:xfrm>
+              <a:prstGeom prst="line">
+                <a:avLst/>
+              </a:prstGeom>
+              <a:ln w="28575">
+                <a:solidFill>
+                  <a:srgbClr val="0070C0"/>
+                </a:solidFill>
+              </a:ln>
+            </p:spPr>
+            <p:style>
+              <a:lnRef idx="1">
+                <a:schemeClr val="accent1"/>
+              </a:lnRef>
+              <a:fillRef idx="0">
+                <a:schemeClr val="accent1"/>
+              </a:fillRef>
+              <a:effectRef idx="0">
+                <a:schemeClr val="accent1"/>
+              </a:effectRef>
+              <a:fontRef idx="minor">
+                <a:schemeClr val="tx1"/>
+              </a:fontRef>
+            </p:style>
+          </p:cxnSp>
+          <p:cxnSp>
+            <p:nvCxnSpPr>
+              <p:cNvPr id="79" name="Straight Connector 78">
+                <a:extLst>
+                  <a:ext uri="{FF2B5EF4-FFF2-40B4-BE49-F238E27FC236}">
+                    <a16:creationId xmlns="" xmlns:a16="http://schemas.microsoft.com/office/drawing/2014/main" id="{2110824D-F9C4-4EF8-A877-9FB477089FF9}"/>
+                  </a:ext>
+                </a:extLst>
+              </p:cNvPr>
+              <p:cNvCxnSpPr>
+                <a:cxnSpLocks/>
+              </p:cNvCxnSpPr>
+              <p:nvPr/>
+            </p:nvCxnSpPr>
+            <p:spPr>
+              <a:xfrm>
+                <a:off x="3566962" y="4366528"/>
+                <a:ext cx="383798" cy="0"/>
+              </a:xfrm>
+              <a:prstGeom prst="line">
+                <a:avLst/>
+              </a:prstGeom>
+              <a:ln w="28575">
+                <a:solidFill>
+                  <a:srgbClr val="0070C0"/>
+                </a:solidFill>
+              </a:ln>
+            </p:spPr>
+            <p:style>
+              <a:lnRef idx="1">
+                <a:schemeClr val="accent1"/>
+              </a:lnRef>
+              <a:fillRef idx="0">
+                <a:schemeClr val="accent1"/>
+              </a:fillRef>
+              <a:effectRef idx="0">
+                <a:schemeClr val="accent1"/>
+              </a:effectRef>
+              <a:fontRef idx="minor">
+                <a:schemeClr val="tx1"/>
+              </a:fontRef>
+            </p:style>
+          </p:cxnSp>
+          <p:pic>
+            <p:nvPicPr>
+              <p:cNvPr id="80" name="Picture 2" descr="File:Twemoji2 1f9c0.svg">
+                <a:extLst>
+                  <a:ext uri="{FF2B5EF4-FFF2-40B4-BE49-F238E27FC236}">
+                    <a16:creationId xmlns="" xmlns:a16="http://schemas.microsoft.com/office/drawing/2014/main" id="{5A5B871B-2192-4A7B-9324-28EA08801BA6}"/>
+                  </a:ext>
+                </a:extLst>
+              </p:cNvPr>
+              <p:cNvPicPr>
+                <a:picLocks noChangeAspect="1" noChangeArrowheads="1"/>
+              </p:cNvPicPr>
+              <p:nvPr/>
+            </p:nvPicPr>
+            <p:blipFill>
+              <a:blip r:embed="rId4">
+                <a:extLst>
+                  <a:ext uri="{28A0092B-C50C-407E-A947-70E740481C1C}">
+                    <a14:useLocalDpi xmlns:a14="http://schemas.microsoft.com/office/drawing/2010/main" val="0"/>
+                  </a:ext>
+                </a:extLst>
+              </a:blip>
+              <a:srcRect/>
+              <a:stretch>
+                <a:fillRect/>
+              </a:stretch>
+            </p:blipFill>
+            <p:spPr bwMode="auto">
+              <a:xfrm rot="10800000" flipH="1" flipV="1">
+                <a:off x="3776282" y="4023098"/>
+                <a:ext cx="154152" cy="154152"/>
+              </a:xfrm>
+              <a:prstGeom prst="rect">
+                <a:avLst/>
+              </a:prstGeom>
+              <a:noFill/>
+              <a:extLst>
+                <a:ext uri="{909E8E84-426E-40dd-AFC4-6F175D3DCCD1}">
+                  <a14:hiddenFill xmlns:a14="http://schemas.microsoft.com/office/drawing/2010/main">
+                    <a:solidFill>
+                      <a:srgbClr val="FFFFFF"/>
+                    </a:solidFill>
+                  </a14:hiddenFill>
+                </a:ext>
+              </a:extLst>
+            </p:spPr>
+          </p:pic>
+          <p:pic>
+            <p:nvPicPr>
+              <p:cNvPr id="81" name="Picture 4" descr="Image result for mouse icon">
+                <a:extLst>
+                  <a:ext uri="{FF2B5EF4-FFF2-40B4-BE49-F238E27FC236}">
+                    <a16:creationId xmlns="" xmlns:a16="http://schemas.microsoft.com/office/drawing/2014/main" id="{D5347191-B65F-41EA-9F1B-CC42CB5A71DD}"/>
+                  </a:ext>
+                </a:extLst>
+              </p:cNvPr>
+              <p:cNvPicPr>
+                <a:picLocks noChangeAspect="1" noChangeArrowheads="1"/>
+              </p:cNvPicPr>
+              <p:nvPr/>
+            </p:nvPicPr>
+            <p:blipFill rotWithShape="1">
+              <a:blip r:embed="rId5">
+                <a:extLst>
+                  <a:ext uri="{28A0092B-C50C-407E-A947-70E740481C1C}">
+                    <a14:useLocalDpi xmlns:a14="http://schemas.microsoft.com/office/drawing/2010/main" val="0"/>
+                  </a:ext>
+                </a:extLst>
+              </a:blip>
+              <a:srcRect l="12949" t="1" b="-1"/>
+              <a:stretch/>
+            </p:blipFill>
+            <p:spPr bwMode="auto">
+              <a:xfrm flipH="1">
+                <a:off x="3646177" y="4176143"/>
+                <a:ext cx="300263" cy="172463"/>
+              </a:xfrm>
+              <a:prstGeom prst="rect">
+                <a:avLst/>
+              </a:prstGeom>
+              <a:noFill/>
+              <a:extLst>
+                <a:ext uri="{909E8E84-426E-40dd-AFC4-6F175D3DCCD1}">
+                  <a14:hiddenFill xmlns:a14="http://schemas.microsoft.com/office/drawing/2010/main">
+                    <a:solidFill>
+                      <a:srgbClr val="FFFFFF"/>
+                    </a:solidFill>
+                  </a14:hiddenFill>
+                </a:ext>
+              </a:extLst>
+            </p:spPr>
+          </p:pic>
+        </p:grpSp>
+        <p:sp>
+          <p:nvSpPr>
+            <p:cNvPr id="74" name="Arc 73">
+              <a:extLst>
+                <a:ext uri="{FF2B5EF4-FFF2-40B4-BE49-F238E27FC236}">
+                  <a16:creationId xmlns="" xmlns:a16="http://schemas.microsoft.com/office/drawing/2014/main" id="{B4B4F5E7-F57D-4F7E-8710-F039DE83A35F}"/>
+                </a:ext>
+              </a:extLst>
+            </p:cNvPr>
+            <p:cNvSpPr/>
+            <p:nvPr/>
+          </p:nvSpPr>
+          <p:spPr>
+            <a:xfrm>
+              <a:off x="3997277" y="2827841"/>
+              <a:ext cx="593422" cy="225587"/>
+            </a:xfrm>
+            <a:prstGeom prst="arc">
+              <a:avLst>
+                <a:gd name="adj1" fmla="val 9628733"/>
+                <a:gd name="adj2" fmla="val 15347771"/>
+              </a:avLst>
+            </a:prstGeom>
+            <a:ln w="19050">
+              <a:prstDash val="sysDash"/>
+              <a:headEnd type="none" w="med" len="med"/>
+              <a:tailEnd type="arrow" w="sm" len="sm"/>
+            </a:ln>
+          </p:spPr>
+          <p:style>
+            <a:lnRef idx="1">
+              <a:schemeClr val="accent1"/>
+            </a:lnRef>
+            <a:fillRef idx="0">
+              <a:schemeClr val="accent1"/>
+            </a:fillRef>
+            <a:effectRef idx="0">
+              <a:schemeClr val="accent1"/>
+            </a:effectRef>
+            <a:fontRef idx="minor">
+              <a:schemeClr val="tx1"/>
+            </a:fontRef>
+          </p:style>
+          <p:txBody>
+            <a:bodyPr rtlCol="0" anchor="ctr"/>
+            <a:lstStyle/>
+            <a:p>
+              <a:pPr algn="ctr"/>
+              <a:endParaRPr lang="en-US"/>
+            </a:p>
+          </p:txBody>
+        </p:sp>
+        <p:sp>
+          <p:nvSpPr>
+            <p:cNvPr id="75" name="Arc 74">
+              <a:extLst>
+                <a:ext uri="{FF2B5EF4-FFF2-40B4-BE49-F238E27FC236}">
+                  <a16:creationId xmlns="" xmlns:a16="http://schemas.microsoft.com/office/drawing/2014/main" id="{84B77428-1CA5-49C5-8159-3D722A871D57}"/>
+                </a:ext>
+              </a:extLst>
+            </p:cNvPr>
+            <p:cNvSpPr/>
+            <p:nvPr/>
+          </p:nvSpPr>
+          <p:spPr>
+            <a:xfrm flipV="1">
+              <a:off x="3997277" y="3008939"/>
+              <a:ext cx="593422" cy="225587"/>
+            </a:xfrm>
+            <a:prstGeom prst="arc">
+              <a:avLst>
+                <a:gd name="adj1" fmla="val 9614978"/>
+                <a:gd name="adj2" fmla="val 15347771"/>
+              </a:avLst>
+            </a:prstGeom>
+            <a:ln w="19050">
+              <a:prstDash val="sysDash"/>
+              <a:headEnd type="none" w="med" len="med"/>
+              <a:tailEnd type="arrow" w="sm" len="sm"/>
+            </a:ln>
+          </p:spPr>
+          <p:style>
+            <a:lnRef idx="1">
+              <a:schemeClr val="accent1"/>
+            </a:lnRef>
+            <a:fillRef idx="0">
+              <a:schemeClr val="accent1"/>
+            </a:fillRef>
+            <a:effectRef idx="0">
+              <a:schemeClr val="accent1"/>
+            </a:effectRef>
+            <a:fontRef idx="minor">
+              <a:schemeClr val="tx1"/>
+            </a:fontRef>
+          </p:style>
+          <p:txBody>
+            <a:bodyPr rtlCol="0" anchor="ctr"/>
+            <a:lstStyle/>
+            <a:p>
+              <a:pPr algn="ctr"/>
+              <a:endParaRPr lang="en-US"/>
+            </a:p>
+          </p:txBody>
+        </p:sp>
+        <p:sp>
+          <p:nvSpPr>
+            <p:cNvPr id="76" name="TextBox 75">
+              <a:extLst>
+                <a:ext uri="{FF2B5EF4-FFF2-40B4-BE49-F238E27FC236}">
+                  <a16:creationId xmlns="" xmlns:a16="http://schemas.microsoft.com/office/drawing/2014/main" id="{F2A05923-B911-4640-A459-72539238E32A}"/>
+                </a:ext>
+              </a:extLst>
+            </p:cNvPr>
+            <p:cNvSpPr txBox="1"/>
+            <p:nvPr/>
+          </p:nvSpPr>
+          <p:spPr>
+            <a:xfrm>
+              <a:off x="4011422" y="2915458"/>
+              <a:ext cx="237566" cy="230832"/>
+            </a:xfrm>
+            <a:prstGeom prst="rect">
+              <a:avLst/>
+            </a:prstGeom>
+            <a:noFill/>
+          </p:spPr>
+          <p:txBody>
+            <a:bodyPr wrap="none" rtlCol="0">
+              <a:spAutoFit/>
+            </a:bodyPr>
+            <a:lstStyle/>
+            <a:p>
+              <a:r>
+                <a:rPr lang="en-US" sz="900" b="1" dirty="0">
+                  <a:solidFill>
+                    <a:srgbClr val="4A7EBB"/>
+                  </a:solidFill>
+                  <a:latin typeface="Calibri" panose="020F0502020204030204" pitchFamily="34" charset="0"/>
+                  <a:cs typeface="Calibri" panose="020F0502020204030204" pitchFamily="34" charset="0"/>
+                </a:rPr>
+                <a:t>?</a:t>
+              </a:r>
+            </a:p>
+          </p:txBody>
+        </p:sp>
+      </p:grpSp>
+      <p:grpSp>
+        <p:nvGrpSpPr>
+          <p:cNvPr id="82" name="Group 81">
+            <a:extLst>
+              <a:ext uri="{FF2B5EF4-FFF2-40B4-BE49-F238E27FC236}">
+                <a16:creationId xmlns="" xmlns:a16="http://schemas.microsoft.com/office/drawing/2014/main" id="{AFB23BE8-9E97-4107-97C7-5AFC1D8797CD}"/>
+              </a:ext>
+            </a:extLst>
+          </p:cNvPr>
+          <p:cNvGrpSpPr/>
+          <p:nvPr/>
+        </p:nvGrpSpPr>
+        <p:grpSpPr>
+          <a:xfrm>
+            <a:off x="7892775" y="1734067"/>
+            <a:ext cx="814029" cy="444559"/>
+            <a:chOff x="5823050" y="3623414"/>
+            <a:chExt cx="814029" cy="444559"/>
+          </a:xfrm>
+        </p:grpSpPr>
+        <p:sp>
+          <p:nvSpPr>
+            <p:cNvPr id="83" name="Rectangle: Rounded Corners 65">
+              <a:extLst>
+                <a:ext uri="{FF2B5EF4-FFF2-40B4-BE49-F238E27FC236}">
+                  <a16:creationId xmlns="" xmlns:a16="http://schemas.microsoft.com/office/drawing/2014/main" id="{BB403B0D-EF05-44C9-856D-73B02CCE82A0}"/>
+                </a:ext>
+              </a:extLst>
+            </p:cNvPr>
+            <p:cNvSpPr/>
+            <p:nvPr/>
+          </p:nvSpPr>
+          <p:spPr>
+            <a:xfrm>
+              <a:off x="5823050" y="3667135"/>
+              <a:ext cx="814029" cy="400838"/>
+            </a:xfrm>
+            <a:prstGeom prst="roundRect">
+              <a:avLst>
+                <a:gd name="adj" fmla="val 10731"/>
+              </a:avLst>
+            </a:prstGeom>
+            <a:solidFill>
+              <a:schemeClr val="bg2">
+                <a:lumMod val="20000"/>
+                <a:lumOff val="80000"/>
+              </a:schemeClr>
+            </a:solidFill>
+            <a:ln>
+              <a:solidFill>
+                <a:srgbClr val="0070C0"/>
+              </a:solidFill>
+            </a:ln>
+          </p:spPr>
+          <p:style>
+            <a:lnRef idx="2">
+              <a:schemeClr val="accent1">
+                <a:shade val="50000"/>
+              </a:schemeClr>
+            </a:lnRef>
+            <a:fillRef idx="1">
+              <a:schemeClr val="accent1"/>
+            </a:fillRef>
+            <a:effectRef idx="0">
+              <a:schemeClr val="accent1"/>
+            </a:effectRef>
+            <a:fontRef idx="minor">
+              <a:schemeClr val="lt1"/>
+            </a:fontRef>
+          </p:style>
+          <p:txBody>
+            <a:bodyPr rtlCol="0" anchor="ctr"/>
+            <a:lstStyle/>
+            <a:p>
+              <a:pPr algn="ctr"/>
+              <a:endParaRPr lang="en-US"/>
+            </a:p>
+          </p:txBody>
+        </p:sp>
+        <p:pic>
+          <p:nvPicPr>
+            <p:cNvPr id="84" name="Picture 4" descr="Image result for mouse icon">
+              <a:extLst>
+                <a:ext uri="{FF2B5EF4-FFF2-40B4-BE49-F238E27FC236}">
+                  <a16:creationId xmlns="" xmlns:a16="http://schemas.microsoft.com/office/drawing/2014/main" id="{938554CE-F93A-44B7-9C58-4CF5EF5C56D4}"/>
+                </a:ext>
+              </a:extLst>
+            </p:cNvPr>
+            <p:cNvPicPr>
+              <a:picLocks noChangeAspect="1" noChangeArrowheads="1"/>
+            </p:cNvPicPr>
+            <p:nvPr/>
+          </p:nvPicPr>
+          <p:blipFill rotWithShape="1">
+            <a:blip r:embed="rId5">
+              <a:extLst>
+                <a:ext uri="{28A0092B-C50C-407E-A947-70E740481C1C}">
+                  <a14:useLocalDpi xmlns:a14="http://schemas.microsoft.com/office/drawing/2010/main" val="0"/>
+                </a:ext>
+              </a:extLst>
+            </a:blip>
+            <a:srcRect l="10312"/>
+            <a:stretch/>
+          </p:blipFill>
+          <p:spPr bwMode="auto">
+            <a:xfrm flipH="1">
+              <a:off x="5888677" y="3623414"/>
+              <a:ext cx="717700" cy="400110"/>
+            </a:xfrm>
+            <a:prstGeom prst="rect">
+              <a:avLst/>
+            </a:prstGeom>
+            <a:noFill/>
+            <a:extLst>
+              <a:ext uri="{909E8E84-426E-40dd-AFC4-6F175D3DCCD1}">
+                <a14:hiddenFill xmlns:a14="http://schemas.microsoft.com/office/drawing/2010/main">
+                  <a:solidFill>
+                    <a:srgbClr val="FFFFFF"/>
+                  </a:solidFill>
+                </a14:hiddenFill>
+              </a:ext>
+            </a:extLst>
+          </p:spPr>
+        </p:pic>
+      </p:grpSp>
+      <p:sp>
+        <p:nvSpPr>
           <p:cNvPr id="85" name="Google Shape;105;p1">
             <a:extLst>
               <a:ext uri="{FF2B5EF4-FFF2-40B4-BE49-F238E27FC236}">
-                <a16:creationId xmlns:a16="http://schemas.microsoft.com/office/drawing/2014/main" xmlns="" id="{7CA194D6-B5C4-4B18-8340-E8C571F9B2F0}"/>
+                <a16:creationId xmlns="" xmlns:a16="http://schemas.microsoft.com/office/drawing/2014/main" id="{7CA194D6-B5C4-4B18-8340-E8C571F9B2F0}"/>
               </a:ext>
             </a:extLst>
           </p:cNvPr>
@@ -5656,7 +8995,7 @@
           <p:cNvPr id="86" name="Group 85">
             <a:extLst>
               <a:ext uri="{FF2B5EF4-FFF2-40B4-BE49-F238E27FC236}">
-                <a16:creationId xmlns:a16="http://schemas.microsoft.com/office/drawing/2014/main" xmlns="" id="{F0222416-71FB-4B0A-B35E-411898B57501}"/>
+                <a16:creationId xmlns="" xmlns:a16="http://schemas.microsoft.com/office/drawing/2014/main" id="{F0222416-71FB-4B0A-B35E-411898B57501}"/>
               </a:ext>
             </a:extLst>
           </p:cNvPr>
@@ -5674,6 +9013,2461 @@
         <p:sp>
           <p:nvSpPr>
             <p:cNvPr id="87" name="Rectangle: Rounded Corners 84">
+              <a:extLst>
+                <a:ext uri="{FF2B5EF4-FFF2-40B4-BE49-F238E27FC236}">
+                  <a16:creationId xmlns="" xmlns:a16="http://schemas.microsoft.com/office/drawing/2014/main" id="{7BCE1F91-314A-4A9B-8A8D-E775EF4E6612}"/>
+                </a:ext>
+              </a:extLst>
+            </p:cNvPr>
+            <p:cNvSpPr/>
+            <p:nvPr/>
+          </p:nvSpPr>
+          <p:spPr>
+            <a:xfrm>
+              <a:off x="1870075" y="4091432"/>
+              <a:ext cx="615848" cy="799676"/>
+            </a:xfrm>
+            <a:prstGeom prst="roundRect">
+              <a:avLst>
+                <a:gd name="adj" fmla="val 10731"/>
+              </a:avLst>
+            </a:prstGeom>
+            <a:solidFill>
+              <a:schemeClr val="bg2">
+                <a:lumMod val="20000"/>
+                <a:lumOff val="80000"/>
+              </a:schemeClr>
+            </a:solidFill>
+            <a:ln>
+              <a:solidFill>
+                <a:srgbClr val="0070C0"/>
+              </a:solidFill>
+            </a:ln>
+          </p:spPr>
+          <p:style>
+            <a:lnRef idx="2">
+              <a:schemeClr val="accent1">
+                <a:shade val="50000"/>
+              </a:schemeClr>
+            </a:lnRef>
+            <a:fillRef idx="1">
+              <a:schemeClr val="accent1"/>
+            </a:fillRef>
+            <a:effectRef idx="0">
+              <a:schemeClr val="accent1"/>
+            </a:effectRef>
+            <a:fontRef idx="minor">
+              <a:schemeClr val="lt1"/>
+            </a:fontRef>
+          </p:style>
+          <p:txBody>
+            <a:bodyPr rtlCol="0" anchor="ctr"/>
+            <a:lstStyle/>
+            <a:p>
+              <a:pPr algn="ctr"/>
+              <a:endParaRPr lang="en-US"/>
+            </a:p>
+          </p:txBody>
+        </p:sp>
+        <p:pic>
+          <p:nvPicPr>
+            <p:cNvPr id="88" name="Picture 87">
+              <a:extLst>
+                <a:ext uri="{FF2B5EF4-FFF2-40B4-BE49-F238E27FC236}">
+                  <a16:creationId xmlns="" xmlns:a16="http://schemas.microsoft.com/office/drawing/2014/main" id="{F6C7B362-76C6-4798-8102-62CB6E63AFE1}"/>
+                </a:ext>
+              </a:extLst>
+            </p:cNvPr>
+            <p:cNvPicPr>
+              <a:picLocks noChangeAspect="1"/>
+            </p:cNvPicPr>
+            <p:nvPr/>
+          </p:nvPicPr>
+          <p:blipFill>
+            <a:blip r:embed="rId6"/>
+            <a:stretch>
+              <a:fillRect/>
+            </a:stretch>
+          </p:blipFill>
+          <p:spPr>
+            <a:xfrm>
+              <a:off x="1914469" y="4113436"/>
+              <a:ext cx="565104" cy="799676"/>
+            </a:xfrm>
+            <a:prstGeom prst="rect">
+              <a:avLst/>
+            </a:prstGeom>
+          </p:spPr>
+        </p:pic>
+        <p:sp>
+          <p:nvSpPr>
+            <p:cNvPr id="89" name="Oval 88">
+              <a:extLst>
+                <a:ext uri="{FF2B5EF4-FFF2-40B4-BE49-F238E27FC236}">
+                  <a16:creationId xmlns="" xmlns:a16="http://schemas.microsoft.com/office/drawing/2014/main" id="{7825FA7A-DEDC-4555-848B-50CA147E1C59}"/>
+                </a:ext>
+              </a:extLst>
+            </p:cNvPr>
+            <p:cNvSpPr/>
+            <p:nvPr/>
+          </p:nvSpPr>
+          <p:spPr>
+            <a:xfrm>
+              <a:off x="2379191" y="4434425"/>
+              <a:ext cx="45720" cy="45720"/>
+            </a:xfrm>
+            <a:prstGeom prst="ellipse">
+              <a:avLst/>
+            </a:prstGeom>
+            <a:solidFill>
+              <a:schemeClr val="bg2">
+                <a:lumMod val="20000"/>
+                <a:lumOff val="80000"/>
+              </a:schemeClr>
+            </a:solidFill>
+            <a:ln>
+              <a:noFill/>
+            </a:ln>
+          </p:spPr>
+          <p:style>
+            <a:lnRef idx="2">
+              <a:schemeClr val="accent1">
+                <a:shade val="50000"/>
+              </a:schemeClr>
+            </a:lnRef>
+            <a:fillRef idx="1">
+              <a:schemeClr val="accent1"/>
+            </a:fillRef>
+            <a:effectRef idx="0">
+              <a:schemeClr val="accent1"/>
+            </a:effectRef>
+            <a:fontRef idx="minor">
+              <a:schemeClr val="lt1"/>
+            </a:fontRef>
+          </p:style>
+          <p:txBody>
+            <a:bodyPr rtlCol="0" anchor="ctr"/>
+            <a:lstStyle/>
+            <a:p>
+              <a:pPr algn="ctr"/>
+              <a:endParaRPr lang="en-US"/>
+            </a:p>
+          </p:txBody>
+        </p:sp>
+      </p:grpSp>
+      <p:sp>
+        <p:nvSpPr>
+          <p:cNvPr id="90" name="Google Shape;105;p1">
+            <a:extLst>
+              <a:ext uri="{FF2B5EF4-FFF2-40B4-BE49-F238E27FC236}">
+                <a16:creationId xmlns="" xmlns:a16="http://schemas.microsoft.com/office/drawing/2014/main" id="{7CA194D6-B5C4-4B18-8340-E8C571F9B2F0}"/>
+              </a:ext>
+            </a:extLst>
+          </p:cNvPr>
+          <p:cNvSpPr/>
+          <p:nvPr/>
+        </p:nvSpPr>
+        <p:spPr>
+          <a:xfrm rot="20786533" flipH="1">
+            <a:off x="5231468" y="2483135"/>
+            <a:ext cx="1441059" cy="334598"/>
+          </a:xfrm>
+          <a:prstGeom prst="rightArrow">
+            <a:avLst>
+              <a:gd name="adj1" fmla="val 50000"/>
+              <a:gd name="adj2" fmla="val 50000"/>
+            </a:avLst>
+          </a:prstGeom>
+          <a:solidFill>
+            <a:srgbClr val="15374A"/>
+          </a:solidFill>
+          <a:ln w="9525" cap="flat" cmpd="sng">
+            <a:noFill/>
+            <a:prstDash val="solid"/>
+            <a:round/>
+            <a:headEnd type="none" w="sm" len="sm"/>
+            <a:tailEnd type="none" w="sm" len="sm"/>
+          </a:ln>
+        </p:spPr>
+        <p:txBody>
+          <a:bodyPr spcFirstLastPara="1" wrap="square" lIns="91425" tIns="45700" rIns="91425" bIns="45700" anchor="ctr" anchorCtr="0">
+            <a:noAutofit/>
+          </a:bodyPr>
+          <a:lstStyle/>
+          <a:p>
+            <a:pPr marL="0" marR="0" lvl="0" indent="0" algn="ctr" rtl="0">
+              <a:lnSpc>
+                <a:spcPct val="100000"/>
+              </a:lnSpc>
+              <a:spcBef>
+                <a:spcPts val="0"/>
+              </a:spcBef>
+              <a:spcAft>
+                <a:spcPts val="0"/>
+              </a:spcAft>
+              <a:buClr>
+                <a:schemeClr val="dk1"/>
+              </a:buClr>
+              <a:buSzPts val="1800"/>
+              <a:buFont typeface="Calibri"/>
+              <a:buNone/>
+            </a:pPr>
+            <a:endParaRPr sz="1800" b="0" i="0" u="none" strike="noStrike" cap="none">
+              <a:solidFill>
+                <a:srgbClr val="FFFFFF"/>
+              </a:solidFill>
+              <a:latin typeface="Arial"/>
+              <a:ea typeface="Arial"/>
+              <a:cs typeface="Arial"/>
+              <a:sym typeface="Arial"/>
+            </a:endParaRPr>
+          </a:p>
+        </p:txBody>
+      </p:sp>
+      <p:sp>
+        <p:nvSpPr>
+          <p:cNvPr id="91" name="Google Shape;106;p1">
+            <a:extLst>
+              <a:ext uri="{FF2B5EF4-FFF2-40B4-BE49-F238E27FC236}">
+                <a16:creationId xmlns="" xmlns:a16="http://schemas.microsoft.com/office/drawing/2014/main" id="{E05F7D88-50A6-4383-BB16-EB5B35AC27C1}"/>
+              </a:ext>
+            </a:extLst>
+          </p:cNvPr>
+          <p:cNvSpPr/>
+          <p:nvPr/>
+        </p:nvSpPr>
+        <p:spPr>
+          <a:xfrm rot="13159153" flipV="1">
+            <a:off x="5265149" y="4006707"/>
+            <a:ext cx="935616" cy="334598"/>
+          </a:xfrm>
+          <a:prstGeom prst="rightArrow">
+            <a:avLst>
+              <a:gd name="adj1" fmla="val 50000"/>
+              <a:gd name="adj2" fmla="val 50000"/>
+            </a:avLst>
+          </a:prstGeom>
+          <a:solidFill>
+            <a:srgbClr val="15374A"/>
+          </a:solidFill>
+          <a:ln w="9525" cap="flat" cmpd="sng">
+            <a:noFill/>
+            <a:prstDash val="solid"/>
+            <a:round/>
+            <a:headEnd type="none" w="sm" len="sm"/>
+            <a:tailEnd type="none" w="sm" len="sm"/>
+          </a:ln>
+        </p:spPr>
+        <p:txBody>
+          <a:bodyPr spcFirstLastPara="1" wrap="square" lIns="91425" tIns="45700" rIns="91425" bIns="45700" anchor="ctr" anchorCtr="0">
+            <a:noAutofit/>
+          </a:bodyPr>
+          <a:lstStyle/>
+          <a:p>
+            <a:pPr marL="0" marR="0" lvl="0" indent="0" algn="ctr" rtl="0">
+              <a:lnSpc>
+                <a:spcPct val="100000"/>
+              </a:lnSpc>
+              <a:spcBef>
+                <a:spcPts val="0"/>
+              </a:spcBef>
+              <a:spcAft>
+                <a:spcPts val="0"/>
+              </a:spcAft>
+              <a:buClr>
+                <a:schemeClr val="dk1"/>
+              </a:buClr>
+              <a:buSzPts val="1800"/>
+              <a:buFont typeface="Calibri"/>
+              <a:buNone/>
+            </a:pPr>
+            <a:endParaRPr sz="1800" b="0" i="0" u="none" strike="noStrike" cap="none">
+              <a:solidFill>
+                <a:srgbClr val="FFFFFF"/>
+              </a:solidFill>
+              <a:latin typeface="Arial"/>
+              <a:ea typeface="Arial"/>
+              <a:cs typeface="Arial"/>
+              <a:sym typeface="Arial"/>
+            </a:endParaRPr>
+          </a:p>
+        </p:txBody>
+      </p:sp>
+    </p:spTree>
+    <p:extLst>
+      <p:ext uri="{BB962C8B-B14F-4D97-AF65-F5344CB8AC3E}">
+        <p14:creationId xmlns:p14="http://schemas.microsoft.com/office/powerpoint/2010/main" val="3808722017"/>
+      </p:ext>
+    </p:extLst>
+  </p:cSld>
+  <p:clrMapOvr>
+    <a:masterClrMapping/>
+  </p:clrMapOvr>
+</p:sld>
+</file>
+
+<file path=ppt/slides/slide4.xml><?xml version="1.0" encoding="utf-8"?>
+<p:sld xmlns:a="http://schemas.openxmlformats.org/drawingml/2006/main" xmlns:r="http://schemas.openxmlformats.org/officeDocument/2006/relationships" xmlns:p="http://schemas.openxmlformats.org/presentationml/2006/main">
+  <p:cSld>
+    <p:spTree>
+      <p:nvGrpSpPr>
+        <p:cNvPr id="1" name=""/>
+        <p:cNvGrpSpPr/>
+        <p:nvPr/>
+      </p:nvGrpSpPr>
+      <p:grpSpPr>
+        <a:xfrm>
+          <a:off x="0" y="0"/>
+          <a:ext cx="0" cy="0"/>
+          <a:chOff x="0" y="0"/>
+          <a:chExt cx="0" cy="0"/>
+        </a:xfrm>
+      </p:grpSpPr>
+      <p:pic>
+        <p:nvPicPr>
+          <p:cNvPr id="46" name="Picture 45" descr="(B).jpg"/>
+          <p:cNvPicPr>
+            <a:picLocks noChangeAspect="1"/>
+          </p:cNvPicPr>
+          <p:nvPr/>
+        </p:nvPicPr>
+        <p:blipFill rotWithShape="1">
+          <a:blip r:embed="rId2">
+            <a:extLst>
+              <a:ext uri="{28A0092B-C50C-407E-A947-70E740481C1C}">
+                <a14:useLocalDpi xmlns:a14="http://schemas.microsoft.com/office/drawing/2010/main" val="0"/>
+              </a:ext>
+            </a:extLst>
+          </a:blip>
+          <a:srcRect l="18929" t="22569" r="20171" b="18943"/>
+          <a:stretch/>
+        </p:blipFill>
+        <p:spPr>
+          <a:xfrm>
+            <a:off x="3252902" y="2264520"/>
+            <a:ext cx="2566012" cy="1504408"/>
+          </a:xfrm>
+          <a:prstGeom prst="rect">
+            <a:avLst/>
+          </a:prstGeom>
+        </p:spPr>
+      </p:pic>
+      <p:sp>
+        <p:nvSpPr>
+          <p:cNvPr id="47" name="Google Shape;95;p1">
+            <a:extLst>
+              <a:ext uri="{FF2B5EF4-FFF2-40B4-BE49-F238E27FC236}">
+                <a16:creationId xmlns:a16="http://schemas.microsoft.com/office/drawing/2014/main" xmlns="" id="{B0D7C0F7-E63D-4170-99D4-9935E55240F5}"/>
+              </a:ext>
+            </a:extLst>
+          </p:cNvPr>
+          <p:cNvSpPr txBox="1"/>
+          <p:nvPr/>
+        </p:nvSpPr>
+        <p:spPr>
+          <a:xfrm>
+            <a:off x="3475033" y="711693"/>
+            <a:ext cx="2141787" cy="246221"/>
+          </a:xfrm>
+          <a:prstGeom prst="rect">
+            <a:avLst/>
+          </a:prstGeom>
+          <a:noFill/>
+          <a:ln>
+            <a:noFill/>
+          </a:ln>
+        </p:spPr>
+        <p:txBody>
+          <a:bodyPr spcFirstLastPara="1" wrap="square" lIns="0" tIns="0" rIns="0" bIns="0" anchor="t" anchorCtr="0">
+            <a:spAutoFit/>
+          </a:bodyPr>
+          <a:lstStyle/>
+          <a:p>
+            <a:pPr marL="0" marR="0" lvl="0" indent="0" algn="l" rtl="0">
+              <a:lnSpc>
+                <a:spcPct val="100000"/>
+              </a:lnSpc>
+              <a:spcBef>
+                <a:spcPts val="0"/>
+              </a:spcBef>
+              <a:spcAft>
+                <a:spcPts val="0"/>
+              </a:spcAft>
+              <a:buClr>
+                <a:srgbClr val="15374A"/>
+              </a:buClr>
+              <a:buSzPts val="1200"/>
+              <a:buFont typeface="Calibri"/>
+              <a:buNone/>
+            </a:pPr>
+            <a:r>
+              <a:rPr lang="en-US" sz="1600" b="1" dirty="0">
+                <a:solidFill>
+                  <a:srgbClr val="15374A"/>
+                </a:solidFill>
+                <a:latin typeface="Calibri"/>
+                <a:ea typeface="Calibri"/>
+                <a:cs typeface="Calibri"/>
+                <a:sym typeface="Calibri"/>
+              </a:rPr>
+              <a:t>E</a:t>
+            </a:r>
+            <a:r>
+              <a:rPr lang="en-US" sz="1600" b="1" i="0" u="none" strike="noStrike" cap="none" dirty="0">
+                <a:solidFill>
+                  <a:srgbClr val="15374A"/>
+                </a:solidFill>
+                <a:latin typeface="Calibri"/>
+                <a:ea typeface="Calibri"/>
+                <a:cs typeface="Calibri"/>
+                <a:sym typeface="Calibri"/>
+              </a:rPr>
+              <a:t>xperimental </a:t>
+            </a:r>
+            <a:r>
+              <a:rPr lang="en-US" sz="1600" b="1" i="0" u="none" strike="noStrike" cap="none" dirty="0" smtClean="0">
+                <a:solidFill>
+                  <a:srgbClr val="15374A"/>
+                </a:solidFill>
+                <a:latin typeface="Calibri"/>
+                <a:ea typeface="Calibri"/>
+                <a:cs typeface="Calibri"/>
+                <a:sym typeface="Calibri"/>
+              </a:rPr>
+              <a:t>Design</a:t>
+            </a:r>
+            <a:endParaRPr lang="en-US" sz="1600" b="1" i="0" u="none" strike="noStrike" cap="none" dirty="0">
+              <a:solidFill>
+                <a:srgbClr val="15374A"/>
+              </a:solidFill>
+              <a:latin typeface="Calibri"/>
+              <a:ea typeface="Calibri"/>
+              <a:cs typeface="Calibri"/>
+              <a:sym typeface="Calibri"/>
+            </a:endParaRPr>
+          </a:p>
+        </p:txBody>
+      </p:sp>
+      <p:sp>
+        <p:nvSpPr>
+          <p:cNvPr id="51" name="Google Shape;96;p1">
+            <a:extLst>
+              <a:ext uri="{FF2B5EF4-FFF2-40B4-BE49-F238E27FC236}">
+                <a16:creationId xmlns:a16="http://schemas.microsoft.com/office/drawing/2014/main" xmlns="" id="{C9B8C793-A660-4A21-8EF2-A633DC442778}"/>
+              </a:ext>
+            </a:extLst>
+          </p:cNvPr>
+          <p:cNvSpPr/>
+          <p:nvPr/>
+        </p:nvSpPr>
+        <p:spPr>
+          <a:xfrm>
+            <a:off x="3475033" y="962105"/>
+            <a:ext cx="2095881" cy="869675"/>
+          </a:xfrm>
+          <a:prstGeom prst="roundRect">
+            <a:avLst>
+              <a:gd name="adj" fmla="val 0"/>
+            </a:avLst>
+          </a:prstGeom>
+          <a:solidFill>
+            <a:srgbClr val="15374A"/>
+          </a:solidFill>
+          <a:ln w="9525" cap="flat" cmpd="sng">
+            <a:noFill/>
+            <a:prstDash val="solid"/>
+            <a:round/>
+            <a:headEnd type="none" w="sm" len="sm"/>
+            <a:tailEnd type="none" w="sm" len="sm"/>
+          </a:ln>
+        </p:spPr>
+        <p:txBody>
+          <a:bodyPr spcFirstLastPara="1" wrap="square" lIns="91425" tIns="45700" rIns="91425" bIns="45700" anchor="t" anchorCtr="0">
+            <a:noAutofit/>
+          </a:bodyPr>
+          <a:lstStyle/>
+          <a:p>
+            <a:pPr marL="115888" marR="0" lvl="0" indent="-115888" algn="l" rtl="0">
+              <a:spcBef>
+                <a:spcPts val="0"/>
+              </a:spcBef>
+              <a:spcAft>
+                <a:spcPts val="0"/>
+              </a:spcAft>
+              <a:buClr>
+                <a:srgbClr val="FFFFFF"/>
+              </a:buClr>
+              <a:buSzPts val="1200"/>
+              <a:buFont typeface="Arial"/>
+              <a:buChar char="•"/>
+            </a:pPr>
+            <a:r>
+              <a:rPr lang="en-US" sz="1200" dirty="0">
+                <a:solidFill>
+                  <a:srgbClr val="FFFFFF"/>
+                </a:solidFill>
+                <a:latin typeface="Calibri"/>
+                <a:ea typeface="Calibri"/>
+                <a:cs typeface="Calibri"/>
+                <a:sym typeface="Calibri"/>
+              </a:rPr>
+              <a:t>Stimuli</a:t>
+            </a:r>
+          </a:p>
+          <a:p>
+            <a:pPr marL="115888" marR="0" lvl="0" indent="-115888" algn="l" rtl="0">
+              <a:spcBef>
+                <a:spcPts val="0"/>
+              </a:spcBef>
+              <a:spcAft>
+                <a:spcPts val="0"/>
+              </a:spcAft>
+              <a:buClr>
+                <a:srgbClr val="FFFFFF"/>
+              </a:buClr>
+              <a:buSzPts val="1200"/>
+              <a:buFont typeface="Arial"/>
+              <a:buChar char="•"/>
+            </a:pPr>
+            <a:r>
+              <a:rPr lang="en-US" sz="1200" dirty="0">
+                <a:solidFill>
+                  <a:srgbClr val="FFFFFF"/>
+                </a:solidFill>
+                <a:latin typeface="Calibri"/>
+                <a:cs typeface="Calibri"/>
+                <a:sym typeface="Calibri"/>
+              </a:rPr>
+              <a:t>Environment</a:t>
+            </a:r>
+            <a:endParaRPr sz="1200" dirty="0">
+              <a:solidFill>
+                <a:srgbClr val="FFFFFF"/>
+              </a:solidFill>
+              <a:latin typeface="Calibri"/>
+              <a:ea typeface="Calibri"/>
+              <a:cs typeface="Calibri"/>
+              <a:sym typeface="Calibri"/>
+            </a:endParaRPr>
+          </a:p>
+          <a:p>
+            <a:pPr marL="115888" marR="0" lvl="0" indent="-115888" algn="l" rtl="0">
+              <a:spcBef>
+                <a:spcPts val="0"/>
+              </a:spcBef>
+              <a:spcAft>
+                <a:spcPts val="0"/>
+              </a:spcAft>
+              <a:buClr>
+                <a:srgbClr val="FFFFFF"/>
+              </a:buClr>
+              <a:buSzPts val="1200"/>
+              <a:buFont typeface="Arial"/>
+              <a:buChar char="•"/>
+            </a:pPr>
+            <a:r>
+              <a:rPr lang="en-US" sz="1200" dirty="0">
+                <a:solidFill>
+                  <a:srgbClr val="FFFFFF"/>
+                </a:solidFill>
+                <a:latin typeface="Calibri"/>
+                <a:ea typeface="Calibri"/>
+                <a:cs typeface="Calibri"/>
+                <a:sym typeface="Calibri"/>
+              </a:rPr>
+              <a:t>Trial structure</a:t>
+            </a:r>
+          </a:p>
+          <a:p>
+            <a:pPr marL="115888" marR="0" lvl="0" indent="-115888" algn="l" rtl="0">
+              <a:spcBef>
+                <a:spcPts val="0"/>
+              </a:spcBef>
+              <a:spcAft>
+                <a:spcPts val="0"/>
+              </a:spcAft>
+              <a:buClr>
+                <a:srgbClr val="FFFFFF"/>
+              </a:buClr>
+              <a:buSzPts val="1200"/>
+              <a:buFont typeface="Arial"/>
+              <a:buChar char="•"/>
+            </a:pPr>
+            <a:r>
+              <a:rPr lang="en-US" sz="1200" dirty="0">
+                <a:solidFill>
+                  <a:srgbClr val="FFFFFF"/>
+                </a:solidFill>
+                <a:latin typeface="Calibri"/>
+                <a:ea typeface="Calibri"/>
+                <a:cs typeface="Calibri"/>
+                <a:sym typeface="Calibri"/>
+              </a:rPr>
+              <a:t>Optogenetics</a:t>
+            </a:r>
+            <a:endParaRPr sz="1200" dirty="0">
+              <a:solidFill>
+                <a:srgbClr val="FFFFFF"/>
+              </a:solidFill>
+              <a:latin typeface="Calibri"/>
+              <a:ea typeface="Calibri"/>
+              <a:cs typeface="Calibri"/>
+              <a:sym typeface="Calibri"/>
+            </a:endParaRPr>
+          </a:p>
+        </p:txBody>
+      </p:sp>
+      <p:sp>
+        <p:nvSpPr>
+          <p:cNvPr id="93" name="Google Shape;105;p1">
+            <a:extLst>
+              <a:ext uri="{FF2B5EF4-FFF2-40B4-BE49-F238E27FC236}">
+                <a16:creationId xmlns:a16="http://schemas.microsoft.com/office/drawing/2014/main" xmlns="" id="{D1DE1C64-4F2A-4519-BBA3-A55B0CC6FBC4}"/>
+              </a:ext>
+            </a:extLst>
+          </p:cNvPr>
+          <p:cNvSpPr/>
+          <p:nvPr/>
+        </p:nvSpPr>
+        <p:spPr>
+          <a:xfrm rot="5400000">
+            <a:off x="4325000" y="1836065"/>
+            <a:ext cx="436261" cy="334598"/>
+          </a:xfrm>
+          <a:prstGeom prst="rightArrow">
+            <a:avLst>
+              <a:gd name="adj1" fmla="val 50000"/>
+              <a:gd name="adj2" fmla="val 50000"/>
+            </a:avLst>
+          </a:prstGeom>
+          <a:solidFill>
+            <a:srgbClr val="15374A"/>
+          </a:solidFill>
+          <a:ln w="9525" cap="flat" cmpd="sng">
+            <a:noFill/>
+            <a:prstDash val="solid"/>
+            <a:round/>
+            <a:headEnd type="none" w="sm" len="sm"/>
+            <a:tailEnd type="none" w="sm" len="sm"/>
+          </a:ln>
+        </p:spPr>
+        <p:txBody>
+          <a:bodyPr spcFirstLastPara="1" wrap="square" lIns="91425" tIns="45700" rIns="91425" bIns="45700" anchor="ctr" anchorCtr="0">
+            <a:noAutofit/>
+          </a:bodyPr>
+          <a:lstStyle/>
+          <a:p>
+            <a:pPr marL="0" marR="0" lvl="0" indent="0" algn="ctr" rtl="0">
+              <a:lnSpc>
+                <a:spcPct val="100000"/>
+              </a:lnSpc>
+              <a:spcBef>
+                <a:spcPts val="0"/>
+              </a:spcBef>
+              <a:spcAft>
+                <a:spcPts val="0"/>
+              </a:spcAft>
+              <a:buClr>
+                <a:schemeClr val="dk1"/>
+              </a:buClr>
+              <a:buSzPts val="1800"/>
+              <a:buFont typeface="Calibri"/>
+              <a:buNone/>
+            </a:pPr>
+            <a:endParaRPr sz="1800" b="0" i="0" u="none" strike="noStrike" cap="none">
+              <a:solidFill>
+                <a:srgbClr val="FFFFFF"/>
+              </a:solidFill>
+              <a:latin typeface="Arial"/>
+              <a:ea typeface="Arial"/>
+              <a:cs typeface="Arial"/>
+              <a:sym typeface="Arial"/>
+            </a:endParaRPr>
+          </a:p>
+        </p:txBody>
+      </p:sp>
+      <p:sp>
+        <p:nvSpPr>
+          <p:cNvPr id="94" name="Google Shape;90;p1">
+            <a:extLst>
+              <a:ext uri="{FF2B5EF4-FFF2-40B4-BE49-F238E27FC236}">
+                <a16:creationId xmlns:a16="http://schemas.microsoft.com/office/drawing/2014/main" xmlns="" id="{DEAFE1FC-2F64-4F88-A3E4-04CD06110E0F}"/>
+              </a:ext>
+            </a:extLst>
+          </p:cNvPr>
+          <p:cNvSpPr txBox="1"/>
+          <p:nvPr/>
+        </p:nvSpPr>
+        <p:spPr>
+          <a:xfrm>
+            <a:off x="534133" y="1675373"/>
+            <a:ext cx="1758372" cy="246221"/>
+          </a:xfrm>
+          <a:prstGeom prst="rect">
+            <a:avLst/>
+          </a:prstGeom>
+          <a:noFill/>
+          <a:ln>
+            <a:noFill/>
+          </a:ln>
+        </p:spPr>
+        <p:txBody>
+          <a:bodyPr spcFirstLastPara="1" wrap="square" lIns="0" tIns="0" rIns="0" bIns="0" anchor="t" anchorCtr="0">
+            <a:spAutoFit/>
+          </a:bodyPr>
+          <a:lstStyle/>
+          <a:p>
+            <a:pPr marL="0" marR="0" lvl="0" indent="0" algn="l" rtl="0">
+              <a:lnSpc>
+                <a:spcPct val="100000"/>
+              </a:lnSpc>
+              <a:spcBef>
+                <a:spcPts val="0"/>
+              </a:spcBef>
+              <a:spcAft>
+                <a:spcPts val="0"/>
+              </a:spcAft>
+              <a:buClr>
+                <a:srgbClr val="15374A"/>
+              </a:buClr>
+              <a:buSzPts val="1200"/>
+              <a:buFont typeface="Calibri"/>
+              <a:buNone/>
+            </a:pPr>
+            <a:r>
+              <a:rPr lang="en-US" sz="1600" b="1" i="0" u="none" strike="noStrike" cap="none" dirty="0">
+                <a:solidFill>
+                  <a:srgbClr val="15374A"/>
+                </a:solidFill>
+                <a:latin typeface="Calibri"/>
+                <a:ea typeface="Calibri"/>
+                <a:cs typeface="Calibri"/>
+                <a:sym typeface="Calibri"/>
+              </a:rPr>
+              <a:t>Data Acquisition</a:t>
+            </a:r>
+            <a:endParaRPr sz="1600" b="1" i="0" u="none" strike="noStrike" cap="none" dirty="0">
+              <a:solidFill>
+                <a:srgbClr val="15374A"/>
+              </a:solidFill>
+              <a:latin typeface="Calibri"/>
+              <a:ea typeface="Calibri"/>
+              <a:cs typeface="Calibri"/>
+              <a:sym typeface="Calibri"/>
+            </a:endParaRPr>
+          </a:p>
+        </p:txBody>
+      </p:sp>
+      <p:sp>
+        <p:nvSpPr>
+          <p:cNvPr id="95" name="Google Shape;91;p1">
+            <a:extLst>
+              <a:ext uri="{FF2B5EF4-FFF2-40B4-BE49-F238E27FC236}">
+                <a16:creationId xmlns:a16="http://schemas.microsoft.com/office/drawing/2014/main" xmlns="" id="{41C2EBB3-5BF7-4F80-947A-B14A03B71943}"/>
+              </a:ext>
+            </a:extLst>
+          </p:cNvPr>
+          <p:cNvSpPr/>
+          <p:nvPr/>
+        </p:nvSpPr>
+        <p:spPr>
+          <a:xfrm>
+            <a:off x="534134" y="1922605"/>
+            <a:ext cx="1872928" cy="855299"/>
+          </a:xfrm>
+          <a:prstGeom prst="roundRect">
+            <a:avLst>
+              <a:gd name="adj" fmla="val 0"/>
+            </a:avLst>
+          </a:prstGeom>
+          <a:solidFill>
+            <a:srgbClr val="15374A"/>
+          </a:solidFill>
+          <a:ln w="9525" cap="flat" cmpd="sng">
+            <a:noFill/>
+            <a:prstDash val="solid"/>
+            <a:round/>
+            <a:headEnd type="none" w="sm" len="sm"/>
+            <a:tailEnd type="none" w="sm" len="sm"/>
+          </a:ln>
+        </p:spPr>
+        <p:txBody>
+          <a:bodyPr spcFirstLastPara="1" wrap="square" lIns="91425" tIns="45700" rIns="91425" bIns="45700" anchor="t" anchorCtr="0">
+            <a:noAutofit/>
+          </a:bodyPr>
+          <a:lstStyle/>
+          <a:p>
+            <a:pPr marL="115888" marR="0" lvl="0" indent="-115888" algn="l" rtl="0">
+              <a:spcBef>
+                <a:spcPts val="0"/>
+              </a:spcBef>
+              <a:spcAft>
+                <a:spcPts val="0"/>
+              </a:spcAft>
+              <a:buClr>
+                <a:srgbClr val="FFFFFF"/>
+              </a:buClr>
+              <a:buSzPts val="1200"/>
+              <a:buFont typeface="Arial"/>
+              <a:buChar char="•"/>
+            </a:pPr>
+            <a:r>
+              <a:rPr lang="en-US" sz="1200" dirty="0">
+                <a:solidFill>
+                  <a:srgbClr val="FFFFFF"/>
+                </a:solidFill>
+                <a:latin typeface="Calibri"/>
+                <a:ea typeface="Calibri"/>
+                <a:cs typeface="Calibri"/>
+                <a:sym typeface="Calibri"/>
+              </a:rPr>
+              <a:t>Device settings</a:t>
+            </a:r>
+            <a:endParaRPr dirty="0"/>
+          </a:p>
+          <a:p>
+            <a:pPr marL="115888" marR="0" lvl="0" indent="-115888" algn="l" rtl="0">
+              <a:spcBef>
+                <a:spcPts val="0"/>
+              </a:spcBef>
+              <a:spcAft>
+                <a:spcPts val="0"/>
+              </a:spcAft>
+              <a:buClr>
+                <a:srgbClr val="FFFFFF"/>
+              </a:buClr>
+              <a:buSzPts val="1200"/>
+              <a:buFont typeface="Arial"/>
+              <a:buChar char="•"/>
+            </a:pPr>
+            <a:r>
+              <a:rPr lang="en-US" sz="1200" dirty="0">
+                <a:solidFill>
+                  <a:srgbClr val="FFFFFF"/>
+                </a:solidFill>
+                <a:latin typeface="Calibri"/>
+                <a:ea typeface="Calibri"/>
+                <a:cs typeface="Calibri"/>
+                <a:sym typeface="Calibri"/>
+              </a:rPr>
+              <a:t>Filtering parameters</a:t>
+            </a:r>
+          </a:p>
+          <a:p>
+            <a:pPr marL="115888" marR="0" lvl="0" indent="-115888" algn="l" rtl="0">
+              <a:spcBef>
+                <a:spcPts val="0"/>
+              </a:spcBef>
+              <a:spcAft>
+                <a:spcPts val="0"/>
+              </a:spcAft>
+              <a:buClr>
+                <a:srgbClr val="FFFFFF"/>
+              </a:buClr>
+              <a:buSzPts val="1200"/>
+              <a:buFont typeface="Arial"/>
+              <a:buChar char="•"/>
+            </a:pPr>
+            <a:r>
+              <a:rPr lang="en-US" sz="1200" dirty="0">
+                <a:solidFill>
+                  <a:srgbClr val="FFFFFF"/>
+                </a:solidFill>
+                <a:latin typeface="Calibri"/>
+                <a:ea typeface="Calibri"/>
+                <a:cs typeface="Calibri"/>
+                <a:sym typeface="Calibri"/>
+              </a:rPr>
+              <a:t>Sampling rate</a:t>
+            </a:r>
+          </a:p>
+          <a:p>
+            <a:pPr marL="115888" indent="-115888">
+              <a:buClr>
+                <a:srgbClr val="FFFFFF"/>
+              </a:buClr>
+              <a:buSzPts val="1200"/>
+              <a:buFont typeface="Arial"/>
+              <a:buChar char="•"/>
+            </a:pPr>
+            <a:r>
+              <a:rPr lang="en-US" sz="1200" dirty="0">
+                <a:solidFill>
+                  <a:srgbClr val="FFFFFF"/>
+                </a:solidFill>
+                <a:latin typeface="Calibri"/>
+                <a:ea typeface="Calibri"/>
+                <a:cs typeface="Calibri"/>
+                <a:sym typeface="Calibri"/>
+              </a:rPr>
+              <a:t>Recording/imaging area</a:t>
+            </a:r>
+            <a:endParaRPr sz="1200" dirty="0">
+              <a:solidFill>
+                <a:srgbClr val="FFFFFF"/>
+              </a:solidFill>
+              <a:latin typeface="Calibri"/>
+              <a:ea typeface="Calibri"/>
+              <a:cs typeface="Calibri"/>
+              <a:sym typeface="Calibri"/>
+            </a:endParaRPr>
+          </a:p>
+          <a:p>
+            <a:pPr marL="0" marR="0" lvl="0" indent="0" algn="l" rtl="0">
+              <a:lnSpc>
+                <a:spcPct val="100000"/>
+              </a:lnSpc>
+              <a:spcBef>
+                <a:spcPts val="0"/>
+              </a:spcBef>
+              <a:spcAft>
+                <a:spcPts val="0"/>
+              </a:spcAft>
+              <a:buClr>
+                <a:schemeClr val="dk1"/>
+              </a:buClr>
+              <a:buSzPts val="1200"/>
+              <a:buFont typeface="Calibri"/>
+              <a:buNone/>
+            </a:pPr>
+            <a:endParaRPr sz="1200" b="0" i="0" u="none" strike="noStrike" cap="none" dirty="0">
+              <a:solidFill>
+                <a:srgbClr val="FFFFFF"/>
+              </a:solidFill>
+              <a:latin typeface="Calibri"/>
+              <a:ea typeface="Calibri"/>
+              <a:cs typeface="Calibri"/>
+              <a:sym typeface="Calibri"/>
+            </a:endParaRPr>
+          </a:p>
+        </p:txBody>
+      </p:sp>
+      <p:sp>
+        <p:nvSpPr>
+          <p:cNvPr id="96" name="Google Shape;92;p1">
+            <a:extLst>
+              <a:ext uri="{FF2B5EF4-FFF2-40B4-BE49-F238E27FC236}">
+                <a16:creationId xmlns:a16="http://schemas.microsoft.com/office/drawing/2014/main" xmlns="" id="{2DA28BAB-00F6-4580-8176-A2700BB88CED}"/>
+              </a:ext>
+            </a:extLst>
+          </p:cNvPr>
+          <p:cNvSpPr txBox="1"/>
+          <p:nvPr/>
+        </p:nvSpPr>
+        <p:spPr>
+          <a:xfrm>
+            <a:off x="6518442" y="3247326"/>
+            <a:ext cx="1357328" cy="246221"/>
+          </a:xfrm>
+          <a:prstGeom prst="rect">
+            <a:avLst/>
+          </a:prstGeom>
+          <a:noFill/>
+          <a:ln>
+            <a:noFill/>
+          </a:ln>
+        </p:spPr>
+        <p:txBody>
+          <a:bodyPr spcFirstLastPara="1" wrap="square" lIns="0" tIns="0" rIns="0" bIns="0" anchor="t" anchorCtr="0">
+            <a:spAutoFit/>
+          </a:bodyPr>
+          <a:lstStyle/>
+          <a:p>
+            <a:pPr marL="0" marR="0" lvl="0" indent="0" algn="l" rtl="0">
+              <a:lnSpc>
+                <a:spcPct val="100000"/>
+              </a:lnSpc>
+              <a:spcBef>
+                <a:spcPts val="0"/>
+              </a:spcBef>
+              <a:spcAft>
+                <a:spcPts val="0"/>
+              </a:spcAft>
+              <a:buClr>
+                <a:srgbClr val="15374A"/>
+              </a:buClr>
+              <a:buSzPts val="1200"/>
+              <a:buFont typeface="Calibri"/>
+              <a:buNone/>
+            </a:pPr>
+            <a:r>
+              <a:rPr lang="en-US" sz="1600" b="1" i="0" u="none" strike="noStrike" cap="none" dirty="0">
+                <a:solidFill>
+                  <a:srgbClr val="15374A"/>
+                </a:solidFill>
+                <a:latin typeface="Calibri"/>
+                <a:ea typeface="Calibri"/>
+                <a:cs typeface="Calibri"/>
+                <a:sym typeface="Calibri"/>
+              </a:rPr>
+              <a:t>Behavior</a:t>
+            </a:r>
+            <a:endParaRPr sz="1600" b="1" i="0" u="none" strike="noStrike" cap="none" dirty="0">
+              <a:solidFill>
+                <a:srgbClr val="15374A"/>
+              </a:solidFill>
+              <a:latin typeface="Calibri"/>
+              <a:ea typeface="Calibri"/>
+              <a:cs typeface="Calibri"/>
+              <a:sym typeface="Calibri"/>
+            </a:endParaRPr>
+          </a:p>
+        </p:txBody>
+      </p:sp>
+      <p:sp>
+        <p:nvSpPr>
+          <p:cNvPr id="97" name="Google Shape;93;p1">
+            <a:extLst>
+              <a:ext uri="{FF2B5EF4-FFF2-40B4-BE49-F238E27FC236}">
+                <a16:creationId xmlns:a16="http://schemas.microsoft.com/office/drawing/2014/main" xmlns="" id="{6CCA3F80-5CC1-4CA1-90B6-3D9BCBBA1553}"/>
+              </a:ext>
+            </a:extLst>
+          </p:cNvPr>
+          <p:cNvSpPr/>
+          <p:nvPr/>
+        </p:nvSpPr>
+        <p:spPr>
+          <a:xfrm>
+            <a:off x="6535732" y="3484645"/>
+            <a:ext cx="2135335" cy="855299"/>
+          </a:xfrm>
+          <a:prstGeom prst="roundRect">
+            <a:avLst>
+              <a:gd name="adj" fmla="val 0"/>
+            </a:avLst>
+          </a:prstGeom>
+          <a:solidFill>
+            <a:srgbClr val="15374A"/>
+          </a:solidFill>
+          <a:ln w="9525" cap="flat" cmpd="sng">
+            <a:noFill/>
+            <a:prstDash val="solid"/>
+            <a:round/>
+            <a:headEnd type="none" w="sm" len="sm"/>
+            <a:tailEnd type="none" w="sm" len="sm"/>
+          </a:ln>
+        </p:spPr>
+        <p:txBody>
+          <a:bodyPr spcFirstLastPara="1" wrap="square" lIns="91425" tIns="45700" rIns="91425" bIns="45700" anchor="t" anchorCtr="0">
+            <a:noAutofit/>
+          </a:bodyPr>
+          <a:lstStyle/>
+          <a:p>
+            <a:pPr marL="115888" marR="0" lvl="0" indent="-115888" algn="l" rtl="0">
+              <a:lnSpc>
+                <a:spcPct val="100000"/>
+              </a:lnSpc>
+              <a:spcBef>
+                <a:spcPts val="0"/>
+              </a:spcBef>
+              <a:spcAft>
+                <a:spcPts val="0"/>
+              </a:spcAft>
+              <a:buClr>
+                <a:srgbClr val="FFFFFF"/>
+              </a:buClr>
+              <a:buSzPts val="1200"/>
+              <a:buFont typeface="Arial"/>
+              <a:buChar char="•"/>
+            </a:pPr>
+            <a:r>
+              <a:rPr lang="en-US" sz="1200" b="0" i="0" u="none" strike="noStrike" cap="none" dirty="0">
+                <a:solidFill>
+                  <a:srgbClr val="FFFFFF"/>
+                </a:solidFill>
+                <a:latin typeface="Calibri"/>
+                <a:ea typeface="Calibri"/>
+                <a:cs typeface="Calibri"/>
+                <a:sym typeface="Calibri"/>
+              </a:rPr>
+              <a:t>Task accuracy</a:t>
+            </a:r>
+          </a:p>
+          <a:p>
+            <a:pPr marL="115888" marR="0" lvl="0" indent="-115888" algn="l" rtl="0">
+              <a:lnSpc>
+                <a:spcPct val="100000"/>
+              </a:lnSpc>
+              <a:spcBef>
+                <a:spcPts val="0"/>
+              </a:spcBef>
+              <a:spcAft>
+                <a:spcPts val="0"/>
+              </a:spcAft>
+              <a:buClr>
+                <a:srgbClr val="FFFFFF"/>
+              </a:buClr>
+              <a:buSzPts val="1200"/>
+              <a:buFont typeface="Arial"/>
+              <a:buChar char="•"/>
+            </a:pPr>
+            <a:r>
+              <a:rPr lang="en-US" sz="1200" dirty="0">
+                <a:solidFill>
+                  <a:srgbClr val="FFFFFF"/>
+                </a:solidFill>
+                <a:latin typeface="Calibri"/>
+                <a:ea typeface="Calibri"/>
+                <a:cs typeface="Calibri"/>
+                <a:sym typeface="Calibri"/>
+              </a:rPr>
+              <a:t>Task response time</a:t>
+            </a:r>
+            <a:endParaRPr lang="en-US" sz="1200" b="0" i="0" u="none" strike="noStrike" cap="none" dirty="0">
+              <a:solidFill>
+                <a:srgbClr val="FFFFFF"/>
+              </a:solidFill>
+              <a:latin typeface="Calibri"/>
+              <a:ea typeface="Calibri"/>
+              <a:cs typeface="Calibri"/>
+              <a:sym typeface="Calibri"/>
+            </a:endParaRPr>
+          </a:p>
+          <a:p>
+            <a:pPr marL="115888" marR="0" lvl="0" indent="-115888" algn="l" rtl="0">
+              <a:lnSpc>
+                <a:spcPct val="100000"/>
+              </a:lnSpc>
+              <a:spcBef>
+                <a:spcPts val="0"/>
+              </a:spcBef>
+              <a:spcAft>
+                <a:spcPts val="0"/>
+              </a:spcAft>
+              <a:buClr>
+                <a:srgbClr val="FFFFFF"/>
+              </a:buClr>
+              <a:buSzPts val="1200"/>
+              <a:buFont typeface="Arial"/>
+              <a:buChar char="•"/>
+            </a:pPr>
+            <a:r>
+              <a:rPr lang="en-US" sz="1200" b="0" i="0" u="none" strike="noStrike" cap="none" dirty="0">
+                <a:solidFill>
+                  <a:srgbClr val="FFFFFF"/>
+                </a:solidFill>
+                <a:latin typeface="Calibri"/>
+                <a:ea typeface="Calibri"/>
+                <a:cs typeface="Calibri"/>
+                <a:sym typeface="Calibri"/>
+              </a:rPr>
+              <a:t>Video and motion tracking</a:t>
+            </a:r>
+            <a:endParaRPr dirty="0"/>
+          </a:p>
+          <a:p>
+            <a:pPr marL="115888" marR="0" lvl="0" indent="-115888" algn="l" rtl="0">
+              <a:lnSpc>
+                <a:spcPct val="100000"/>
+              </a:lnSpc>
+              <a:spcBef>
+                <a:spcPts val="0"/>
+              </a:spcBef>
+              <a:spcAft>
+                <a:spcPts val="0"/>
+              </a:spcAft>
+              <a:buClr>
+                <a:srgbClr val="FFFFFF"/>
+              </a:buClr>
+              <a:buSzPts val="1200"/>
+              <a:buFont typeface="Arial"/>
+              <a:buChar char="•"/>
+            </a:pPr>
+            <a:r>
+              <a:rPr lang="en-US" sz="1200" b="0" i="0" u="none" strike="noStrike" cap="none" dirty="0">
+                <a:solidFill>
+                  <a:srgbClr val="FFFFFF"/>
+                </a:solidFill>
+                <a:latin typeface="Calibri"/>
+                <a:ea typeface="Calibri"/>
+                <a:cs typeface="Calibri"/>
+                <a:sym typeface="Calibri"/>
+              </a:rPr>
+              <a:t>Audio</a:t>
+            </a:r>
+            <a:endParaRPr sz="1200" b="0" i="0" u="none" strike="noStrike" cap="none" dirty="0">
+              <a:solidFill>
+                <a:srgbClr val="FFFFFF"/>
+              </a:solidFill>
+              <a:latin typeface="Calibri"/>
+              <a:ea typeface="Calibri"/>
+              <a:cs typeface="Calibri"/>
+              <a:sym typeface="Calibri"/>
+            </a:endParaRPr>
+          </a:p>
+        </p:txBody>
+      </p:sp>
+      <p:sp>
+        <p:nvSpPr>
+          <p:cNvPr id="98" name="Google Shape;92;p1">
+            <a:extLst>
+              <a:ext uri="{FF2B5EF4-FFF2-40B4-BE49-F238E27FC236}">
+                <a16:creationId xmlns:a16="http://schemas.microsoft.com/office/drawing/2014/main" xmlns="" id="{FACF2BB3-A2CF-4345-BFAD-509D0EFA7437}"/>
+              </a:ext>
+            </a:extLst>
+          </p:cNvPr>
+          <p:cNvSpPr txBox="1"/>
+          <p:nvPr/>
+        </p:nvSpPr>
+        <p:spPr>
+          <a:xfrm>
+            <a:off x="142785" y="3247325"/>
+            <a:ext cx="1357328" cy="246221"/>
+          </a:xfrm>
+          <a:prstGeom prst="rect">
+            <a:avLst/>
+          </a:prstGeom>
+          <a:noFill/>
+          <a:ln>
+            <a:noFill/>
+          </a:ln>
+        </p:spPr>
+        <p:txBody>
+          <a:bodyPr spcFirstLastPara="1" wrap="square" lIns="0" tIns="0" rIns="0" bIns="0" anchor="t" anchorCtr="0">
+            <a:spAutoFit/>
+          </a:bodyPr>
+          <a:lstStyle/>
+          <a:p>
+            <a:pPr marL="0" marR="0" lvl="0" indent="0" algn="l" rtl="0">
+              <a:lnSpc>
+                <a:spcPct val="100000"/>
+              </a:lnSpc>
+              <a:spcBef>
+                <a:spcPts val="0"/>
+              </a:spcBef>
+              <a:spcAft>
+                <a:spcPts val="0"/>
+              </a:spcAft>
+              <a:buClr>
+                <a:srgbClr val="15374A"/>
+              </a:buClr>
+              <a:buSzPts val="1200"/>
+              <a:buFont typeface="Calibri"/>
+              <a:buNone/>
+            </a:pPr>
+            <a:r>
+              <a:rPr lang="en-US" sz="1600" b="1" i="0" u="none" strike="noStrike" cap="none" dirty="0">
+                <a:solidFill>
+                  <a:srgbClr val="15374A"/>
+                </a:solidFill>
+                <a:latin typeface="Calibri"/>
+                <a:ea typeface="Calibri"/>
+                <a:cs typeface="Calibri"/>
+                <a:sym typeface="Calibri"/>
+              </a:rPr>
+              <a:t>Neural Activity</a:t>
+            </a:r>
+            <a:endParaRPr sz="1600" b="1" i="0" u="none" strike="noStrike" cap="none" dirty="0">
+              <a:solidFill>
+                <a:srgbClr val="15374A"/>
+              </a:solidFill>
+              <a:latin typeface="Calibri"/>
+              <a:ea typeface="Calibri"/>
+              <a:cs typeface="Calibri"/>
+              <a:sym typeface="Calibri"/>
+            </a:endParaRPr>
+          </a:p>
+        </p:txBody>
+      </p:sp>
+      <p:sp>
+        <p:nvSpPr>
+          <p:cNvPr id="99" name="Google Shape;93;p1">
+            <a:extLst>
+              <a:ext uri="{FF2B5EF4-FFF2-40B4-BE49-F238E27FC236}">
+                <a16:creationId xmlns:a16="http://schemas.microsoft.com/office/drawing/2014/main" xmlns="" id="{0D7CCA4B-A9C5-4184-AE8B-08B92D1D5EB2}"/>
+              </a:ext>
+            </a:extLst>
+          </p:cNvPr>
+          <p:cNvSpPr/>
+          <p:nvPr/>
+        </p:nvSpPr>
+        <p:spPr>
+          <a:xfrm>
+            <a:off x="160076" y="3484645"/>
+            <a:ext cx="2463140" cy="858970"/>
+          </a:xfrm>
+          <a:prstGeom prst="roundRect">
+            <a:avLst>
+              <a:gd name="adj" fmla="val 0"/>
+            </a:avLst>
+          </a:prstGeom>
+          <a:solidFill>
+            <a:srgbClr val="15374A"/>
+          </a:solidFill>
+          <a:ln w="9525" cap="flat" cmpd="sng">
+            <a:noFill/>
+            <a:prstDash val="solid"/>
+            <a:round/>
+            <a:headEnd type="none" w="sm" len="sm"/>
+            <a:tailEnd type="none" w="sm" len="sm"/>
+          </a:ln>
+        </p:spPr>
+        <p:txBody>
+          <a:bodyPr spcFirstLastPara="1" wrap="square" lIns="91425" tIns="45700" rIns="91425" bIns="45700" anchor="t" anchorCtr="0">
+            <a:noAutofit/>
+          </a:bodyPr>
+          <a:lstStyle/>
+          <a:p>
+            <a:pPr marL="115888" marR="0" lvl="0" indent="-115888" algn="l" rtl="0">
+              <a:lnSpc>
+                <a:spcPct val="100000"/>
+              </a:lnSpc>
+              <a:spcBef>
+                <a:spcPts val="0"/>
+              </a:spcBef>
+              <a:spcAft>
+                <a:spcPts val="0"/>
+              </a:spcAft>
+              <a:buClr>
+                <a:srgbClr val="FFFFFF"/>
+              </a:buClr>
+              <a:buSzPts val="1200"/>
+              <a:buFont typeface="Arial"/>
+              <a:buChar char="•"/>
+            </a:pPr>
+            <a:r>
+              <a:rPr lang="en-US" sz="1200" b="0" i="0" u="none" strike="noStrike" cap="none" dirty="0">
+                <a:solidFill>
+                  <a:srgbClr val="FFFFFF"/>
+                </a:solidFill>
+                <a:latin typeface="Calibri"/>
+                <a:ea typeface="Calibri"/>
+                <a:cs typeface="Calibri"/>
+                <a:sym typeface="Calibri"/>
+              </a:rPr>
+              <a:t>Extracellular electrophysiology</a:t>
+            </a:r>
+          </a:p>
+          <a:p>
+            <a:pPr marL="115888" marR="0" lvl="0" indent="-115888" algn="l" rtl="0">
+              <a:lnSpc>
+                <a:spcPct val="100000"/>
+              </a:lnSpc>
+              <a:spcBef>
+                <a:spcPts val="0"/>
+              </a:spcBef>
+              <a:spcAft>
+                <a:spcPts val="0"/>
+              </a:spcAft>
+              <a:buClr>
+                <a:srgbClr val="FFFFFF"/>
+              </a:buClr>
+              <a:buSzPts val="1200"/>
+              <a:buFont typeface="Arial"/>
+              <a:buChar char="•"/>
+            </a:pPr>
+            <a:r>
+              <a:rPr lang="en-US" sz="1200" dirty="0">
+                <a:solidFill>
+                  <a:srgbClr val="FFFFFF"/>
+                </a:solidFill>
+                <a:latin typeface="Calibri"/>
+                <a:ea typeface="Calibri"/>
+                <a:cs typeface="Calibri"/>
+                <a:sym typeface="Calibri"/>
+              </a:rPr>
+              <a:t>Intracellular electrophysiology</a:t>
+            </a:r>
+          </a:p>
+          <a:p>
+            <a:pPr marL="115888" marR="0" lvl="0" indent="-115888" algn="l" rtl="0">
+              <a:lnSpc>
+                <a:spcPct val="100000"/>
+              </a:lnSpc>
+              <a:spcBef>
+                <a:spcPts val="0"/>
+              </a:spcBef>
+              <a:spcAft>
+                <a:spcPts val="0"/>
+              </a:spcAft>
+              <a:buClr>
+                <a:srgbClr val="FFFFFF"/>
+              </a:buClr>
+              <a:buSzPts val="1200"/>
+              <a:buFont typeface="Arial"/>
+              <a:buChar char="•"/>
+            </a:pPr>
+            <a:r>
+              <a:rPr lang="en-US" sz="1200" b="0" i="0" u="none" strike="noStrike" cap="none" dirty="0">
+                <a:solidFill>
+                  <a:srgbClr val="FFFFFF"/>
+                </a:solidFill>
+                <a:latin typeface="Calibri"/>
+                <a:ea typeface="Calibri"/>
+                <a:cs typeface="Calibri"/>
+                <a:sym typeface="Calibri"/>
+              </a:rPr>
+              <a:t>Two-photon imaging</a:t>
+            </a:r>
+          </a:p>
+          <a:p>
+            <a:pPr marL="115888" marR="0" lvl="0" indent="-115888" algn="l" rtl="0">
+              <a:lnSpc>
+                <a:spcPct val="100000"/>
+              </a:lnSpc>
+              <a:spcBef>
+                <a:spcPts val="0"/>
+              </a:spcBef>
+              <a:spcAft>
+                <a:spcPts val="0"/>
+              </a:spcAft>
+              <a:buClr>
+                <a:srgbClr val="FFFFFF"/>
+              </a:buClr>
+              <a:buSzPts val="1200"/>
+              <a:buFont typeface="Arial"/>
+              <a:buChar char="•"/>
+            </a:pPr>
+            <a:r>
+              <a:rPr lang="en-US" sz="1200" dirty="0">
+                <a:solidFill>
+                  <a:srgbClr val="FFFFFF"/>
+                </a:solidFill>
+                <a:latin typeface="Calibri"/>
+                <a:ea typeface="Calibri"/>
+                <a:cs typeface="Calibri"/>
+                <a:sym typeface="Calibri"/>
+              </a:rPr>
+              <a:t>Functional ultrasound imaging</a:t>
+            </a:r>
+            <a:endParaRPr sz="1200" b="0" i="0" u="none" strike="noStrike" cap="none" dirty="0">
+              <a:solidFill>
+                <a:srgbClr val="FFFFFF"/>
+              </a:solidFill>
+              <a:latin typeface="Calibri"/>
+              <a:ea typeface="Calibri"/>
+              <a:cs typeface="Calibri"/>
+              <a:sym typeface="Calibri"/>
+            </a:endParaRPr>
+          </a:p>
+        </p:txBody>
+      </p:sp>
+      <p:sp>
+        <p:nvSpPr>
+          <p:cNvPr id="100" name="Google Shape;106;p1">
+            <a:extLst>
+              <a:ext uri="{FF2B5EF4-FFF2-40B4-BE49-F238E27FC236}">
+                <a16:creationId xmlns:a16="http://schemas.microsoft.com/office/drawing/2014/main" xmlns="" id="{E05F7D88-50A6-4383-BB16-EB5B35AC27C1}"/>
+              </a:ext>
+            </a:extLst>
+          </p:cNvPr>
+          <p:cNvSpPr/>
+          <p:nvPr/>
+        </p:nvSpPr>
+        <p:spPr>
+          <a:xfrm rot="20436743">
+            <a:off x="2521040" y="3803147"/>
+            <a:ext cx="949668" cy="334598"/>
+          </a:xfrm>
+          <a:prstGeom prst="rightArrow">
+            <a:avLst>
+              <a:gd name="adj1" fmla="val 50000"/>
+              <a:gd name="adj2" fmla="val 50000"/>
+            </a:avLst>
+          </a:prstGeom>
+          <a:solidFill>
+            <a:srgbClr val="15374A"/>
+          </a:solidFill>
+          <a:ln w="9525" cap="flat" cmpd="sng">
+            <a:noFill/>
+            <a:prstDash val="solid"/>
+            <a:round/>
+            <a:headEnd type="none" w="sm" len="sm"/>
+            <a:tailEnd type="none" w="sm" len="sm"/>
+          </a:ln>
+        </p:spPr>
+        <p:txBody>
+          <a:bodyPr spcFirstLastPara="1" wrap="square" lIns="91425" tIns="45700" rIns="91425" bIns="45700" anchor="ctr" anchorCtr="0">
+            <a:noAutofit/>
+          </a:bodyPr>
+          <a:lstStyle/>
+          <a:p>
+            <a:pPr marL="0" marR="0" lvl="0" indent="0" algn="ctr" rtl="0">
+              <a:lnSpc>
+                <a:spcPct val="100000"/>
+              </a:lnSpc>
+              <a:spcBef>
+                <a:spcPts val="0"/>
+              </a:spcBef>
+              <a:spcAft>
+                <a:spcPts val="0"/>
+              </a:spcAft>
+              <a:buClr>
+                <a:schemeClr val="dk1"/>
+              </a:buClr>
+              <a:buSzPts val="1800"/>
+              <a:buFont typeface="Calibri"/>
+              <a:buNone/>
+            </a:pPr>
+            <a:endParaRPr sz="1800" b="0" i="0" u="none" strike="noStrike" cap="none">
+              <a:solidFill>
+                <a:srgbClr val="FFFFFF"/>
+              </a:solidFill>
+              <a:latin typeface="Arial"/>
+              <a:ea typeface="Arial"/>
+              <a:cs typeface="Arial"/>
+              <a:sym typeface="Arial"/>
+            </a:endParaRPr>
+          </a:p>
+        </p:txBody>
+      </p:sp>
+      <p:grpSp>
+        <p:nvGrpSpPr>
+          <p:cNvPr id="101" name="Group 100">
+            <a:extLst>
+              <a:ext uri="{FF2B5EF4-FFF2-40B4-BE49-F238E27FC236}">
+                <a16:creationId xmlns:a16="http://schemas.microsoft.com/office/drawing/2014/main" xmlns="" id="{F7B6E189-11DE-4B5E-AE59-FBCC841F6533}"/>
+              </a:ext>
+            </a:extLst>
+          </p:cNvPr>
+          <p:cNvGrpSpPr/>
+          <p:nvPr/>
+        </p:nvGrpSpPr>
+        <p:grpSpPr>
+          <a:xfrm>
+            <a:off x="2323385" y="3080866"/>
+            <a:ext cx="612648" cy="612648"/>
+            <a:chOff x="3274407" y="6373397"/>
+            <a:chExt cx="612980" cy="612979"/>
+          </a:xfrm>
+        </p:grpSpPr>
+        <p:sp>
+          <p:nvSpPr>
+            <p:cNvPr id="102" name="Rectangle: Rounded Corners 74">
+              <a:extLst>
+                <a:ext uri="{FF2B5EF4-FFF2-40B4-BE49-F238E27FC236}">
+                  <a16:creationId xmlns:a16="http://schemas.microsoft.com/office/drawing/2014/main" xmlns="" id="{60A5C00C-D997-44AD-AD77-EDDF9B280928}"/>
+                </a:ext>
+              </a:extLst>
+            </p:cNvPr>
+            <p:cNvSpPr/>
+            <p:nvPr/>
+          </p:nvSpPr>
+          <p:spPr>
+            <a:xfrm>
+              <a:off x="3274407" y="6373397"/>
+              <a:ext cx="612979" cy="612979"/>
+            </a:xfrm>
+            <a:prstGeom prst="roundRect">
+              <a:avLst>
+                <a:gd name="adj" fmla="val 10731"/>
+              </a:avLst>
+            </a:prstGeom>
+            <a:solidFill>
+              <a:schemeClr val="bg2">
+                <a:lumMod val="20000"/>
+                <a:lumOff val="80000"/>
+              </a:schemeClr>
+            </a:solidFill>
+            <a:ln>
+              <a:solidFill>
+                <a:srgbClr val="0070C0"/>
+              </a:solidFill>
+            </a:ln>
+          </p:spPr>
+          <p:style>
+            <a:lnRef idx="2">
+              <a:schemeClr val="accent1">
+                <a:shade val="50000"/>
+              </a:schemeClr>
+            </a:lnRef>
+            <a:fillRef idx="1">
+              <a:schemeClr val="accent1"/>
+            </a:fillRef>
+            <a:effectRef idx="0">
+              <a:schemeClr val="accent1"/>
+            </a:effectRef>
+            <a:fontRef idx="minor">
+              <a:schemeClr val="lt1"/>
+            </a:fontRef>
+          </p:style>
+          <p:txBody>
+            <a:bodyPr rtlCol="0" anchor="ctr"/>
+            <a:lstStyle/>
+            <a:p>
+              <a:pPr algn="ctr"/>
+              <a:endParaRPr lang="en-US"/>
+            </a:p>
+          </p:txBody>
+        </p:sp>
+        <p:pic>
+          <p:nvPicPr>
+            <p:cNvPr id="103" name="Picture 102">
+              <a:extLst>
+                <a:ext uri="{FF2B5EF4-FFF2-40B4-BE49-F238E27FC236}">
+                  <a16:creationId xmlns:a16="http://schemas.microsoft.com/office/drawing/2014/main" xmlns="" id="{B6E9A71D-DF6E-4024-94D6-6E7DCEB5B356}"/>
+                </a:ext>
+              </a:extLst>
+            </p:cNvPr>
+            <p:cNvPicPr>
+              <a:picLocks noChangeAspect="1"/>
+            </p:cNvPicPr>
+            <p:nvPr/>
+          </p:nvPicPr>
+          <p:blipFill>
+            <a:blip r:embed="rId3"/>
+            <a:stretch>
+              <a:fillRect/>
+            </a:stretch>
+          </p:blipFill>
+          <p:spPr>
+            <a:xfrm>
+              <a:off x="3293245" y="6444992"/>
+              <a:ext cx="594142" cy="469787"/>
+            </a:xfrm>
+            <a:prstGeom prst="rect">
+              <a:avLst/>
+            </a:prstGeom>
+          </p:spPr>
+        </p:pic>
+      </p:grpSp>
+      <p:grpSp>
+        <p:nvGrpSpPr>
+          <p:cNvPr id="104" name="Group 103">
+            <a:extLst>
+              <a:ext uri="{FF2B5EF4-FFF2-40B4-BE49-F238E27FC236}">
+                <a16:creationId xmlns:a16="http://schemas.microsoft.com/office/drawing/2014/main" xmlns="" id="{8533F0EA-233B-4922-87F3-6B8EB543F41C}"/>
+              </a:ext>
+            </a:extLst>
+          </p:cNvPr>
+          <p:cNvGrpSpPr/>
+          <p:nvPr/>
+        </p:nvGrpSpPr>
+        <p:grpSpPr>
+          <a:xfrm>
+            <a:off x="8339083" y="3080867"/>
+            <a:ext cx="670304" cy="615581"/>
+            <a:chOff x="3923188" y="1726803"/>
+            <a:chExt cx="567853" cy="521494"/>
+          </a:xfrm>
+        </p:grpSpPr>
+        <p:grpSp>
+          <p:nvGrpSpPr>
+            <p:cNvPr id="105" name="Group 104">
+              <a:extLst>
+                <a:ext uri="{FF2B5EF4-FFF2-40B4-BE49-F238E27FC236}">
+                  <a16:creationId xmlns:a16="http://schemas.microsoft.com/office/drawing/2014/main" xmlns="" id="{6CAEF187-8E94-4B99-9C5D-47EF335D9089}"/>
+                </a:ext>
+              </a:extLst>
+            </p:cNvPr>
+            <p:cNvGrpSpPr/>
+            <p:nvPr/>
+          </p:nvGrpSpPr>
+          <p:grpSpPr>
+            <a:xfrm>
+              <a:off x="3923188" y="1726803"/>
+              <a:ext cx="521760" cy="521494"/>
+              <a:chOff x="3429000" y="4012406"/>
+              <a:chExt cx="521760" cy="521494"/>
+            </a:xfrm>
+          </p:grpSpPr>
+          <p:sp>
+            <p:nvSpPr>
+              <p:cNvPr id="107" name="Rectangle: Rounded Corners 69">
+                <a:extLst>
+                  <a:ext uri="{FF2B5EF4-FFF2-40B4-BE49-F238E27FC236}">
+                    <a16:creationId xmlns:a16="http://schemas.microsoft.com/office/drawing/2014/main" xmlns="" id="{46ADD4FB-21F0-490C-905B-48C9F3F82299}"/>
+                  </a:ext>
+                </a:extLst>
+              </p:cNvPr>
+              <p:cNvSpPr/>
+              <p:nvPr/>
+            </p:nvSpPr>
+            <p:spPr>
+              <a:xfrm>
+                <a:off x="3429000" y="4012406"/>
+                <a:ext cx="521494" cy="521494"/>
+              </a:xfrm>
+              <a:prstGeom prst="roundRect">
+                <a:avLst>
+                  <a:gd name="adj" fmla="val 10731"/>
+                </a:avLst>
+              </a:prstGeom>
+              <a:solidFill>
+                <a:schemeClr val="bg2">
+                  <a:lumMod val="20000"/>
+                  <a:lumOff val="80000"/>
+                </a:schemeClr>
+              </a:solidFill>
+              <a:ln>
+                <a:solidFill>
+                  <a:srgbClr val="0070C0"/>
+                </a:solidFill>
+              </a:ln>
+            </p:spPr>
+            <p:style>
+              <a:lnRef idx="2">
+                <a:schemeClr val="accent1">
+                  <a:shade val="50000"/>
+                </a:schemeClr>
+              </a:lnRef>
+              <a:fillRef idx="1">
+                <a:schemeClr val="accent1"/>
+              </a:fillRef>
+              <a:effectRef idx="0">
+                <a:schemeClr val="accent1"/>
+              </a:effectRef>
+              <a:fontRef idx="minor">
+                <a:schemeClr val="lt1"/>
+              </a:fontRef>
+            </p:style>
+            <p:txBody>
+              <a:bodyPr rtlCol="0" anchor="ctr"/>
+              <a:lstStyle/>
+              <a:p>
+                <a:pPr algn="ctr"/>
+                <a:endParaRPr lang="en-US"/>
+              </a:p>
+            </p:txBody>
+          </p:sp>
+          <p:cxnSp>
+            <p:nvCxnSpPr>
+              <p:cNvPr id="108" name="Straight Connector 107">
+                <a:extLst>
+                  <a:ext uri="{FF2B5EF4-FFF2-40B4-BE49-F238E27FC236}">
+                    <a16:creationId xmlns:a16="http://schemas.microsoft.com/office/drawing/2014/main" xmlns="" id="{73A77711-C875-4EBC-A6FD-364AA238DF7E}"/>
+                  </a:ext>
+                </a:extLst>
+              </p:cNvPr>
+              <p:cNvCxnSpPr>
+                <a:cxnSpLocks/>
+              </p:cNvCxnSpPr>
+              <p:nvPr/>
+            </p:nvCxnSpPr>
+            <p:spPr>
+              <a:xfrm>
+                <a:off x="3566962" y="4192712"/>
+                <a:ext cx="383532" cy="0"/>
+              </a:xfrm>
+              <a:prstGeom prst="line">
+                <a:avLst/>
+              </a:prstGeom>
+              <a:ln w="28575">
+                <a:solidFill>
+                  <a:srgbClr val="0070C0"/>
+                </a:solidFill>
+              </a:ln>
+            </p:spPr>
+            <p:style>
+              <a:lnRef idx="1">
+                <a:schemeClr val="accent1"/>
+              </a:lnRef>
+              <a:fillRef idx="0">
+                <a:schemeClr val="accent1"/>
+              </a:fillRef>
+              <a:effectRef idx="0">
+                <a:schemeClr val="accent1"/>
+              </a:effectRef>
+              <a:fontRef idx="minor">
+                <a:schemeClr val="tx1"/>
+              </a:fontRef>
+            </p:style>
+          </p:cxnSp>
+          <p:cxnSp>
+            <p:nvCxnSpPr>
+              <p:cNvPr id="109" name="Straight Connector 108">
+                <a:extLst>
+                  <a:ext uri="{FF2B5EF4-FFF2-40B4-BE49-F238E27FC236}">
+                    <a16:creationId xmlns:a16="http://schemas.microsoft.com/office/drawing/2014/main" xmlns="" id="{11861DC9-C16D-45C2-98AE-3973A32FEF15}"/>
+                  </a:ext>
+                </a:extLst>
+              </p:cNvPr>
+              <p:cNvCxnSpPr>
+                <a:cxnSpLocks/>
+              </p:cNvCxnSpPr>
+              <p:nvPr/>
+            </p:nvCxnSpPr>
+            <p:spPr>
+              <a:xfrm>
+                <a:off x="3566962" y="4366528"/>
+                <a:ext cx="383798" cy="0"/>
+              </a:xfrm>
+              <a:prstGeom prst="line">
+                <a:avLst/>
+              </a:prstGeom>
+              <a:ln w="28575">
+                <a:solidFill>
+                  <a:srgbClr val="0070C0"/>
+                </a:solidFill>
+              </a:ln>
+            </p:spPr>
+            <p:style>
+              <a:lnRef idx="1">
+                <a:schemeClr val="accent1"/>
+              </a:lnRef>
+              <a:fillRef idx="0">
+                <a:schemeClr val="accent1"/>
+              </a:fillRef>
+              <a:effectRef idx="0">
+                <a:schemeClr val="accent1"/>
+              </a:effectRef>
+              <a:fontRef idx="minor">
+                <a:schemeClr val="tx1"/>
+              </a:fontRef>
+            </p:style>
+          </p:cxnSp>
+          <p:pic>
+            <p:nvPicPr>
+              <p:cNvPr id="110" name="Picture 2" descr="File:Twemoji2 1f9c0.svg">
+                <a:extLst>
+                  <a:ext uri="{FF2B5EF4-FFF2-40B4-BE49-F238E27FC236}">
+                    <a16:creationId xmlns:a16="http://schemas.microsoft.com/office/drawing/2014/main" xmlns="" id="{878AD6F0-9FA0-4E08-8018-03B17D4BD401}"/>
+                  </a:ext>
+                </a:extLst>
+              </p:cNvPr>
+              <p:cNvPicPr>
+                <a:picLocks noChangeAspect="1" noChangeArrowheads="1"/>
+              </p:cNvPicPr>
+              <p:nvPr/>
+            </p:nvPicPr>
+            <p:blipFill>
+              <a:blip r:embed="rId4">
+                <a:extLst>
+                  <a:ext uri="{28A0092B-C50C-407E-A947-70E740481C1C}">
+                    <a14:useLocalDpi xmlns:a14="http://schemas.microsoft.com/office/drawing/2010/main" val="0"/>
+                  </a:ext>
+                </a:extLst>
+              </a:blip>
+              <a:srcRect/>
+              <a:stretch>
+                <a:fillRect/>
+              </a:stretch>
+            </p:blipFill>
+            <p:spPr bwMode="auto">
+              <a:xfrm rot="10800000" flipH="1" flipV="1">
+                <a:off x="3776282" y="4023098"/>
+                <a:ext cx="154152" cy="154152"/>
+              </a:xfrm>
+              <a:prstGeom prst="rect">
+                <a:avLst/>
+              </a:prstGeom>
+              <a:noFill/>
+              <a:extLst>
+                <a:ext uri="{909E8E84-426E-40dd-AFC4-6F175D3DCCD1}">
+                  <a14:hiddenFill xmlns:a14="http://schemas.microsoft.com/office/drawing/2010/main">
+                    <a:solidFill>
+                      <a:srgbClr val="FFFFFF"/>
+                    </a:solidFill>
+                  </a14:hiddenFill>
+                </a:ext>
+              </a:extLst>
+            </p:spPr>
+          </p:pic>
+          <p:pic>
+            <p:nvPicPr>
+              <p:cNvPr id="111" name="Picture 4" descr="Image result for mouse icon">
+                <a:extLst>
+                  <a:ext uri="{FF2B5EF4-FFF2-40B4-BE49-F238E27FC236}">
+                    <a16:creationId xmlns:a16="http://schemas.microsoft.com/office/drawing/2014/main" xmlns="" id="{1D9E7CF6-722E-4805-B459-91333BA63464}"/>
+                  </a:ext>
+                </a:extLst>
+              </p:cNvPr>
+              <p:cNvPicPr>
+                <a:picLocks noChangeAspect="1" noChangeArrowheads="1"/>
+              </p:cNvPicPr>
+              <p:nvPr/>
+            </p:nvPicPr>
+            <p:blipFill rotWithShape="1">
+              <a:blip r:embed="rId5">
+                <a:extLst>
+                  <a:ext uri="{28A0092B-C50C-407E-A947-70E740481C1C}">
+                    <a14:useLocalDpi xmlns:a14="http://schemas.microsoft.com/office/drawing/2010/main" val="0"/>
+                  </a:ext>
+                </a:extLst>
+              </a:blip>
+              <a:srcRect l="7842"/>
+              <a:stretch/>
+            </p:blipFill>
+            <p:spPr bwMode="auto">
+              <a:xfrm>
+                <a:off x="3529826" y="4017170"/>
+                <a:ext cx="274641" cy="149006"/>
+              </a:xfrm>
+              <a:prstGeom prst="rect">
+                <a:avLst/>
+              </a:prstGeom>
+              <a:noFill/>
+              <a:extLst>
+                <a:ext uri="{909E8E84-426E-40dd-AFC4-6F175D3DCCD1}">
+                  <a14:hiddenFill xmlns:a14="http://schemas.microsoft.com/office/drawing/2010/main">
+                    <a:solidFill>
+                      <a:srgbClr val="FFFFFF"/>
+                    </a:solidFill>
+                  </a14:hiddenFill>
+                </a:ext>
+              </a:extLst>
+            </p:spPr>
+          </p:pic>
+        </p:grpSp>
+        <p:sp>
+          <p:nvSpPr>
+            <p:cNvPr id="106" name="Arc 105">
+              <a:extLst>
+                <a:ext uri="{FF2B5EF4-FFF2-40B4-BE49-F238E27FC236}">
+                  <a16:creationId xmlns:a16="http://schemas.microsoft.com/office/drawing/2014/main" xmlns="" id="{36D59BD8-3664-49AF-9987-803A471D777C}"/>
+                </a:ext>
+              </a:extLst>
+            </p:cNvPr>
+            <p:cNvSpPr/>
+            <p:nvPr/>
+          </p:nvSpPr>
+          <p:spPr>
+            <a:xfrm>
+              <a:off x="3986216" y="1816951"/>
+              <a:ext cx="504825" cy="192023"/>
+            </a:xfrm>
+            <a:prstGeom prst="arc">
+              <a:avLst>
+                <a:gd name="adj1" fmla="val 2868603"/>
+                <a:gd name="adj2" fmla="val 12375068"/>
+              </a:avLst>
+            </a:prstGeom>
+            <a:ln w="19050">
+              <a:prstDash val="sysDash"/>
+              <a:headEnd type="none" w="med" len="med"/>
+              <a:tailEnd type="none" w="sm" len="sm"/>
+            </a:ln>
+          </p:spPr>
+          <p:style>
+            <a:lnRef idx="1">
+              <a:schemeClr val="accent1"/>
+            </a:lnRef>
+            <a:fillRef idx="0">
+              <a:schemeClr val="accent1"/>
+            </a:fillRef>
+            <a:effectRef idx="0">
+              <a:schemeClr val="accent1"/>
+            </a:effectRef>
+            <a:fontRef idx="minor">
+              <a:schemeClr val="tx1"/>
+            </a:fontRef>
+          </p:style>
+          <p:txBody>
+            <a:bodyPr rtlCol="0" anchor="ctr"/>
+            <a:lstStyle/>
+            <a:p>
+              <a:pPr algn="ctr"/>
+              <a:endParaRPr lang="en-US"/>
+            </a:p>
+          </p:txBody>
+        </p:sp>
+      </p:grpSp>
+      <p:grpSp>
+        <p:nvGrpSpPr>
+          <p:cNvPr id="112" name="Group 111">
+            <a:extLst>
+              <a:ext uri="{FF2B5EF4-FFF2-40B4-BE49-F238E27FC236}">
+                <a16:creationId xmlns:a16="http://schemas.microsoft.com/office/drawing/2014/main" xmlns="" id="{A147092B-0C2D-43D9-AFCE-929CF5ACDA5D}"/>
+              </a:ext>
+            </a:extLst>
+          </p:cNvPr>
+          <p:cNvGrpSpPr/>
+          <p:nvPr/>
+        </p:nvGrpSpPr>
+        <p:grpSpPr>
+          <a:xfrm>
+            <a:off x="5251903" y="691276"/>
+            <a:ext cx="667512" cy="612648"/>
+            <a:chOff x="3923187" y="2721936"/>
+            <a:chExt cx="667512" cy="612648"/>
+          </a:xfrm>
+        </p:grpSpPr>
+        <p:grpSp>
+          <p:nvGrpSpPr>
+            <p:cNvPr id="113" name="Group 112">
+              <a:extLst>
+                <a:ext uri="{FF2B5EF4-FFF2-40B4-BE49-F238E27FC236}">
+                  <a16:creationId xmlns:a16="http://schemas.microsoft.com/office/drawing/2014/main" xmlns="" id="{490778BE-56F6-46DE-988E-1697407FD7B8}"/>
+                </a:ext>
+              </a:extLst>
+            </p:cNvPr>
+            <p:cNvGrpSpPr/>
+            <p:nvPr/>
+          </p:nvGrpSpPr>
+          <p:grpSpPr>
+            <a:xfrm>
+              <a:off x="3923187" y="2721936"/>
+              <a:ext cx="613330" cy="612648"/>
+              <a:chOff x="3429000" y="4012406"/>
+              <a:chExt cx="521760" cy="521494"/>
+            </a:xfrm>
+          </p:grpSpPr>
+          <p:sp>
+            <p:nvSpPr>
+              <p:cNvPr id="117" name="Rectangle: Rounded Corners 79">
+                <a:extLst>
+                  <a:ext uri="{FF2B5EF4-FFF2-40B4-BE49-F238E27FC236}">
+                    <a16:creationId xmlns:a16="http://schemas.microsoft.com/office/drawing/2014/main" xmlns="" id="{FC567C61-02BE-43BC-BF5B-00B58CD29A58}"/>
+                  </a:ext>
+                </a:extLst>
+              </p:cNvPr>
+              <p:cNvSpPr/>
+              <p:nvPr/>
+            </p:nvSpPr>
+            <p:spPr>
+              <a:xfrm>
+                <a:off x="3429000" y="4012406"/>
+                <a:ext cx="521494" cy="521494"/>
+              </a:xfrm>
+              <a:prstGeom prst="roundRect">
+                <a:avLst>
+                  <a:gd name="adj" fmla="val 10731"/>
+                </a:avLst>
+              </a:prstGeom>
+              <a:solidFill>
+                <a:schemeClr val="bg2">
+                  <a:lumMod val="20000"/>
+                  <a:lumOff val="80000"/>
+                </a:schemeClr>
+              </a:solidFill>
+              <a:ln>
+                <a:solidFill>
+                  <a:srgbClr val="0070C0"/>
+                </a:solidFill>
+              </a:ln>
+            </p:spPr>
+            <p:style>
+              <a:lnRef idx="2">
+                <a:schemeClr val="accent1">
+                  <a:shade val="50000"/>
+                </a:schemeClr>
+              </a:lnRef>
+              <a:fillRef idx="1">
+                <a:schemeClr val="accent1"/>
+              </a:fillRef>
+              <a:effectRef idx="0">
+                <a:schemeClr val="accent1"/>
+              </a:effectRef>
+              <a:fontRef idx="minor">
+                <a:schemeClr val="lt1"/>
+              </a:fontRef>
+            </p:style>
+            <p:txBody>
+              <a:bodyPr rtlCol="0" anchor="ctr"/>
+              <a:lstStyle/>
+              <a:p>
+                <a:pPr algn="ctr"/>
+                <a:endParaRPr lang="en-US"/>
+              </a:p>
+            </p:txBody>
+          </p:sp>
+          <p:cxnSp>
+            <p:nvCxnSpPr>
+              <p:cNvPr id="118" name="Straight Connector 117">
+                <a:extLst>
+                  <a:ext uri="{FF2B5EF4-FFF2-40B4-BE49-F238E27FC236}">
+                    <a16:creationId xmlns:a16="http://schemas.microsoft.com/office/drawing/2014/main" xmlns="" id="{597C7B93-EC0B-4843-A781-62CB75DE6C38}"/>
+                  </a:ext>
+                </a:extLst>
+              </p:cNvPr>
+              <p:cNvCxnSpPr>
+                <a:cxnSpLocks/>
+              </p:cNvCxnSpPr>
+              <p:nvPr/>
+            </p:nvCxnSpPr>
+            <p:spPr>
+              <a:xfrm>
+                <a:off x="3566962" y="4192712"/>
+                <a:ext cx="383532" cy="0"/>
+              </a:xfrm>
+              <a:prstGeom prst="line">
+                <a:avLst/>
+              </a:prstGeom>
+              <a:ln w="28575">
+                <a:solidFill>
+                  <a:srgbClr val="0070C0"/>
+                </a:solidFill>
+              </a:ln>
+            </p:spPr>
+            <p:style>
+              <a:lnRef idx="1">
+                <a:schemeClr val="accent1"/>
+              </a:lnRef>
+              <a:fillRef idx="0">
+                <a:schemeClr val="accent1"/>
+              </a:fillRef>
+              <a:effectRef idx="0">
+                <a:schemeClr val="accent1"/>
+              </a:effectRef>
+              <a:fontRef idx="minor">
+                <a:schemeClr val="tx1"/>
+              </a:fontRef>
+            </p:style>
+          </p:cxnSp>
+          <p:cxnSp>
+            <p:nvCxnSpPr>
+              <p:cNvPr id="119" name="Straight Connector 118">
+                <a:extLst>
+                  <a:ext uri="{FF2B5EF4-FFF2-40B4-BE49-F238E27FC236}">
+                    <a16:creationId xmlns:a16="http://schemas.microsoft.com/office/drawing/2014/main" xmlns="" id="{2110824D-F9C4-4EF8-A877-9FB477089FF9}"/>
+                  </a:ext>
+                </a:extLst>
+              </p:cNvPr>
+              <p:cNvCxnSpPr>
+                <a:cxnSpLocks/>
+              </p:cNvCxnSpPr>
+              <p:nvPr/>
+            </p:nvCxnSpPr>
+            <p:spPr>
+              <a:xfrm>
+                <a:off x="3566962" y="4366528"/>
+                <a:ext cx="383798" cy="0"/>
+              </a:xfrm>
+              <a:prstGeom prst="line">
+                <a:avLst/>
+              </a:prstGeom>
+              <a:ln w="28575">
+                <a:solidFill>
+                  <a:srgbClr val="0070C0"/>
+                </a:solidFill>
+              </a:ln>
+            </p:spPr>
+            <p:style>
+              <a:lnRef idx="1">
+                <a:schemeClr val="accent1"/>
+              </a:lnRef>
+              <a:fillRef idx="0">
+                <a:schemeClr val="accent1"/>
+              </a:fillRef>
+              <a:effectRef idx="0">
+                <a:schemeClr val="accent1"/>
+              </a:effectRef>
+              <a:fontRef idx="minor">
+                <a:schemeClr val="tx1"/>
+              </a:fontRef>
+            </p:style>
+          </p:cxnSp>
+          <p:pic>
+            <p:nvPicPr>
+              <p:cNvPr id="120" name="Picture 2" descr="File:Twemoji2 1f9c0.svg">
+                <a:extLst>
+                  <a:ext uri="{FF2B5EF4-FFF2-40B4-BE49-F238E27FC236}">
+                    <a16:creationId xmlns:a16="http://schemas.microsoft.com/office/drawing/2014/main" xmlns="" id="{5A5B871B-2192-4A7B-9324-28EA08801BA6}"/>
+                  </a:ext>
+                </a:extLst>
+              </p:cNvPr>
+              <p:cNvPicPr>
+                <a:picLocks noChangeAspect="1" noChangeArrowheads="1"/>
+              </p:cNvPicPr>
+              <p:nvPr/>
+            </p:nvPicPr>
+            <p:blipFill>
+              <a:blip r:embed="rId4">
+                <a:extLst>
+                  <a:ext uri="{28A0092B-C50C-407E-A947-70E740481C1C}">
+                    <a14:useLocalDpi xmlns:a14="http://schemas.microsoft.com/office/drawing/2010/main" val="0"/>
+                  </a:ext>
+                </a:extLst>
+              </a:blip>
+              <a:srcRect/>
+              <a:stretch>
+                <a:fillRect/>
+              </a:stretch>
+            </p:blipFill>
+            <p:spPr bwMode="auto">
+              <a:xfrm rot="10800000" flipH="1" flipV="1">
+                <a:off x="3776282" y="4023098"/>
+                <a:ext cx="154152" cy="154152"/>
+              </a:xfrm>
+              <a:prstGeom prst="rect">
+                <a:avLst/>
+              </a:prstGeom>
+              <a:noFill/>
+              <a:extLst>
+                <a:ext uri="{909E8E84-426E-40dd-AFC4-6F175D3DCCD1}">
+                  <a14:hiddenFill xmlns:a14="http://schemas.microsoft.com/office/drawing/2010/main">
+                    <a:solidFill>
+                      <a:srgbClr val="FFFFFF"/>
+                    </a:solidFill>
+                  </a14:hiddenFill>
+                </a:ext>
+              </a:extLst>
+            </p:spPr>
+          </p:pic>
+          <p:pic>
+            <p:nvPicPr>
+              <p:cNvPr id="121" name="Picture 4" descr="Image result for mouse icon">
+                <a:extLst>
+                  <a:ext uri="{FF2B5EF4-FFF2-40B4-BE49-F238E27FC236}">
+                    <a16:creationId xmlns:a16="http://schemas.microsoft.com/office/drawing/2014/main" xmlns="" id="{D5347191-B65F-41EA-9F1B-CC42CB5A71DD}"/>
+                  </a:ext>
+                </a:extLst>
+              </p:cNvPr>
+              <p:cNvPicPr>
+                <a:picLocks noChangeAspect="1" noChangeArrowheads="1"/>
+              </p:cNvPicPr>
+              <p:nvPr/>
+            </p:nvPicPr>
+            <p:blipFill rotWithShape="1">
+              <a:blip r:embed="rId5">
+                <a:extLst>
+                  <a:ext uri="{28A0092B-C50C-407E-A947-70E740481C1C}">
+                    <a14:useLocalDpi xmlns:a14="http://schemas.microsoft.com/office/drawing/2010/main" val="0"/>
+                  </a:ext>
+                </a:extLst>
+              </a:blip>
+              <a:srcRect l="12949" t="1" b="-1"/>
+              <a:stretch/>
+            </p:blipFill>
+            <p:spPr bwMode="auto">
+              <a:xfrm flipH="1">
+                <a:off x="3646177" y="4176143"/>
+                <a:ext cx="300263" cy="172463"/>
+              </a:xfrm>
+              <a:prstGeom prst="rect">
+                <a:avLst/>
+              </a:prstGeom>
+              <a:noFill/>
+              <a:extLst>
+                <a:ext uri="{909E8E84-426E-40dd-AFC4-6F175D3DCCD1}">
+                  <a14:hiddenFill xmlns:a14="http://schemas.microsoft.com/office/drawing/2010/main">
+                    <a:solidFill>
+                      <a:srgbClr val="FFFFFF"/>
+                    </a:solidFill>
+                  </a14:hiddenFill>
+                </a:ext>
+              </a:extLst>
+            </p:spPr>
+          </p:pic>
+        </p:grpSp>
+        <p:sp>
+          <p:nvSpPr>
+            <p:cNvPr id="114" name="Arc 113">
+              <a:extLst>
+                <a:ext uri="{FF2B5EF4-FFF2-40B4-BE49-F238E27FC236}">
+                  <a16:creationId xmlns:a16="http://schemas.microsoft.com/office/drawing/2014/main" xmlns="" id="{B4B4F5E7-F57D-4F7E-8710-F039DE83A35F}"/>
+                </a:ext>
+              </a:extLst>
+            </p:cNvPr>
+            <p:cNvSpPr/>
+            <p:nvPr/>
+          </p:nvSpPr>
+          <p:spPr>
+            <a:xfrm>
+              <a:off x="3997277" y="2827841"/>
+              <a:ext cx="593422" cy="225587"/>
+            </a:xfrm>
+            <a:prstGeom prst="arc">
+              <a:avLst>
+                <a:gd name="adj1" fmla="val 9628733"/>
+                <a:gd name="adj2" fmla="val 15347771"/>
+              </a:avLst>
+            </a:prstGeom>
+            <a:ln w="19050">
+              <a:prstDash val="sysDash"/>
+              <a:headEnd type="none" w="med" len="med"/>
+              <a:tailEnd type="arrow" w="sm" len="sm"/>
+            </a:ln>
+          </p:spPr>
+          <p:style>
+            <a:lnRef idx="1">
+              <a:schemeClr val="accent1"/>
+            </a:lnRef>
+            <a:fillRef idx="0">
+              <a:schemeClr val="accent1"/>
+            </a:fillRef>
+            <a:effectRef idx="0">
+              <a:schemeClr val="accent1"/>
+            </a:effectRef>
+            <a:fontRef idx="minor">
+              <a:schemeClr val="tx1"/>
+            </a:fontRef>
+          </p:style>
+          <p:txBody>
+            <a:bodyPr rtlCol="0" anchor="ctr"/>
+            <a:lstStyle/>
+            <a:p>
+              <a:pPr algn="ctr"/>
+              <a:endParaRPr lang="en-US"/>
+            </a:p>
+          </p:txBody>
+        </p:sp>
+        <p:sp>
+          <p:nvSpPr>
+            <p:cNvPr id="115" name="Arc 114">
+              <a:extLst>
+                <a:ext uri="{FF2B5EF4-FFF2-40B4-BE49-F238E27FC236}">
+                  <a16:creationId xmlns:a16="http://schemas.microsoft.com/office/drawing/2014/main" xmlns="" id="{84B77428-1CA5-49C5-8159-3D722A871D57}"/>
+                </a:ext>
+              </a:extLst>
+            </p:cNvPr>
+            <p:cNvSpPr/>
+            <p:nvPr/>
+          </p:nvSpPr>
+          <p:spPr>
+            <a:xfrm flipV="1">
+              <a:off x="3997277" y="3008939"/>
+              <a:ext cx="593422" cy="225587"/>
+            </a:xfrm>
+            <a:prstGeom prst="arc">
+              <a:avLst>
+                <a:gd name="adj1" fmla="val 9614978"/>
+                <a:gd name="adj2" fmla="val 15347771"/>
+              </a:avLst>
+            </a:prstGeom>
+            <a:ln w="19050">
+              <a:prstDash val="sysDash"/>
+              <a:headEnd type="none" w="med" len="med"/>
+              <a:tailEnd type="arrow" w="sm" len="sm"/>
+            </a:ln>
+          </p:spPr>
+          <p:style>
+            <a:lnRef idx="1">
+              <a:schemeClr val="accent1"/>
+            </a:lnRef>
+            <a:fillRef idx="0">
+              <a:schemeClr val="accent1"/>
+            </a:fillRef>
+            <a:effectRef idx="0">
+              <a:schemeClr val="accent1"/>
+            </a:effectRef>
+            <a:fontRef idx="minor">
+              <a:schemeClr val="tx1"/>
+            </a:fontRef>
+          </p:style>
+          <p:txBody>
+            <a:bodyPr rtlCol="0" anchor="ctr"/>
+            <a:lstStyle/>
+            <a:p>
+              <a:pPr algn="ctr"/>
+              <a:endParaRPr lang="en-US"/>
+            </a:p>
+          </p:txBody>
+        </p:sp>
+        <p:sp>
+          <p:nvSpPr>
+            <p:cNvPr id="116" name="TextBox 115">
+              <a:extLst>
+                <a:ext uri="{FF2B5EF4-FFF2-40B4-BE49-F238E27FC236}">
+                  <a16:creationId xmlns:a16="http://schemas.microsoft.com/office/drawing/2014/main" xmlns="" id="{F2A05923-B911-4640-A459-72539238E32A}"/>
+                </a:ext>
+              </a:extLst>
+            </p:cNvPr>
+            <p:cNvSpPr txBox="1"/>
+            <p:nvPr/>
+          </p:nvSpPr>
+          <p:spPr>
+            <a:xfrm>
+              <a:off x="4011422" y="2915458"/>
+              <a:ext cx="237566" cy="230832"/>
+            </a:xfrm>
+            <a:prstGeom prst="rect">
+              <a:avLst/>
+            </a:prstGeom>
+            <a:noFill/>
+          </p:spPr>
+          <p:txBody>
+            <a:bodyPr wrap="none" rtlCol="0">
+              <a:spAutoFit/>
+            </a:bodyPr>
+            <a:lstStyle/>
+            <a:p>
+              <a:r>
+                <a:rPr lang="en-US" sz="900" b="1" dirty="0">
+                  <a:solidFill>
+                    <a:srgbClr val="4A7EBB"/>
+                  </a:solidFill>
+                  <a:latin typeface="Calibri" panose="020F0502020204030204" pitchFamily="34" charset="0"/>
+                  <a:cs typeface="Calibri" panose="020F0502020204030204" pitchFamily="34" charset="0"/>
+                </a:rPr>
+                <a:t>?</a:t>
+              </a:r>
+            </a:p>
+          </p:txBody>
+        </p:sp>
+      </p:grpSp>
+      <p:sp>
+        <p:nvSpPr>
+          <p:cNvPr id="122" name="Google Shape;105;p1">
+            <a:extLst>
+              <a:ext uri="{FF2B5EF4-FFF2-40B4-BE49-F238E27FC236}">
+                <a16:creationId xmlns:a16="http://schemas.microsoft.com/office/drawing/2014/main" xmlns="" id="{7CA194D6-B5C4-4B18-8340-E8C571F9B2F0}"/>
+              </a:ext>
+            </a:extLst>
+          </p:cNvPr>
+          <p:cNvSpPr/>
+          <p:nvPr/>
+        </p:nvSpPr>
+        <p:spPr>
+          <a:xfrm rot="813467">
+            <a:off x="2283029" y="2407195"/>
+            <a:ext cx="1613784" cy="334598"/>
+          </a:xfrm>
+          <a:prstGeom prst="rightArrow">
+            <a:avLst>
+              <a:gd name="adj1" fmla="val 50000"/>
+              <a:gd name="adj2" fmla="val 50000"/>
+            </a:avLst>
+          </a:prstGeom>
+          <a:solidFill>
+            <a:srgbClr val="15374A"/>
+          </a:solidFill>
+          <a:ln w="9525" cap="flat" cmpd="sng">
+            <a:noFill/>
+            <a:prstDash val="solid"/>
+            <a:round/>
+            <a:headEnd type="none" w="sm" len="sm"/>
+            <a:tailEnd type="none" w="sm" len="sm"/>
+          </a:ln>
+        </p:spPr>
+        <p:txBody>
+          <a:bodyPr spcFirstLastPara="1" wrap="square" lIns="91425" tIns="45700" rIns="91425" bIns="45700" anchor="ctr" anchorCtr="0">
+            <a:noAutofit/>
+          </a:bodyPr>
+          <a:lstStyle/>
+          <a:p>
+            <a:pPr marL="0" marR="0" lvl="0" indent="0" algn="ctr" rtl="0">
+              <a:lnSpc>
+                <a:spcPct val="100000"/>
+              </a:lnSpc>
+              <a:spcBef>
+                <a:spcPts val="0"/>
+              </a:spcBef>
+              <a:spcAft>
+                <a:spcPts val="0"/>
+              </a:spcAft>
+              <a:buClr>
+                <a:schemeClr val="dk1"/>
+              </a:buClr>
+              <a:buSzPts val="1800"/>
+              <a:buFont typeface="Calibri"/>
+              <a:buNone/>
+            </a:pPr>
+            <a:endParaRPr sz="1800" b="0" i="0" u="none" strike="noStrike" cap="none">
+              <a:solidFill>
+                <a:srgbClr val="FFFFFF"/>
+              </a:solidFill>
+              <a:latin typeface="Arial"/>
+              <a:ea typeface="Arial"/>
+              <a:cs typeface="Arial"/>
+              <a:sym typeface="Arial"/>
+            </a:endParaRPr>
+          </a:p>
+        </p:txBody>
+      </p:sp>
+      <p:grpSp>
+        <p:nvGrpSpPr>
+          <p:cNvPr id="123" name="Group 122">
+            <a:extLst>
+              <a:ext uri="{FF2B5EF4-FFF2-40B4-BE49-F238E27FC236}">
+                <a16:creationId xmlns:a16="http://schemas.microsoft.com/office/drawing/2014/main" xmlns="" id="{F0222416-71FB-4B0A-B35E-411898B57501}"/>
+              </a:ext>
+            </a:extLst>
+          </p:cNvPr>
+          <p:cNvGrpSpPr/>
+          <p:nvPr/>
+        </p:nvGrpSpPr>
+        <p:grpSpPr>
+          <a:xfrm>
+            <a:off x="2132761" y="1482040"/>
+            <a:ext cx="544387" cy="726335"/>
+            <a:chOff x="1870075" y="4091432"/>
+            <a:chExt cx="615848" cy="821680"/>
+          </a:xfrm>
+        </p:grpSpPr>
+        <p:sp>
+          <p:nvSpPr>
+            <p:cNvPr id="124" name="Rectangle: Rounded Corners 84">
               <a:extLst>
                 <a:ext uri="{FF2B5EF4-FFF2-40B4-BE49-F238E27FC236}">
                   <a16:creationId xmlns:a16="http://schemas.microsoft.com/office/drawing/2014/main" xmlns="" id="{7BCE1F91-314A-4A9B-8A8D-E775EF4E6612}"/>
@@ -5732,7 +11526,7 @@
         </p:sp>
         <p:pic>
           <p:nvPicPr>
-            <p:cNvPr id="88" name="Picture 87">
+            <p:cNvPr id="125" name="Picture 124">
               <a:extLst>
                 <a:ext uri="{FF2B5EF4-FFF2-40B4-BE49-F238E27FC236}">
                   <a16:creationId xmlns:a16="http://schemas.microsoft.com/office/drawing/2014/main" xmlns="" id="{F6C7B362-76C6-4798-8102-62CB6E63AFE1}"/>
@@ -5762,7 +11556,7 @@
         </p:pic>
         <p:sp>
           <p:nvSpPr>
-            <p:cNvPr id="89" name="Oval 88">
+            <p:cNvPr id="126" name="Oval 125">
               <a:extLst>
                 <a:ext uri="{FF2B5EF4-FFF2-40B4-BE49-F238E27FC236}">
                   <a16:creationId xmlns:a16="http://schemas.microsoft.com/office/drawing/2014/main" xmlns="" id="{7825FA7A-DEDC-4555-848B-50CA147E1C59}"/>
@@ -5818,7 +11612,7 @@
       </p:grpSp>
       <p:sp>
         <p:nvSpPr>
-          <p:cNvPr id="90" name="Google Shape;105;p1">
+          <p:cNvPr id="127" name="Google Shape;105;p1">
             <a:extLst>
               <a:ext uri="{FF2B5EF4-FFF2-40B4-BE49-F238E27FC236}">
                 <a16:creationId xmlns:a16="http://schemas.microsoft.com/office/drawing/2014/main" xmlns="" id="{7CA194D6-B5C4-4B18-8340-E8C571F9B2F0}"/>
@@ -5830,8 +11624,8 @@
         </p:nvSpPr>
         <p:spPr>
           <a:xfrm rot="20786533" flipH="1">
-            <a:off x="5231468" y="2483135"/>
-            <a:ext cx="1441059" cy="334598"/>
+            <a:off x="5227167" y="2391272"/>
+            <a:ext cx="1749633" cy="334598"/>
           </a:xfrm>
           <a:prstGeom prst="rightArrow">
             <a:avLst>
@@ -5887,7 +11681,431 @@
       </p:sp>
       <p:sp>
         <p:nvSpPr>
-          <p:cNvPr id="91" name="Google Shape;106;p1">
+          <p:cNvPr id="130" name="Google Shape;91;p1">
+            <a:extLst>
+              <a:ext uri="{FF2B5EF4-FFF2-40B4-BE49-F238E27FC236}">
+                <a16:creationId xmlns:a16="http://schemas.microsoft.com/office/drawing/2014/main" xmlns="" id="{AD5DFFC3-2D58-4C9B-9B23-9CBAC35FD9F8}"/>
+              </a:ext>
+            </a:extLst>
+          </p:cNvPr>
+          <p:cNvSpPr/>
+          <p:nvPr/>
+        </p:nvSpPr>
+        <p:spPr>
+          <a:xfrm>
+            <a:off x="6803173" y="1922605"/>
+            <a:ext cx="1872929" cy="855299"/>
+          </a:xfrm>
+          <a:prstGeom prst="roundRect">
+            <a:avLst>
+              <a:gd name="adj" fmla="val 0"/>
+            </a:avLst>
+          </a:prstGeom>
+          <a:solidFill>
+            <a:srgbClr val="15374A"/>
+          </a:solidFill>
+          <a:ln w="9525" cap="flat" cmpd="sng">
+            <a:noFill/>
+            <a:prstDash val="solid"/>
+            <a:round/>
+            <a:headEnd type="none" w="sm" len="sm"/>
+            <a:tailEnd type="none" w="sm" len="sm"/>
+          </a:ln>
+        </p:spPr>
+        <p:txBody>
+          <a:bodyPr spcFirstLastPara="1" wrap="square" lIns="91425" tIns="45700" rIns="91425" bIns="45700" anchor="t" anchorCtr="0">
+            <a:noAutofit/>
+          </a:bodyPr>
+          <a:lstStyle/>
+          <a:p>
+            <a:pPr marL="115888" marR="0" lvl="0" indent="-115888" algn="l" rtl="0">
+              <a:spcBef>
+                <a:spcPts val="0"/>
+              </a:spcBef>
+              <a:spcAft>
+                <a:spcPts val="0"/>
+              </a:spcAft>
+              <a:buClr>
+                <a:srgbClr val="FFFFFF"/>
+              </a:buClr>
+              <a:buSzPts val="1200"/>
+              <a:buFont typeface="Arial"/>
+              <a:buChar char="•"/>
+            </a:pPr>
+            <a:r>
+              <a:rPr lang="en-US" sz="1200" dirty="0">
+                <a:solidFill>
+                  <a:srgbClr val="FFFFFF"/>
+                </a:solidFill>
+                <a:latin typeface="Calibri"/>
+                <a:ea typeface="Calibri"/>
+                <a:cs typeface="Calibri"/>
+                <a:sym typeface="Calibri"/>
+              </a:rPr>
+              <a:t>Species</a:t>
+            </a:r>
+          </a:p>
+          <a:p>
+            <a:pPr marL="115888" marR="0" lvl="0" indent="-115888" algn="l" rtl="0">
+              <a:spcBef>
+                <a:spcPts val="0"/>
+              </a:spcBef>
+              <a:spcAft>
+                <a:spcPts val="0"/>
+              </a:spcAft>
+              <a:buClr>
+                <a:srgbClr val="FFFFFF"/>
+              </a:buClr>
+              <a:buSzPts val="1200"/>
+              <a:buFont typeface="Arial"/>
+              <a:buChar char="•"/>
+            </a:pPr>
+            <a:r>
+              <a:rPr lang="en-US" sz="1200" dirty="0">
+                <a:solidFill>
+                  <a:srgbClr val="FFFFFF"/>
+                </a:solidFill>
+                <a:latin typeface="Calibri"/>
+                <a:ea typeface="Calibri"/>
+                <a:cs typeface="Calibri"/>
+                <a:sym typeface="Calibri"/>
+              </a:rPr>
+              <a:t>Genotype</a:t>
+            </a:r>
+          </a:p>
+          <a:p>
+            <a:pPr marL="115888" marR="0" lvl="0" indent="-115888" algn="l" rtl="0">
+              <a:spcBef>
+                <a:spcPts val="0"/>
+              </a:spcBef>
+              <a:spcAft>
+                <a:spcPts val="0"/>
+              </a:spcAft>
+              <a:buClr>
+                <a:srgbClr val="FFFFFF"/>
+              </a:buClr>
+              <a:buSzPts val="1200"/>
+              <a:buFont typeface="Arial"/>
+              <a:buChar char="•"/>
+            </a:pPr>
+            <a:r>
+              <a:rPr lang="en-US" sz="1200" dirty="0">
+                <a:solidFill>
+                  <a:srgbClr val="FFFFFF"/>
+                </a:solidFill>
+                <a:latin typeface="Calibri"/>
+                <a:ea typeface="Calibri"/>
+                <a:cs typeface="Calibri"/>
+                <a:sym typeface="Calibri"/>
+              </a:rPr>
+              <a:t>Age</a:t>
+            </a:r>
+          </a:p>
+          <a:p>
+            <a:pPr marL="115888" marR="0" lvl="0" indent="-115888" algn="l" rtl="0">
+              <a:spcBef>
+                <a:spcPts val="0"/>
+              </a:spcBef>
+              <a:spcAft>
+                <a:spcPts val="0"/>
+              </a:spcAft>
+              <a:buClr>
+                <a:srgbClr val="FFFFFF"/>
+              </a:buClr>
+              <a:buSzPts val="1200"/>
+              <a:buFont typeface="Arial"/>
+              <a:buChar char="•"/>
+            </a:pPr>
+            <a:r>
+              <a:rPr lang="en-US" sz="1200" dirty="0">
+                <a:solidFill>
+                  <a:srgbClr val="FFFFFF"/>
+                </a:solidFill>
+                <a:latin typeface="Calibri"/>
+                <a:ea typeface="Calibri"/>
+                <a:cs typeface="Calibri"/>
+                <a:sym typeface="Calibri"/>
+              </a:rPr>
+              <a:t>Weight</a:t>
+            </a:r>
+          </a:p>
+          <a:p>
+            <a:pPr marL="115888" marR="0" lvl="0" indent="-115888" algn="l" rtl="0">
+              <a:spcBef>
+                <a:spcPts val="0"/>
+              </a:spcBef>
+              <a:spcAft>
+                <a:spcPts val="0"/>
+              </a:spcAft>
+              <a:buClr>
+                <a:srgbClr val="FFFFFF"/>
+              </a:buClr>
+              <a:buSzPts val="1200"/>
+              <a:buFont typeface="Arial"/>
+              <a:buChar char="•"/>
+            </a:pPr>
+            <a:endParaRPr sz="1200" dirty="0">
+              <a:solidFill>
+                <a:srgbClr val="FFFFFF"/>
+              </a:solidFill>
+              <a:latin typeface="Calibri"/>
+              <a:ea typeface="Calibri"/>
+              <a:cs typeface="Calibri"/>
+              <a:sym typeface="Calibri"/>
+            </a:endParaRPr>
+          </a:p>
+          <a:p>
+            <a:pPr marL="0" marR="0" lvl="0" indent="0" algn="l" rtl="0">
+              <a:lnSpc>
+                <a:spcPct val="100000"/>
+              </a:lnSpc>
+              <a:spcBef>
+                <a:spcPts val="0"/>
+              </a:spcBef>
+              <a:spcAft>
+                <a:spcPts val="0"/>
+              </a:spcAft>
+              <a:buClr>
+                <a:schemeClr val="dk1"/>
+              </a:buClr>
+              <a:buSzPts val="1200"/>
+              <a:buFont typeface="Calibri"/>
+              <a:buNone/>
+            </a:pPr>
+            <a:endParaRPr sz="1200" b="0" i="0" u="none" strike="noStrike" cap="none" dirty="0">
+              <a:solidFill>
+                <a:srgbClr val="FFFFFF"/>
+              </a:solidFill>
+              <a:latin typeface="Calibri"/>
+              <a:ea typeface="Calibri"/>
+              <a:cs typeface="Calibri"/>
+              <a:sym typeface="Calibri"/>
+            </a:endParaRPr>
+          </a:p>
+        </p:txBody>
+      </p:sp>
+      <p:sp>
+        <p:nvSpPr>
+          <p:cNvPr id="131" name="Google Shape;90;p1">
+            <a:extLst>
+              <a:ext uri="{FF2B5EF4-FFF2-40B4-BE49-F238E27FC236}">
+                <a16:creationId xmlns:a16="http://schemas.microsoft.com/office/drawing/2014/main" xmlns="" id="{EEF72B0E-9CCF-4E7F-B810-DC35A08F7578}"/>
+              </a:ext>
+            </a:extLst>
+          </p:cNvPr>
+          <p:cNvSpPr txBox="1"/>
+          <p:nvPr/>
+        </p:nvSpPr>
+        <p:spPr>
+          <a:xfrm>
+            <a:off x="6930969" y="1421242"/>
+            <a:ext cx="1758372" cy="492443"/>
+          </a:xfrm>
+          <a:prstGeom prst="rect">
+            <a:avLst/>
+          </a:prstGeom>
+          <a:noFill/>
+          <a:ln>
+            <a:noFill/>
+          </a:ln>
+        </p:spPr>
+        <p:txBody>
+          <a:bodyPr spcFirstLastPara="1" wrap="square" lIns="0" tIns="0" rIns="0" bIns="0" anchor="t" anchorCtr="0">
+            <a:spAutoFit/>
+          </a:bodyPr>
+          <a:lstStyle/>
+          <a:p>
+            <a:pPr marL="0" marR="0" lvl="0" indent="0" algn="l" rtl="0">
+              <a:lnSpc>
+                <a:spcPct val="100000"/>
+              </a:lnSpc>
+              <a:spcBef>
+                <a:spcPts val="0"/>
+              </a:spcBef>
+              <a:spcAft>
+                <a:spcPts val="0"/>
+              </a:spcAft>
+              <a:buClr>
+                <a:srgbClr val="15374A"/>
+              </a:buClr>
+              <a:buSzPts val="1200"/>
+              <a:buFont typeface="Calibri"/>
+              <a:buNone/>
+            </a:pPr>
+            <a:r>
+              <a:rPr lang="en-US" sz="1600" b="1" i="0" u="none" strike="noStrike" cap="none" dirty="0">
+                <a:solidFill>
+                  <a:srgbClr val="15374A"/>
+                </a:solidFill>
+                <a:latin typeface="Calibri"/>
+                <a:ea typeface="Calibri"/>
+                <a:cs typeface="Calibri"/>
+                <a:sym typeface="Calibri"/>
+              </a:rPr>
+              <a:t>Experimental </a:t>
+            </a:r>
+          </a:p>
+          <a:p>
+            <a:pPr marL="0" marR="0" lvl="0" indent="0" algn="l" rtl="0">
+              <a:lnSpc>
+                <a:spcPct val="100000"/>
+              </a:lnSpc>
+              <a:spcBef>
+                <a:spcPts val="0"/>
+              </a:spcBef>
+              <a:spcAft>
+                <a:spcPts val="0"/>
+              </a:spcAft>
+              <a:buClr>
+                <a:srgbClr val="15374A"/>
+              </a:buClr>
+              <a:buSzPts val="1200"/>
+              <a:buFont typeface="Calibri"/>
+              <a:buNone/>
+            </a:pPr>
+            <a:r>
+              <a:rPr lang="en-US" sz="1600" b="1" i="0" u="none" strike="noStrike" cap="none" dirty="0">
+                <a:solidFill>
+                  <a:srgbClr val="15374A"/>
+                </a:solidFill>
+                <a:latin typeface="Calibri"/>
+                <a:ea typeface="Calibri"/>
+                <a:cs typeface="Calibri"/>
+                <a:sym typeface="Calibri"/>
+              </a:rPr>
+              <a:t>Subjects </a:t>
+            </a:r>
+          </a:p>
+        </p:txBody>
+      </p:sp>
+      <p:grpSp>
+        <p:nvGrpSpPr>
+          <p:cNvPr id="132" name="Group 131">
+            <a:extLst>
+              <a:ext uri="{FF2B5EF4-FFF2-40B4-BE49-F238E27FC236}">
+                <a16:creationId xmlns:a16="http://schemas.microsoft.com/office/drawing/2014/main" xmlns="" id="{AFB23BE8-9E97-4107-97C7-5AFC1D8797CD}"/>
+              </a:ext>
+            </a:extLst>
+          </p:cNvPr>
+          <p:cNvGrpSpPr/>
+          <p:nvPr/>
+        </p:nvGrpSpPr>
+        <p:grpSpPr>
+          <a:xfrm>
+            <a:off x="7892775" y="1678372"/>
+            <a:ext cx="814029" cy="444559"/>
+            <a:chOff x="5823050" y="3623414"/>
+            <a:chExt cx="814029" cy="444559"/>
+          </a:xfrm>
+        </p:grpSpPr>
+        <p:sp>
+          <p:nvSpPr>
+            <p:cNvPr id="133" name="Rectangle: Rounded Corners 65">
+              <a:extLst>
+                <a:ext uri="{FF2B5EF4-FFF2-40B4-BE49-F238E27FC236}">
+                  <a16:creationId xmlns:a16="http://schemas.microsoft.com/office/drawing/2014/main" xmlns="" id="{BB403B0D-EF05-44C9-856D-73B02CCE82A0}"/>
+                </a:ext>
+              </a:extLst>
+            </p:cNvPr>
+            <p:cNvSpPr/>
+            <p:nvPr/>
+          </p:nvSpPr>
+          <p:spPr>
+            <a:xfrm>
+              <a:off x="5823050" y="3667135"/>
+              <a:ext cx="814029" cy="400838"/>
+            </a:xfrm>
+            <a:prstGeom prst="roundRect">
+              <a:avLst>
+                <a:gd name="adj" fmla="val 10731"/>
+              </a:avLst>
+            </a:prstGeom>
+            <a:solidFill>
+              <a:schemeClr val="bg2">
+                <a:lumMod val="20000"/>
+                <a:lumOff val="80000"/>
+              </a:schemeClr>
+            </a:solidFill>
+            <a:ln>
+              <a:solidFill>
+                <a:srgbClr val="0070C0"/>
+              </a:solidFill>
+            </a:ln>
+          </p:spPr>
+          <p:style>
+            <a:lnRef idx="2">
+              <a:schemeClr val="accent1">
+                <a:shade val="50000"/>
+              </a:schemeClr>
+            </a:lnRef>
+            <a:fillRef idx="1">
+              <a:schemeClr val="accent1"/>
+            </a:fillRef>
+            <a:effectRef idx="0">
+              <a:schemeClr val="accent1"/>
+            </a:effectRef>
+            <a:fontRef idx="minor">
+              <a:schemeClr val="lt1"/>
+            </a:fontRef>
+          </p:style>
+          <p:txBody>
+            <a:bodyPr rtlCol="0" anchor="ctr"/>
+            <a:lstStyle/>
+            <a:p>
+              <a:pPr algn="ctr"/>
+              <a:endParaRPr lang="en-US"/>
+            </a:p>
+          </p:txBody>
+        </p:sp>
+        <p:pic>
+          <p:nvPicPr>
+            <p:cNvPr id="134" name="Picture 4" descr="Image result for mouse icon">
+              <a:extLst>
+                <a:ext uri="{FF2B5EF4-FFF2-40B4-BE49-F238E27FC236}">
+                  <a16:creationId xmlns:a16="http://schemas.microsoft.com/office/drawing/2014/main" xmlns="" id="{938554CE-F93A-44B7-9C58-4CF5EF5C56D4}"/>
+                </a:ext>
+              </a:extLst>
+            </p:cNvPr>
+            <p:cNvPicPr>
+              <a:picLocks noChangeAspect="1" noChangeArrowheads="1"/>
+            </p:cNvPicPr>
+            <p:nvPr/>
+          </p:nvPicPr>
+          <p:blipFill rotWithShape="1">
+            <a:blip r:embed="rId5">
+              <a:extLst>
+                <a:ext uri="{28A0092B-C50C-407E-A947-70E740481C1C}">
+                  <a14:useLocalDpi xmlns:a14="http://schemas.microsoft.com/office/drawing/2010/main" val="0"/>
+                </a:ext>
+              </a:extLst>
+            </a:blip>
+            <a:srcRect l="10312"/>
+            <a:stretch/>
+          </p:blipFill>
+          <p:spPr bwMode="auto">
+            <a:xfrm flipH="1">
+              <a:off x="5888677" y="3623414"/>
+              <a:ext cx="717700" cy="400110"/>
+            </a:xfrm>
+            <a:prstGeom prst="rect">
+              <a:avLst/>
+            </a:prstGeom>
+            <a:noFill/>
+            <a:extLst>
+              <a:ext uri="{909E8E84-426E-40dd-AFC4-6F175D3DCCD1}">
+                <a14:hiddenFill xmlns:a14="http://schemas.microsoft.com/office/drawing/2010/main">
+                  <a:solidFill>
+                    <a:srgbClr val="FFFFFF"/>
+                  </a:solidFill>
+                </a14:hiddenFill>
+              </a:ext>
+            </a:extLst>
+          </p:spPr>
+        </p:pic>
+      </p:grpSp>
+      <p:sp>
+        <p:nvSpPr>
+          <p:cNvPr id="135" name="Google Shape;106;p1">
             <a:extLst>
               <a:ext uri="{FF2B5EF4-FFF2-40B4-BE49-F238E27FC236}">
                 <a16:creationId xmlns:a16="http://schemas.microsoft.com/office/drawing/2014/main" xmlns="" id="{E05F7D88-50A6-4383-BB16-EB5B35AC27C1}"/>
@@ -5898,9 +12116,9 @@
           <p:nvPr/>
         </p:nvSpPr>
         <p:spPr>
-          <a:xfrm rot="13159153" flipH="1">
-            <a:off x="5265149" y="4006707"/>
-            <a:ext cx="935616" cy="334598"/>
+          <a:xfrm rot="1341961" flipH="1">
+            <a:off x="5691086" y="3808028"/>
+            <a:ext cx="949668" cy="334598"/>
           </a:xfrm>
           <a:prstGeom prst="rightArrow">
             <a:avLst>
@@ -5954,10 +12172,393 @@
           </a:p>
         </p:txBody>
       </p:sp>
+      <p:sp>
+        <p:nvSpPr>
+          <p:cNvPr id="136" name="Google Shape;92;p1">
+            <a:extLst>
+              <a:ext uri="{FF2B5EF4-FFF2-40B4-BE49-F238E27FC236}">
+                <a16:creationId xmlns:a16="http://schemas.microsoft.com/office/drawing/2014/main" xmlns="" id="{FACF2BB3-A2CF-4345-BFAD-509D0EFA7437}"/>
+              </a:ext>
+            </a:extLst>
+          </p:cNvPr>
+          <p:cNvSpPr txBox="1"/>
+          <p:nvPr/>
+        </p:nvSpPr>
+        <p:spPr>
+          <a:xfrm>
+            <a:off x="1900130" y="4385644"/>
+            <a:ext cx="1357328" cy="270843"/>
+          </a:xfrm>
+          <a:prstGeom prst="rect">
+            <a:avLst/>
+          </a:prstGeom>
+          <a:noFill/>
+          <a:ln>
+            <a:noFill/>
+          </a:ln>
+        </p:spPr>
+        <p:txBody>
+          <a:bodyPr spcFirstLastPara="1" wrap="square" lIns="0" tIns="0" rIns="0" bIns="0" anchor="t" anchorCtr="0">
+            <a:spAutoFit/>
+          </a:bodyPr>
+          <a:lstStyle/>
+          <a:p>
+            <a:pPr marL="0" marR="0" lvl="0" indent="0" algn="l" rtl="0">
+              <a:lnSpc>
+                <a:spcPct val="100000"/>
+              </a:lnSpc>
+              <a:spcBef>
+                <a:spcPts val="0"/>
+              </a:spcBef>
+              <a:spcAft>
+                <a:spcPts val="0"/>
+              </a:spcAft>
+              <a:buClr>
+                <a:srgbClr val="15374A"/>
+              </a:buClr>
+              <a:buSzPts val="1200"/>
+              <a:buFont typeface="Calibri"/>
+              <a:buNone/>
+            </a:pPr>
+            <a:r>
+              <a:rPr lang="en-US" sz="1600" b="1" i="0" u="none" strike="noStrike" cap="none" dirty="0" smtClean="0">
+                <a:solidFill>
+                  <a:srgbClr val="BE5D23"/>
+                </a:solidFill>
+                <a:latin typeface="Calibri"/>
+                <a:ea typeface="Calibri"/>
+                <a:cs typeface="Calibri"/>
+                <a:sym typeface="Calibri"/>
+              </a:rPr>
+              <a:t>Extensions</a:t>
+            </a:r>
+            <a:endParaRPr sz="1600" b="1" i="0" u="none" strike="noStrike" cap="none" dirty="0">
+              <a:solidFill>
+                <a:srgbClr val="BE5D23"/>
+              </a:solidFill>
+              <a:latin typeface="Calibri"/>
+              <a:ea typeface="Calibri"/>
+              <a:cs typeface="Calibri"/>
+              <a:sym typeface="Calibri"/>
+            </a:endParaRPr>
+          </a:p>
+        </p:txBody>
+      </p:sp>
+      <p:sp>
+        <p:nvSpPr>
+          <p:cNvPr id="137" name="Google Shape;93;p1">
+            <a:extLst>
+              <a:ext uri="{FF2B5EF4-FFF2-40B4-BE49-F238E27FC236}">
+                <a16:creationId xmlns:a16="http://schemas.microsoft.com/office/drawing/2014/main" xmlns="" id="{0D7CCA4B-A9C5-4184-AE8B-08B92D1D5EB2}"/>
+              </a:ext>
+            </a:extLst>
+          </p:cNvPr>
+          <p:cNvSpPr/>
+          <p:nvPr/>
+        </p:nvSpPr>
+        <p:spPr>
+          <a:xfrm>
+            <a:off x="1911574" y="4616126"/>
+            <a:ext cx="5304580" cy="482776"/>
+          </a:xfrm>
+          <a:prstGeom prst="roundRect">
+            <a:avLst>
+              <a:gd name="adj" fmla="val 0"/>
+            </a:avLst>
+          </a:prstGeom>
+          <a:solidFill>
+            <a:srgbClr val="BE5D23"/>
+          </a:solidFill>
+          <a:ln w="9525" cap="flat" cmpd="sng">
+            <a:noFill/>
+            <a:prstDash val="solid"/>
+            <a:round/>
+            <a:headEnd type="none" w="sm" len="sm"/>
+            <a:tailEnd type="none" w="sm" len="sm"/>
+          </a:ln>
+        </p:spPr>
+        <p:txBody>
+          <a:bodyPr spcFirstLastPara="1" wrap="square" lIns="91425" tIns="45700" rIns="91425" bIns="45700" anchor="t" anchorCtr="0">
+            <a:noAutofit/>
+          </a:bodyPr>
+          <a:lstStyle/>
+          <a:p>
+            <a:pPr marL="154512" lvl="0" indent="-146046" defTabSz="914400">
+              <a:buClr>
+                <a:srgbClr val="FFFFFF"/>
+              </a:buClr>
+              <a:buSzPts val="1100"/>
+              <a:buFontTx/>
+              <a:buChar char="•"/>
+              <a:defRPr/>
+            </a:pPr>
+            <a:r>
+              <a:rPr lang="en-US" sz="1200" kern="0" dirty="0">
+                <a:solidFill>
+                  <a:srgbClr val="FFFFFF"/>
+                </a:solidFill>
+              </a:rPr>
+              <a:t>New data types and modalities</a:t>
+            </a:r>
+          </a:p>
+          <a:p>
+            <a:pPr marL="154512" indent="-146046" defTabSz="914400">
+              <a:buClr>
+                <a:srgbClr val="FFFFFF"/>
+              </a:buClr>
+              <a:buSzPts val="1100"/>
+              <a:buFontTx/>
+              <a:buChar char="•"/>
+            </a:pPr>
+            <a:r>
+              <a:rPr lang="en-US" sz="1200" kern="0" dirty="0">
+                <a:solidFill>
+                  <a:srgbClr val="FFFFFF"/>
+                </a:solidFill>
+              </a:rPr>
+              <a:t>Acquisition, processing, analysis, and experiment specific </a:t>
+            </a:r>
+            <a:r>
+              <a:rPr lang="en-US" sz="1200" kern="0" dirty="0" smtClean="0">
+                <a:solidFill>
+                  <a:srgbClr val="FFFFFF"/>
+                </a:solidFill>
+              </a:rPr>
+              <a:t>metadata</a:t>
+            </a:r>
+            <a:endParaRPr lang="en-US" sz="1200" kern="0" dirty="0">
+              <a:solidFill>
+                <a:srgbClr val="FFFFFF"/>
+              </a:solidFill>
+            </a:endParaRPr>
+          </a:p>
+        </p:txBody>
+      </p:sp>
+      <p:grpSp>
+        <p:nvGrpSpPr>
+          <p:cNvPr id="138" name="Group 137"/>
+          <p:cNvGrpSpPr>
+            <a:grpSpLocks noChangeAspect="1"/>
+          </p:cNvGrpSpPr>
+          <p:nvPr/>
+        </p:nvGrpSpPr>
+        <p:grpSpPr>
+          <a:xfrm>
+            <a:off x="6811515" y="4427710"/>
+            <a:ext cx="614473" cy="614817"/>
+            <a:chOff x="10574871" y="4381181"/>
+            <a:chExt cx="1060111" cy="1060704"/>
+          </a:xfrm>
+        </p:grpSpPr>
+        <p:sp>
+          <p:nvSpPr>
+            <p:cNvPr id="139" name="Google Shape;88;p15">
+              <a:extLst>
+                <a:ext uri="{FF2B5EF4-FFF2-40B4-BE49-F238E27FC236}">
+                  <a16:creationId xmlns="" xmlns:a16="http://schemas.microsoft.com/office/drawing/2014/main" id="{D84E954B-B2FE-44A2-B042-A90A2EEF2517}"/>
+                </a:ext>
+              </a:extLst>
+            </p:cNvPr>
+            <p:cNvSpPr/>
+            <p:nvPr/>
+          </p:nvSpPr>
+          <p:spPr>
+            <a:xfrm>
+              <a:off x="10574871" y="4381181"/>
+              <a:ext cx="1060111" cy="1060704"/>
+            </a:xfrm>
+            <a:prstGeom prst="roundRect">
+              <a:avLst>
+                <a:gd name="adj" fmla="val 10731"/>
+              </a:avLst>
+            </a:prstGeom>
+            <a:solidFill>
+              <a:schemeClr val="bg1">
+                <a:lumMod val="95000"/>
+              </a:schemeClr>
+            </a:solidFill>
+            <a:ln w="25400" cap="flat" cmpd="sng">
+              <a:solidFill>
+                <a:srgbClr val="70360A"/>
+              </a:solidFill>
+              <a:prstDash val="solid"/>
+              <a:round/>
+              <a:headEnd type="none" w="sm" len="sm"/>
+              <a:tailEnd type="none" w="sm" len="sm"/>
+            </a:ln>
+          </p:spPr>
+          <p:txBody>
+            <a:bodyPr spcFirstLastPara="1" wrap="square" lIns="121900" tIns="60933" rIns="121900" bIns="60933" anchor="ctr" anchorCtr="0">
+              <a:noAutofit/>
+            </a:bodyPr>
+            <a:lstStyle/>
+            <a:p>
+              <a:pPr marL="0" marR="0" lvl="0" indent="0" algn="ctr" defTabSz="914400" eaLnBrk="1" fontAlgn="auto" latinLnBrk="0" hangingPunct="1">
+                <a:lnSpc>
+                  <a:spcPct val="100000"/>
+                </a:lnSpc>
+                <a:spcBef>
+                  <a:spcPts val="0"/>
+                </a:spcBef>
+                <a:spcAft>
+                  <a:spcPts val="0"/>
+                </a:spcAft>
+                <a:buClrTx/>
+                <a:buSzTx/>
+                <a:buFontTx/>
+                <a:buNone/>
+                <a:tabLst/>
+                <a:defRPr/>
+              </a:pPr>
+              <a:endParaRPr kumimoji="0" sz="2000" b="0" i="0" u="none" strike="noStrike" kern="0" cap="none" spc="0" normalizeH="0" baseline="0" noProof="0">
+                <a:ln>
+                  <a:noFill/>
+                </a:ln>
+                <a:solidFill>
+                  <a:sysClr val="window" lastClr="FFFFFF"/>
+                </a:solidFill>
+                <a:effectLst/>
+                <a:uLnTx/>
+                <a:uFillTx/>
+                <a:latin typeface="Arial"/>
+                <a:ea typeface="Arial"/>
+                <a:cs typeface="Arial"/>
+                <a:sym typeface="Arial"/>
+              </a:endParaRPr>
+            </a:p>
+          </p:txBody>
+        </p:sp>
+        <p:pic>
+          <p:nvPicPr>
+            <p:cNvPr id="140" name="Picture 139" descr="nwb-extensions-catalog-logo.png"/>
+            <p:cNvPicPr>
+              <a:picLocks noChangeAspect="1"/>
+            </p:cNvPicPr>
+            <p:nvPr/>
+          </p:nvPicPr>
+          <p:blipFill>
+            <a:blip r:embed="rId7">
+              <a:extLst>
+                <a:ext uri="{28A0092B-C50C-407E-A947-70E740481C1C}">
+                  <a14:useLocalDpi xmlns:a14="http://schemas.microsoft.com/office/drawing/2010/main" val="0"/>
+                </a:ext>
+              </a:extLst>
+            </a:blip>
+            <a:stretch>
+              <a:fillRect/>
+            </a:stretch>
+          </p:blipFill>
+          <p:spPr>
+            <a:xfrm>
+              <a:off x="10606087" y="4518498"/>
+              <a:ext cx="991328" cy="788831"/>
+            </a:xfrm>
+            <a:prstGeom prst="rect">
+              <a:avLst/>
+            </a:prstGeom>
+            <a:effectLst/>
+          </p:spPr>
+        </p:pic>
+      </p:grpSp>
+      <p:sp>
+        <p:nvSpPr>
+          <p:cNvPr id="141" name="TextBox 140"/>
+          <p:cNvSpPr txBox="1"/>
+          <p:nvPr/>
+        </p:nvSpPr>
+        <p:spPr>
+          <a:xfrm>
+            <a:off x="7440765" y="4303868"/>
+            <a:ext cx="184666" cy="369332"/>
+          </a:xfrm>
+          <a:prstGeom prst="rect">
+            <a:avLst/>
+          </a:prstGeom>
+          <a:noFill/>
+        </p:spPr>
+        <p:txBody>
+          <a:bodyPr wrap="none" rtlCol="0">
+            <a:spAutoFit/>
+          </a:bodyPr>
+          <a:lstStyle/>
+          <a:p>
+            <a:endParaRPr lang="en-US" dirty="0"/>
+          </a:p>
+        </p:txBody>
+      </p:sp>
+      <p:sp>
+        <p:nvSpPr>
+          <p:cNvPr id="142" name="Google Shape;105;p1">
+            <a:extLst>
+              <a:ext uri="{FF2B5EF4-FFF2-40B4-BE49-F238E27FC236}">
+                <a16:creationId xmlns:a16="http://schemas.microsoft.com/office/drawing/2014/main" xmlns="" id="{D1DE1C64-4F2A-4519-BBA3-A55B0CC6FBC4}"/>
+              </a:ext>
+            </a:extLst>
+          </p:cNvPr>
+          <p:cNvSpPr/>
+          <p:nvPr/>
+        </p:nvSpPr>
+        <p:spPr>
+          <a:xfrm rot="16200000" flipV="1">
+            <a:off x="4121635" y="4034414"/>
+            <a:ext cx="865570" cy="334598"/>
+          </a:xfrm>
+          <a:prstGeom prst="rightArrow">
+            <a:avLst>
+              <a:gd name="adj1" fmla="val 50000"/>
+              <a:gd name="adj2" fmla="val 50000"/>
+            </a:avLst>
+          </a:prstGeom>
+          <a:solidFill>
+            <a:srgbClr val="BE5D23"/>
+          </a:solidFill>
+          <a:ln w="9525" cap="flat" cmpd="sng">
+            <a:noFill/>
+            <a:prstDash val="solid"/>
+            <a:round/>
+            <a:headEnd type="none" w="sm" len="sm"/>
+            <a:tailEnd type="none" w="sm" len="sm"/>
+          </a:ln>
+        </p:spPr>
+        <p:txBody>
+          <a:bodyPr spcFirstLastPara="1" wrap="square" lIns="91425" tIns="45700" rIns="91425" bIns="45700" anchor="ctr" anchorCtr="0">
+            <a:noAutofit/>
+          </a:bodyPr>
+          <a:lstStyle/>
+          <a:p>
+            <a:pPr marL="0" marR="0" lvl="0" indent="0" algn="ctr" rtl="0">
+              <a:lnSpc>
+                <a:spcPct val="100000"/>
+              </a:lnSpc>
+              <a:spcBef>
+                <a:spcPts val="0"/>
+              </a:spcBef>
+              <a:spcAft>
+                <a:spcPts val="0"/>
+              </a:spcAft>
+              <a:buClr>
+                <a:schemeClr val="dk1"/>
+              </a:buClr>
+              <a:buSzPts val="1800"/>
+              <a:buFont typeface="Calibri"/>
+              <a:buNone/>
+            </a:pPr>
+            <a:endParaRPr sz="1800" b="0" i="0" u="none" strike="noStrike" cap="none">
+              <a:solidFill>
+                <a:srgbClr val="FFFFFF"/>
+              </a:solidFill>
+              <a:latin typeface="Arial"/>
+              <a:ea typeface="Arial"/>
+              <a:cs typeface="Arial"/>
+              <a:sym typeface="Arial"/>
+            </a:endParaRPr>
+          </a:p>
+        </p:txBody>
+      </p:sp>
     </p:spTree>
     <p:extLst>
       <p:ext uri="{BB962C8B-B14F-4D97-AF65-F5344CB8AC3E}">
-        <p14:creationId xmlns:p14="http://schemas.microsoft.com/office/powerpoint/2010/main" val="3808722017"/>
+        <p14:creationId xmlns:p14="http://schemas.microsoft.com/office/powerpoint/2010/main" val="3892167840"/>
       </p:ext>
     </p:extLst>
   </p:cSld>
